--- a/docs/발표자료/연차ON-프로젝트-소개-2026-09-11.pptx
+++ b/docs/발표자료/연차ON-프로젝트-소개-2026-09-11.pptx
@@ -22,6 +22,7 @@
     <p:sldId id="270" r:id="rId22"/>
     <p:sldId id="271" r:id="rId23"/>
     <p:sldId id="272" r:id="rId24"/>
+    <p:sldId id="273" r:id="rId25"/>
   </p:sldIdLst>
   <p:sldSz cx="12191999" cy="6858000" type="screen4x3"/>
   <p:notesSz cx="6858000" cy="9144000"/>
@@ -768,12 +769,22 @@
           </a:p>
           <a:p>
             <a:r>
-              <a:t>CLAUDE.md, 계층 구조</a:t>
-            </a:r>
-          </a:p>
-          <a:p>
-            <a:r>
-              <a:t>backend/src/main/java/com/mlsoft/backend/domain/</a:t>
+              <a:t>backend/.../holiday/client/HolidayApiClient.java</a:t>
+            </a:r>
+          </a:p>
+          <a:p>
+            <a:r>
+              <a:t>security/CustomOAuth2UserService.java</a:t>
+            </a:r>
+          </a:p>
+          <a:p>
+            <a:r>
+              <a:t>email/service/MailSenderResolver.java</a:t>
+            </a:r>
+          </a:p>
+          <a:p>
+            <a:r>
+              <a:t>LeaveScheduler.syncHolidaysForNewYear (0 5 0 1 1 *)</a:t>
             </a:r>
           </a:p>
         </p:txBody>
@@ -848,17 +859,12 @@
           </a:p>
           <a:p>
             <a:r>
-              <a:t>CLAUDE.md, 프론트엔드 데이터 흐름</a:t>
-            </a:r>
-          </a:p>
-          <a:p>
-            <a:r>
-              <a:t>frontend/src/pages/</a:t>
-            </a:r>
-          </a:p>
-          <a:p>
-            <a:r>
-              <a:t>frontend/src/api/index.js</a:t>
+              <a:t>CLAUDE.md, 계층 구조</a:t>
+            </a:r>
+          </a:p>
+          <a:p>
+            <a:r>
+              <a:t>backend/src/main/java/com/mlsoft/backend/domain/</a:t>
             </a:r>
           </a:p>
         </p:txBody>
@@ -933,12 +939,17 @@
           </a:p>
           <a:p>
             <a:r>
-              <a:t>backend/build.gradle</a:t>
-            </a:r>
-          </a:p>
-          <a:p>
-            <a:r>
-              <a:t>docs/12-남은-작업.md, 현재 상태 스냅샷</a:t>
+              <a:t>CLAUDE.md, 프론트엔드 데이터 흐름</a:t>
+            </a:r>
+          </a:p>
+          <a:p>
+            <a:r>
+              <a:t>frontend/src/pages/</a:t>
+            </a:r>
+          </a:p>
+          <a:p>
+            <a:r>
+              <a:t>frontend/src/api/index.js</a:t>
             </a:r>
           </a:p>
         </p:txBody>
@@ -1013,7 +1024,7 @@
           </a:p>
           <a:p>
             <a:r>
-              <a:t>frontend/package.json</a:t>
+              <a:t>backend/build.gradle</a:t>
             </a:r>
           </a:p>
           <a:p>
@@ -1093,22 +1104,12 @@
           </a:p>
           <a:p>
             <a:r>
-              <a:t>코드 실측: HTTP 메서드 매핑 88개, 테스트 제외 페이지 17개, schema.sql CREATE TABLE 21개, 정책 설정 ACTIVE 12개</a:t>
+              <a:t>frontend/package.json</a:t>
             </a:r>
           </a:p>
           <a:p>
             <a:r>
               <a:t>docs/12-남은-작업.md, 현재 상태 스냅샷</a:t>
-            </a:r>
-          </a:p>
-          <a:p>
-            <a:r>
-              <a:t>Dockerfile</a:t>
-            </a:r>
-          </a:p>
-          <a:p>
-            <a:r>
-              <a:t>docker-compose.prod.yml</a:t>
             </a:r>
           </a:p>
         </p:txBody>
@@ -1134,6 +1135,96 @@
 </file>
 
 <file path=ppt/notesSlides/notesSlide17.xml><?xml version="1.0" encoding="utf-8"?>
+<p:notes xmlns:a="http://schemas.openxmlformats.org/drawingml/2006/main" xmlns:p="http://schemas.openxmlformats.org/presentationml/2006/main" xmlns:r="http://schemas.openxmlformats.org/officeDocument/2006/relationships">
+  <p:cSld>
+    <p:spTree>
+      <p:nvGrpSpPr>
+        <p:cNvPr id="1" name=""/>
+        <p:cNvGrpSpPr/>
+        <p:nvPr/>
+      </p:nvGrpSpPr>
+      <p:grpSpPr>
+        <a:xfrm>
+          <a:off x="0" y="0"/>
+          <a:ext cx="0" cy="0"/>
+          <a:chOff x="0" y="0"/>
+          <a:chExt cx="0" cy="0"/>
+        </a:xfrm>
+      </p:grpSpPr>
+      <p:sp>
+        <p:nvSpPr>
+          <p:cNvPr id="2" name="Slide Image Placeholder 1"/>
+          <p:cNvSpPr>
+            <a:spLocks noGrp="1"/>
+          </p:cNvSpPr>
+          <p:nvPr>
+            <p:ph type="sldImg" idx="2"/>
+          </p:nvPr>
+        </p:nvSpPr>
+        <p:spPr/>
+      </p:sp>
+      <p:sp>
+        <p:nvSpPr>
+          <p:cNvPr id="3" name="Notes Placeholder 2"/>
+          <p:cNvSpPr>
+            <a:spLocks noGrp="1"/>
+          </p:cNvSpPr>
+          <p:nvPr>
+            <p:ph type="body" idx="3" sz="quarter"/>
+          </p:nvPr>
+        </p:nvSpPr>
+        <p:spPr/>
+        <p:txBody>
+          <a:bodyPr/>
+          <a:lstStyle/>
+          <a:p>
+            <a:r>
+              <a:t>내용 확인 근거(2026-09-11):</a:t>
+            </a:r>
+          </a:p>
+          <a:p>
+            <a:r>
+              <a:t>코드 실측: HTTP 메서드 매핑 88개, 테스트 제외 페이지 17개, schema.sql CREATE TABLE 21개, 정책 설정 ACTIVE 12개</a:t>
+            </a:r>
+          </a:p>
+          <a:p>
+            <a:r>
+              <a:t>docs/12-남은-작업.md, 현재 상태 스냅샷</a:t>
+            </a:r>
+          </a:p>
+          <a:p>
+            <a:r>
+              <a:t>Dockerfile</a:t>
+            </a:r>
+          </a:p>
+          <a:p>
+            <a:r>
+              <a:t>docker-compose.prod.yml</a:t>
+            </a:r>
+          </a:p>
+        </p:txBody>
+      </p:sp>
+      <p:sp>
+        <p:nvSpPr>
+          <p:cNvPr id="4" name="Slide Number Placeholder 3"/>
+          <p:cNvSpPr>
+            <a:spLocks noGrp="1"/>
+          </p:cNvSpPr>
+          <p:nvPr>
+            <p:ph type="sldNum" idx="5" sz="quarter"/>
+          </p:nvPr>
+        </p:nvSpPr>
+        <p:spPr/>
+      </p:sp>
+    </p:spTree>
+  </p:cSld>
+  <p:clrMapOvr>
+    <a:masterClrMapping/>
+  </p:clrMapOvr>
+</p:notes>
+</file>
+
+<file path=ppt/notesSlides/notesSlide18.xml><?xml version="1.0" encoding="utf-8"?>
 <p:notes xmlns:a="http://schemas.openxmlformats.org/drawingml/2006/main" xmlns:p="http://schemas.openxmlformats.org/presentationml/2006/main" xmlns:r="http://schemas.openxmlformats.org/officeDocument/2006/relationships">
   <p:cSld>
     <p:spTree>
@@ -7726,7 +7817,7 @@
                 <a:latin typeface="맑은 고딕"/>
                 <a:ea typeface="맑은 고딕"/>
               </a:rPr>
-              <a:t>서버 내부의 업무 구조</a:t>
+              <a:t>외부 연동 API</a:t>
             </a:r>
           </a:p>
         </p:txBody>
@@ -7772,7 +7863,7 @@
                 <a:latin typeface="맑은 고딕"/>
                 <a:ea typeface="맑은 고딕"/>
               </a:rPr>
-              <a:t>12개 업무 영역을 나누고, 요청 처리와 업무 규칙·데이터 저장의 역할을 분리했습니다.</a:t>
+              <a:t>세 가지 외부 서비스에 의존하며, 어느 하나가 멈춰도 업무 처리는 계속됩니다.</a:t>
             </a:r>
           </a:p>
         </p:txBody>
@@ -7819,6 +7910,1447 @@
                 <a:ea typeface="맑은 고딕"/>
               </a:rPr>
               <a:t>12</a:t>
+            </a:r>
+          </a:p>
+        </p:txBody>
+      </p:sp>
+      <p:graphicFrame>
+        <p:nvGraphicFramePr>
+          <p:cNvPr id="5" name="Table 4"/>
+          <p:cNvGraphicFramePr>
+            <a:graphicFrameLocks noGrp="1"/>
+          </p:cNvGraphicFramePr>
+          <p:nvPr/>
+        </p:nvGraphicFramePr>
+        <p:xfrm>
+          <a:off x="621792" y="1783080"/>
+          <a:ext cx="10927080" cy="3657600"/>
+        </p:xfrm>
+        <a:graphic>
+          <a:graphicData uri="http://schemas.openxmlformats.org/drawingml/2006/table">
+            <a:tbl>
+              <a:tblPr firstRow="1" bandRow="1">
+                <a:tableStyleId>{5C22544A-7EE6-4342-B048-85BDC9FD1C3A}</a:tableStyleId>
+              </a:tblPr>
+              <a:tblGrid>
+                <a:gridCol w="2103120"/>
+                <a:gridCol w="3429000"/>
+                <a:gridCol w="3291840"/>
+                <a:gridCol w="2103120"/>
+              </a:tblGrid>
+              <a:tr h="914400">
+                <a:tc>
+                  <a:txBody>
+                    <a:bodyPr wrap="square" anchor="ctr" lIns="82296" rIns="82296" tIns="82296" bIns="82296">
+                      <a:noAutofit/>
+                    </a:bodyPr>
+                    <a:lstStyle/>
+                    <a:p>
+                      <a:pPr algn="l">
+                        <a:lnSpc>
+                          <a:spcPct val="113000"/>
+                        </a:lnSpc>
+                        <a:spcBef>
+                          <a:spcPts val="0"/>
+                        </a:spcBef>
+                        <a:spcAft>
+                          <a:spcPts val="0"/>
+                        </a:spcAft>
+                      </a:pPr>
+                      <a:r>
+                        <a:rPr sz="1500" b="1" lang="ko-KR">
+                          <a:solidFill>
+                            <a:srgbClr val="FFFFFF"/>
+                          </a:solidFill>
+                          <a:latin typeface="맑은 고딕"/>
+                          <a:ea typeface="맑은 고딕"/>
+                        </a:rPr>
+                        <a:t>외부 서비스</a:t>
+                      </a:r>
+                    </a:p>
+                  </a:txBody>
+                  <a:tcPr>
+                    <a:solidFill>
+                      <a:srgbClr val="0D203D"/>
+                    </a:solidFill>
+                    <a:lnL w="6350">
+                      <a:solidFill>
+                        <a:srgbClr val="F7F9FC"/>
+                      </a:solidFill>
+                    </a:lnL>
+                    <a:lnR w="6350">
+                      <a:solidFill>
+                        <a:srgbClr val="F7F9FC"/>
+                      </a:solidFill>
+                    </a:lnR>
+                    <a:lnT w="6350">
+                      <a:solidFill>
+                        <a:srgbClr val="F7F9FC"/>
+                      </a:solidFill>
+                    </a:lnT>
+                    <a:lnB w="6350">
+                      <a:solidFill>
+                        <a:srgbClr val="F7F9FC"/>
+                      </a:solidFill>
+                    </a:lnB>
+                  </a:tcPr>
+                </a:tc>
+                <a:tc>
+                  <a:txBody>
+                    <a:bodyPr wrap="square" anchor="ctr" lIns="82296" rIns="82296" tIns="82296" bIns="82296">
+                      <a:noAutofit/>
+                    </a:bodyPr>
+                    <a:lstStyle/>
+                    <a:p>
+                      <a:pPr algn="l">
+                        <a:lnSpc>
+                          <a:spcPct val="113000"/>
+                        </a:lnSpc>
+                        <a:spcBef>
+                          <a:spcPts val="0"/>
+                        </a:spcBef>
+                        <a:spcAft>
+                          <a:spcPts val="0"/>
+                        </a:spcAft>
+                      </a:pPr>
+                      <a:r>
+                        <a:rPr sz="1350" b="1" lang="ko-KR">
+                          <a:solidFill>
+                            <a:srgbClr val="FFFFFF"/>
+                          </a:solidFill>
+                          <a:latin typeface="맑은 고딕"/>
+                          <a:ea typeface="맑은 고딕"/>
+                        </a:rPr>
+                        <a:t>용도 · 호출 시점</a:t>
+                      </a:r>
+                    </a:p>
+                  </a:txBody>
+                  <a:tcPr>
+                    <a:solidFill>
+                      <a:srgbClr val="0D203D"/>
+                    </a:solidFill>
+                    <a:lnL w="6350">
+                      <a:solidFill>
+                        <a:srgbClr val="F7F9FC"/>
+                      </a:solidFill>
+                    </a:lnL>
+                    <a:lnR w="6350">
+                      <a:solidFill>
+                        <a:srgbClr val="F7F9FC"/>
+                      </a:solidFill>
+                    </a:lnR>
+                    <a:lnT w="6350">
+                      <a:solidFill>
+                        <a:srgbClr val="F7F9FC"/>
+                      </a:solidFill>
+                    </a:lnT>
+                    <a:lnB w="6350">
+                      <a:solidFill>
+                        <a:srgbClr val="F7F9FC"/>
+                      </a:solidFill>
+                    </a:lnB>
+                  </a:tcPr>
+                </a:tc>
+                <a:tc>
+                  <a:txBody>
+                    <a:bodyPr wrap="square" anchor="ctr" lIns="82296" rIns="82296" tIns="82296" bIns="82296">
+                      <a:noAutofit/>
+                    </a:bodyPr>
+                    <a:lstStyle/>
+                    <a:p>
+                      <a:pPr algn="l">
+                        <a:lnSpc>
+                          <a:spcPct val="113000"/>
+                        </a:lnSpc>
+                        <a:spcBef>
+                          <a:spcPts val="0"/>
+                        </a:spcBef>
+                        <a:spcAft>
+                          <a:spcPts val="0"/>
+                        </a:spcAft>
+                      </a:pPr>
+                      <a:r>
+                        <a:rPr sz="1350" b="1" lang="ko-KR">
+                          <a:solidFill>
+                            <a:srgbClr val="FFFFFF"/>
+                          </a:solidFill>
+                          <a:latin typeface="맑은 고딕"/>
+                          <a:ea typeface="맑은 고딕"/>
+                        </a:rPr>
+                        <a:t>실패하면</a:t>
+                      </a:r>
+                    </a:p>
+                  </a:txBody>
+                  <a:tcPr>
+                    <a:solidFill>
+                      <a:srgbClr val="0D203D"/>
+                    </a:solidFill>
+                    <a:lnL w="6350">
+                      <a:solidFill>
+                        <a:srgbClr val="F7F9FC"/>
+                      </a:solidFill>
+                    </a:lnL>
+                    <a:lnR w="6350">
+                      <a:solidFill>
+                        <a:srgbClr val="F7F9FC"/>
+                      </a:solidFill>
+                    </a:lnR>
+                    <a:lnT w="6350">
+                      <a:solidFill>
+                        <a:srgbClr val="F7F9FC"/>
+                      </a:solidFill>
+                    </a:lnT>
+                    <a:lnB w="6350">
+                      <a:solidFill>
+                        <a:srgbClr val="F7F9FC"/>
+                      </a:solidFill>
+                    </a:lnB>
+                  </a:tcPr>
+                </a:tc>
+                <a:tc>
+                  <a:txBody>
+                    <a:bodyPr wrap="square" anchor="ctr" lIns="82296" rIns="82296" tIns="82296" bIns="82296">
+                      <a:noAutofit/>
+                    </a:bodyPr>
+                    <a:lstStyle/>
+                    <a:p>
+                      <a:pPr algn="l">
+                        <a:lnSpc>
+                          <a:spcPct val="113000"/>
+                        </a:lnSpc>
+                        <a:spcBef>
+                          <a:spcPts val="0"/>
+                        </a:spcBef>
+                        <a:spcAft>
+                          <a:spcPts val="0"/>
+                        </a:spcAft>
+                      </a:pPr>
+                      <a:r>
+                        <a:rPr sz="1350" b="1" lang="ko-KR">
+                          <a:solidFill>
+                            <a:srgbClr val="FFFFFF"/>
+                          </a:solidFill>
+                          <a:latin typeface="맑은 고딕"/>
+                          <a:ea typeface="맑은 고딕"/>
+                        </a:rPr>
+                        <a:t>인증 정보 보관</a:t>
+                      </a:r>
+                    </a:p>
+                  </a:txBody>
+                  <a:tcPr>
+                    <a:solidFill>
+                      <a:srgbClr val="0D203D"/>
+                    </a:solidFill>
+                    <a:lnL w="6350">
+                      <a:solidFill>
+                        <a:srgbClr val="F7F9FC"/>
+                      </a:solidFill>
+                    </a:lnL>
+                    <a:lnR w="6350">
+                      <a:solidFill>
+                        <a:srgbClr val="F7F9FC"/>
+                      </a:solidFill>
+                    </a:lnR>
+                    <a:lnT w="6350">
+                      <a:solidFill>
+                        <a:srgbClr val="F7F9FC"/>
+                      </a:solidFill>
+                    </a:lnT>
+                    <a:lnB w="6350">
+                      <a:solidFill>
+                        <a:srgbClr val="F7F9FC"/>
+                      </a:solidFill>
+                    </a:lnB>
+                  </a:tcPr>
+                </a:tc>
+              </a:tr>
+              <a:tr h="914400">
+                <a:tc>
+                  <a:txBody>
+                    <a:bodyPr wrap="square" anchor="ctr" lIns="82296" rIns="82296" tIns="82296" bIns="82296">
+                      <a:noAutofit/>
+                    </a:bodyPr>
+                    <a:lstStyle/>
+                    <a:p>
+                      <a:pPr algn="l">
+                        <a:lnSpc>
+                          <a:spcPct val="113000"/>
+                        </a:lnSpc>
+                        <a:spcBef>
+                          <a:spcPts val="0"/>
+                        </a:spcBef>
+                        <a:spcAft>
+                          <a:spcPts val="0"/>
+                        </a:spcAft>
+                      </a:pPr>
+                      <a:r>
+                        <a:rPr sz="1500" b="0" lang="ko-KR">
+                          <a:solidFill>
+                            <a:srgbClr val="172B49"/>
+                          </a:solidFill>
+                          <a:latin typeface="맑은 고딕"/>
+                          <a:ea typeface="맑은 고딕"/>
+                        </a:rPr>
+                        <a:t>공공데이터포털</a:t>
+                      </a:r>
+                    </a:p>
+                    <a:p>
+                      <a:pPr algn="l">
+                        <a:lnSpc>
+                          <a:spcPct val="113000"/>
+                        </a:lnSpc>
+                        <a:spcBef>
+                          <a:spcPts val="0"/>
+                        </a:spcBef>
+                        <a:spcAft>
+                          <a:spcPts val="0"/>
+                        </a:spcAft>
+                      </a:pPr>
+                      <a:r>
+                        <a:rPr sz="1500" b="0" lang="ko-KR">
+                          <a:solidFill>
+                            <a:srgbClr val="172B49"/>
+                          </a:solidFill>
+                          <a:latin typeface="맑은 고딕"/>
+                          <a:ea typeface="맑은 고딕"/>
+                        </a:rPr>
+                        <a:t>특일정보 API</a:t>
+                      </a:r>
+                    </a:p>
+                  </a:txBody>
+                  <a:tcPr>
+                    <a:solidFill>
+                      <a:srgbClr val="FFFFFF"/>
+                    </a:solidFill>
+                    <a:lnL w="6350">
+                      <a:solidFill>
+                        <a:srgbClr val="F7F9FC"/>
+                      </a:solidFill>
+                    </a:lnL>
+                    <a:lnR w="6350">
+                      <a:solidFill>
+                        <a:srgbClr val="F7F9FC"/>
+                      </a:solidFill>
+                    </a:lnR>
+                    <a:lnT w="6350">
+                      <a:solidFill>
+                        <a:srgbClr val="F7F9FC"/>
+                      </a:solidFill>
+                    </a:lnT>
+                    <a:lnB w="6350">
+                      <a:solidFill>
+                        <a:srgbClr val="F7F9FC"/>
+                      </a:solidFill>
+                    </a:lnB>
+                  </a:tcPr>
+                </a:tc>
+                <a:tc>
+                  <a:txBody>
+                    <a:bodyPr wrap="square" anchor="ctr" lIns="82296" rIns="82296" tIns="82296" bIns="82296">
+                      <a:noAutofit/>
+                    </a:bodyPr>
+                    <a:lstStyle/>
+                    <a:p>
+                      <a:pPr algn="l">
+                        <a:lnSpc>
+                          <a:spcPct val="113000"/>
+                        </a:lnSpc>
+                        <a:spcBef>
+                          <a:spcPts val="0"/>
+                        </a:spcBef>
+                        <a:spcAft>
+                          <a:spcPts val="0"/>
+                        </a:spcAft>
+                      </a:pPr>
+                      <a:r>
+                        <a:rPr sz="1350" b="0" lang="ko-KR">
+                          <a:solidFill>
+                            <a:srgbClr val="172B49"/>
+                          </a:solidFill>
+                          <a:latin typeface="맑은 고딕"/>
+                          <a:ea typeface="맑은 고딕"/>
+                        </a:rPr>
+                        <a:t>공휴일 목록 조회 (연 단위)</a:t>
+                      </a:r>
+                    </a:p>
+                    <a:p>
+                      <a:pPr algn="l">
+                        <a:lnSpc>
+                          <a:spcPct val="113000"/>
+                        </a:lnSpc>
+                        <a:spcBef>
+                          <a:spcPts val="0"/>
+                        </a:spcBef>
+                        <a:spcAft>
+                          <a:spcPts val="0"/>
+                        </a:spcAft>
+                      </a:pPr>
+                      <a:r>
+                        <a:rPr sz="1350" b="0" lang="ko-KR">
+                          <a:solidFill>
+                            <a:srgbClr val="172B49"/>
+                          </a:solidFill>
+                          <a:latin typeface="맑은 고딕"/>
+                          <a:ea typeface="맑은 고딕"/>
+                        </a:rPr>
+                        <a:t>매년 1월 1일 00:05 자동 · 관리자 수동 동기화</a:t>
+                      </a:r>
+                    </a:p>
+                    <a:p>
+                      <a:pPr algn="l">
+                        <a:lnSpc>
+                          <a:spcPct val="113000"/>
+                        </a:lnSpc>
+                        <a:spcBef>
+                          <a:spcPts val="0"/>
+                        </a:spcBef>
+                        <a:spcAft>
+                          <a:spcPts val="0"/>
+                        </a:spcAft>
+                      </a:pPr>
+                      <a:r>
+                        <a:rPr sz="1350" b="0" lang="ko-KR">
+                          <a:solidFill>
+                            <a:srgbClr val="172B49"/>
+                          </a:solidFill>
+                          <a:latin typeface="맑은 고딕"/>
+                          <a:ea typeface="맑은 고딕"/>
+                        </a:rPr>
+                        <a:t>캐시가 비어 있을 때 최초 1회</a:t>
+                      </a:r>
+                    </a:p>
+                  </a:txBody>
+                  <a:tcPr>
+                    <a:solidFill>
+                      <a:srgbClr val="FFFFFF"/>
+                    </a:solidFill>
+                    <a:lnL w="6350">
+                      <a:solidFill>
+                        <a:srgbClr val="F7F9FC"/>
+                      </a:solidFill>
+                    </a:lnL>
+                    <a:lnR w="6350">
+                      <a:solidFill>
+                        <a:srgbClr val="F7F9FC"/>
+                      </a:solidFill>
+                    </a:lnR>
+                    <a:lnT w="6350">
+                      <a:solidFill>
+                        <a:srgbClr val="F7F9FC"/>
+                      </a:solidFill>
+                    </a:lnT>
+                    <a:lnB w="6350">
+                      <a:solidFill>
+                        <a:srgbClr val="F7F9FC"/>
+                      </a:solidFill>
+                    </a:lnB>
+                  </a:tcPr>
+                </a:tc>
+                <a:tc>
+                  <a:txBody>
+                    <a:bodyPr wrap="square" anchor="ctr" lIns="82296" rIns="82296" tIns="82296" bIns="82296">
+                      <a:noAutofit/>
+                    </a:bodyPr>
+                    <a:lstStyle/>
+                    <a:p>
+                      <a:pPr algn="l">
+                        <a:lnSpc>
+                          <a:spcPct val="113000"/>
+                        </a:lnSpc>
+                        <a:spcBef>
+                          <a:spcPts val="0"/>
+                        </a:spcBef>
+                        <a:spcAft>
+                          <a:spcPts val="0"/>
+                        </a:spcAft>
+                      </a:pPr>
+                      <a:r>
+                        <a:rPr sz="1350" b="0" lang="ko-KR">
+                          <a:solidFill>
+                            <a:srgbClr val="172B49"/>
+                          </a:solidFill>
+                          <a:latin typeface="맑은 고딕"/>
+                          <a:ea typeface="맑은 고딕"/>
+                        </a:rPr>
+                        <a:t>기존 공휴일 캐시 유지, 빈 결과로 계속</a:t>
+                      </a:r>
+                    </a:p>
+                    <a:p>
+                      <a:pPr algn="l">
+                        <a:lnSpc>
+                          <a:spcPct val="113000"/>
+                        </a:lnSpc>
+                        <a:spcBef>
+                          <a:spcPts val="0"/>
+                        </a:spcBef>
+                        <a:spcAft>
+                          <a:spcPts val="0"/>
+                        </a:spcAft>
+                      </a:pPr>
+                      <a:r>
+                        <a:rPr sz="1350" b="0" lang="ko-KR">
+                          <a:solidFill>
+                            <a:srgbClr val="172B49"/>
+                          </a:solidFill>
+                          <a:latin typeface="맑은 고딕"/>
+                          <a:ea typeface="맑은 고딕"/>
+                        </a:rPr>
+                        <a:t>연차 신청은 막히지 않음</a:t>
+                      </a:r>
+                    </a:p>
+                    <a:p>
+                      <a:pPr algn="l">
+                        <a:lnSpc>
+                          <a:spcPct val="113000"/>
+                        </a:lnSpc>
+                        <a:spcBef>
+                          <a:spcPts val="0"/>
+                        </a:spcBef>
+                        <a:spcAft>
+                          <a:spcPts val="0"/>
+                        </a:spcAft>
+                      </a:pPr>
+                      <a:r>
+                        <a:rPr sz="1350" b="0" lang="ko-KR">
+                          <a:solidFill>
+                            <a:srgbClr val="172B49"/>
+                          </a:solidFill>
+                          <a:latin typeface="맑은 고딕"/>
+                          <a:ea typeface="맑은 고딕"/>
+                        </a:rPr>
+                        <a:t>관리자 수동 동기화만 원인별 오류 표시</a:t>
+                      </a:r>
+                    </a:p>
+                  </a:txBody>
+                  <a:tcPr>
+                    <a:solidFill>
+                      <a:srgbClr val="FFFFFF"/>
+                    </a:solidFill>
+                    <a:lnL w="6350">
+                      <a:solidFill>
+                        <a:srgbClr val="F7F9FC"/>
+                      </a:solidFill>
+                    </a:lnL>
+                    <a:lnR w="6350">
+                      <a:solidFill>
+                        <a:srgbClr val="F7F9FC"/>
+                      </a:solidFill>
+                    </a:lnR>
+                    <a:lnT w="6350">
+                      <a:solidFill>
+                        <a:srgbClr val="F7F9FC"/>
+                      </a:solidFill>
+                    </a:lnT>
+                    <a:lnB w="6350">
+                      <a:solidFill>
+                        <a:srgbClr val="F7F9FC"/>
+                      </a:solidFill>
+                    </a:lnB>
+                  </a:tcPr>
+                </a:tc>
+                <a:tc>
+                  <a:txBody>
+                    <a:bodyPr wrap="square" anchor="ctr" lIns="82296" rIns="82296" tIns="82296" bIns="82296">
+                      <a:noAutofit/>
+                    </a:bodyPr>
+                    <a:lstStyle/>
+                    <a:p>
+                      <a:pPr algn="l">
+                        <a:lnSpc>
+                          <a:spcPct val="113000"/>
+                        </a:lnSpc>
+                        <a:spcBef>
+                          <a:spcPts val="0"/>
+                        </a:spcBef>
+                        <a:spcAft>
+                          <a:spcPts val="0"/>
+                        </a:spcAft>
+                      </a:pPr>
+                      <a:r>
+                        <a:rPr sz="1350" b="0" lang="ko-KR">
+                          <a:solidFill>
+                            <a:srgbClr val="172B49"/>
+                          </a:solidFill>
+                          <a:latin typeface="맑은 고딕"/>
+                          <a:ea typeface="맑은 고딕"/>
+                        </a:rPr>
+                        <a:t>관리자 화면에서 암호화 저장</a:t>
+                      </a:r>
+                    </a:p>
+                    <a:p>
+                      <a:pPr algn="l">
+                        <a:lnSpc>
+                          <a:spcPct val="113000"/>
+                        </a:lnSpc>
+                        <a:spcBef>
+                          <a:spcPts val="0"/>
+                        </a:spcBef>
+                        <a:spcAft>
+                          <a:spcPts val="0"/>
+                        </a:spcAft>
+                      </a:pPr>
+                      <a:r>
+                        <a:rPr sz="1350" b="0" lang="ko-KR">
+                          <a:solidFill>
+                            <a:srgbClr val="172B49"/>
+                          </a:solidFill>
+                          <a:latin typeface="맑은 고딕"/>
+                          <a:ea typeface="맑은 고딕"/>
+                        </a:rPr>
+                        <a:t>없으면 서버 환경변수</a:t>
+                      </a:r>
+                    </a:p>
+                  </a:txBody>
+                  <a:tcPr>
+                    <a:solidFill>
+                      <a:srgbClr val="FFFFFF"/>
+                    </a:solidFill>
+                    <a:lnL w="6350">
+                      <a:solidFill>
+                        <a:srgbClr val="F7F9FC"/>
+                      </a:solidFill>
+                    </a:lnL>
+                    <a:lnR w="6350">
+                      <a:solidFill>
+                        <a:srgbClr val="F7F9FC"/>
+                      </a:solidFill>
+                    </a:lnR>
+                    <a:lnT w="6350">
+                      <a:solidFill>
+                        <a:srgbClr val="F7F9FC"/>
+                      </a:solidFill>
+                    </a:lnT>
+                    <a:lnB w="6350">
+                      <a:solidFill>
+                        <a:srgbClr val="F7F9FC"/>
+                      </a:solidFill>
+                    </a:lnB>
+                  </a:tcPr>
+                </a:tc>
+              </a:tr>
+              <a:tr h="914400">
+                <a:tc>
+                  <a:txBody>
+                    <a:bodyPr wrap="square" anchor="ctr" lIns="82296" rIns="82296" tIns="82296" bIns="82296">
+                      <a:noAutofit/>
+                    </a:bodyPr>
+                    <a:lstStyle/>
+                    <a:p>
+                      <a:pPr algn="l">
+                        <a:lnSpc>
+                          <a:spcPct val="113000"/>
+                        </a:lnSpc>
+                        <a:spcBef>
+                          <a:spcPts val="0"/>
+                        </a:spcBef>
+                        <a:spcAft>
+                          <a:spcPts val="0"/>
+                        </a:spcAft>
+                      </a:pPr>
+                      <a:r>
+                        <a:rPr sz="1500" b="0" lang="ko-KR">
+                          <a:solidFill>
+                            <a:srgbClr val="172B49"/>
+                          </a:solidFill>
+                          <a:latin typeface="맑은 고딕"/>
+                          <a:ea typeface="맑은 고딕"/>
+                        </a:rPr>
+                        <a:t>Google OAuth2</a:t>
+                      </a:r>
+                    </a:p>
+                  </a:txBody>
+                  <a:tcPr>
+                    <a:solidFill>
+                      <a:srgbClr val="EAF0FA"/>
+                    </a:solidFill>
+                    <a:lnL w="6350">
+                      <a:solidFill>
+                        <a:srgbClr val="F7F9FC"/>
+                      </a:solidFill>
+                    </a:lnL>
+                    <a:lnR w="6350">
+                      <a:solidFill>
+                        <a:srgbClr val="F7F9FC"/>
+                      </a:solidFill>
+                    </a:lnR>
+                    <a:lnT w="6350">
+                      <a:solidFill>
+                        <a:srgbClr val="F7F9FC"/>
+                      </a:solidFill>
+                    </a:lnT>
+                    <a:lnB w="6350">
+                      <a:solidFill>
+                        <a:srgbClr val="F7F9FC"/>
+                      </a:solidFill>
+                    </a:lnB>
+                  </a:tcPr>
+                </a:tc>
+                <a:tc>
+                  <a:txBody>
+                    <a:bodyPr wrap="square" anchor="ctr" lIns="82296" rIns="82296" tIns="82296" bIns="82296">
+                      <a:noAutofit/>
+                    </a:bodyPr>
+                    <a:lstStyle/>
+                    <a:p>
+                      <a:pPr algn="l">
+                        <a:lnSpc>
+                          <a:spcPct val="113000"/>
+                        </a:lnSpc>
+                        <a:spcBef>
+                          <a:spcPts val="0"/>
+                        </a:spcBef>
+                        <a:spcAft>
+                          <a:spcPts val="0"/>
+                        </a:spcAft>
+                      </a:pPr>
+                      <a:r>
+                        <a:rPr sz="1350" b="0" lang="ko-KR">
+                          <a:solidFill>
+                            <a:srgbClr val="172B49"/>
+                          </a:solidFill>
+                          <a:latin typeface="맑은 고딕"/>
+                          <a:ea typeface="맑은 고딕"/>
+                        </a:rPr>
+                        <a:t>로그인 (프로필·이메일만 요청)</a:t>
+                      </a:r>
+                    </a:p>
+                    <a:p>
+                      <a:pPr algn="l">
+                        <a:lnSpc>
+                          <a:spcPct val="113000"/>
+                        </a:lnSpc>
+                        <a:spcBef>
+                          <a:spcPts val="0"/>
+                        </a:spcBef>
+                        <a:spcAft>
+                          <a:spcPts val="0"/>
+                        </a:spcAft>
+                      </a:pPr>
+                      <a:r>
+                        <a:rPr sz="1350" b="0" lang="ko-KR">
+                          <a:solidFill>
+                            <a:srgbClr val="172B49"/>
+                          </a:solidFill>
+                          <a:latin typeface="맑은 고딕"/>
+                          <a:ea typeface="맑은 고딕"/>
+                        </a:rPr>
+                        <a:t>회사 도메인 계정만 허용</a:t>
+                      </a:r>
+                    </a:p>
+                  </a:txBody>
+                  <a:tcPr>
+                    <a:solidFill>
+                      <a:srgbClr val="EAF0FA"/>
+                    </a:solidFill>
+                    <a:lnL w="6350">
+                      <a:solidFill>
+                        <a:srgbClr val="F7F9FC"/>
+                      </a:solidFill>
+                    </a:lnL>
+                    <a:lnR w="6350">
+                      <a:solidFill>
+                        <a:srgbClr val="F7F9FC"/>
+                      </a:solidFill>
+                    </a:lnR>
+                    <a:lnT w="6350">
+                      <a:solidFill>
+                        <a:srgbClr val="F7F9FC"/>
+                      </a:solidFill>
+                    </a:lnT>
+                    <a:lnB w="6350">
+                      <a:solidFill>
+                        <a:srgbClr val="F7F9FC"/>
+                      </a:solidFill>
+                    </a:lnB>
+                  </a:tcPr>
+                </a:tc>
+                <a:tc>
+                  <a:txBody>
+                    <a:bodyPr wrap="square" anchor="ctr" lIns="82296" rIns="82296" tIns="82296" bIns="82296">
+                      <a:noAutofit/>
+                    </a:bodyPr>
+                    <a:lstStyle/>
+                    <a:p>
+                      <a:pPr algn="l">
+                        <a:lnSpc>
+                          <a:spcPct val="113000"/>
+                        </a:lnSpc>
+                        <a:spcBef>
+                          <a:spcPts val="0"/>
+                        </a:spcBef>
+                        <a:spcAft>
+                          <a:spcPts val="0"/>
+                        </a:spcAft>
+                      </a:pPr>
+                      <a:r>
+                        <a:rPr sz="1350" b="0" lang="ko-KR">
+                          <a:solidFill>
+                            <a:srgbClr val="172B49"/>
+                          </a:solidFill>
+                          <a:latin typeface="맑은 고딕"/>
+                          <a:ea typeface="맑은 고딕"/>
+                        </a:rPr>
+                        <a:t>로그인 불가 · 안내 메시지</a:t>
+                      </a:r>
+                    </a:p>
+                    <a:p>
+                      <a:pPr algn="l">
+                        <a:lnSpc>
+                          <a:spcPct val="113000"/>
+                        </a:lnSpc>
+                        <a:spcBef>
+                          <a:spcPts val="0"/>
+                        </a:spcBef>
+                        <a:spcAft>
+                          <a:spcPts val="0"/>
+                        </a:spcAft>
+                      </a:pPr>
+                      <a:r>
+                        <a:rPr sz="1350" b="0" lang="ko-KR">
+                          <a:solidFill>
+                            <a:srgbClr val="172B49"/>
+                          </a:solidFill>
+                          <a:latin typeface="맑은 고딕"/>
+                          <a:ea typeface="맑은 고딕"/>
+                        </a:rPr>
+                        <a:t>허용 도메인이 아니면 거부</a:t>
+                      </a:r>
+                    </a:p>
+                  </a:txBody>
+                  <a:tcPr>
+                    <a:solidFill>
+                      <a:srgbClr val="EAF0FA"/>
+                    </a:solidFill>
+                    <a:lnL w="6350">
+                      <a:solidFill>
+                        <a:srgbClr val="F7F9FC"/>
+                      </a:solidFill>
+                    </a:lnL>
+                    <a:lnR w="6350">
+                      <a:solidFill>
+                        <a:srgbClr val="F7F9FC"/>
+                      </a:solidFill>
+                    </a:lnR>
+                    <a:lnT w="6350">
+                      <a:solidFill>
+                        <a:srgbClr val="F7F9FC"/>
+                      </a:solidFill>
+                    </a:lnT>
+                    <a:lnB w="6350">
+                      <a:solidFill>
+                        <a:srgbClr val="F7F9FC"/>
+                      </a:solidFill>
+                    </a:lnB>
+                  </a:tcPr>
+                </a:tc>
+                <a:tc>
+                  <a:txBody>
+                    <a:bodyPr wrap="square" anchor="ctr" lIns="82296" rIns="82296" tIns="82296" bIns="82296">
+                      <a:noAutofit/>
+                    </a:bodyPr>
+                    <a:lstStyle/>
+                    <a:p>
+                      <a:pPr algn="l">
+                        <a:lnSpc>
+                          <a:spcPct val="113000"/>
+                        </a:lnSpc>
+                        <a:spcBef>
+                          <a:spcPts val="0"/>
+                        </a:spcBef>
+                        <a:spcAft>
+                          <a:spcPts val="0"/>
+                        </a:spcAft>
+                      </a:pPr>
+                      <a:r>
+                        <a:rPr sz="1350" b="0" lang="ko-KR">
+                          <a:solidFill>
+                            <a:srgbClr val="172B49"/>
+                          </a:solidFill>
+                          <a:latin typeface="맑은 고딕"/>
+                          <a:ea typeface="맑은 고딕"/>
+                        </a:rPr>
+                        <a:t>서버 환경변수</a:t>
+                      </a:r>
+                    </a:p>
+                    <a:p>
+                      <a:pPr algn="l">
+                        <a:lnSpc>
+                          <a:spcPct val="113000"/>
+                        </a:lnSpc>
+                        <a:spcBef>
+                          <a:spcPts val="0"/>
+                        </a:spcBef>
+                        <a:spcAft>
+                          <a:spcPts val="0"/>
+                        </a:spcAft>
+                      </a:pPr>
+                      <a:r>
+                        <a:rPr sz="1350" b="0" lang="ko-KR">
+                          <a:solidFill>
+                            <a:srgbClr val="172B49"/>
+                          </a:solidFill>
+                          <a:latin typeface="맑은 고딕"/>
+                          <a:ea typeface="맑은 고딕"/>
+                        </a:rPr>
+                        <a:t>(클라이언트 ID · 시크릿)</a:t>
+                      </a:r>
+                    </a:p>
+                  </a:txBody>
+                  <a:tcPr>
+                    <a:solidFill>
+                      <a:srgbClr val="EAF0FA"/>
+                    </a:solidFill>
+                    <a:lnL w="6350">
+                      <a:solidFill>
+                        <a:srgbClr val="F7F9FC"/>
+                      </a:solidFill>
+                    </a:lnL>
+                    <a:lnR w="6350">
+                      <a:solidFill>
+                        <a:srgbClr val="F7F9FC"/>
+                      </a:solidFill>
+                    </a:lnR>
+                    <a:lnT w="6350">
+                      <a:solidFill>
+                        <a:srgbClr val="F7F9FC"/>
+                      </a:solidFill>
+                    </a:lnT>
+                    <a:lnB w="6350">
+                      <a:solidFill>
+                        <a:srgbClr val="F7F9FC"/>
+                      </a:solidFill>
+                    </a:lnB>
+                  </a:tcPr>
+                </a:tc>
+              </a:tr>
+              <a:tr h="914400">
+                <a:tc>
+                  <a:txBody>
+                    <a:bodyPr wrap="square" anchor="ctr" lIns="82296" rIns="82296" tIns="82296" bIns="82296">
+                      <a:noAutofit/>
+                    </a:bodyPr>
+                    <a:lstStyle/>
+                    <a:p>
+                      <a:pPr algn="l">
+                        <a:lnSpc>
+                          <a:spcPct val="113000"/>
+                        </a:lnSpc>
+                        <a:spcBef>
+                          <a:spcPts val="0"/>
+                        </a:spcBef>
+                        <a:spcAft>
+                          <a:spcPts val="0"/>
+                        </a:spcAft>
+                      </a:pPr>
+                      <a:r>
+                        <a:rPr sz="1500" b="0" lang="ko-KR">
+                          <a:solidFill>
+                            <a:srgbClr val="172B49"/>
+                          </a:solidFill>
+                          <a:latin typeface="맑은 고딕"/>
+                          <a:ea typeface="맑은 고딕"/>
+                        </a:rPr>
+                        <a:t>Gmail SMTP</a:t>
+                      </a:r>
+                    </a:p>
+                  </a:txBody>
+                  <a:tcPr>
+                    <a:solidFill>
+                      <a:srgbClr val="FFFFFF"/>
+                    </a:solidFill>
+                    <a:lnL w="6350">
+                      <a:solidFill>
+                        <a:srgbClr val="F7F9FC"/>
+                      </a:solidFill>
+                    </a:lnL>
+                    <a:lnR w="6350">
+                      <a:solidFill>
+                        <a:srgbClr val="F7F9FC"/>
+                      </a:solidFill>
+                    </a:lnR>
+                    <a:lnT w="6350">
+                      <a:solidFill>
+                        <a:srgbClr val="F7F9FC"/>
+                      </a:solidFill>
+                    </a:lnT>
+                    <a:lnB w="6350">
+                      <a:solidFill>
+                        <a:srgbClr val="F7F9FC"/>
+                      </a:solidFill>
+                    </a:lnB>
+                  </a:tcPr>
+                </a:tc>
+                <a:tc>
+                  <a:txBody>
+                    <a:bodyPr wrap="square" anchor="ctr" lIns="82296" rIns="82296" tIns="82296" bIns="82296">
+                      <a:noAutofit/>
+                    </a:bodyPr>
+                    <a:lstStyle/>
+                    <a:p>
+                      <a:pPr algn="l">
+                        <a:lnSpc>
+                          <a:spcPct val="113000"/>
+                        </a:lnSpc>
+                        <a:spcBef>
+                          <a:spcPts val="0"/>
+                        </a:spcBef>
+                        <a:spcAft>
+                          <a:spcPts val="0"/>
+                        </a:spcAft>
+                      </a:pPr>
+                      <a:r>
+                        <a:rPr sz="1350" b="0" lang="ko-KR">
+                          <a:solidFill>
+                            <a:srgbClr val="172B49"/>
+                          </a:solidFill>
+                          <a:latin typeface="맑은 고딕"/>
+                          <a:ea typeface="맑은 고딕"/>
+                        </a:rPr>
+                        <a:t>이메일 발송 (587 · STARTTLS)</a:t>
+                      </a:r>
+                    </a:p>
+                    <a:p>
+                      <a:pPr algn="l">
+                        <a:lnSpc>
+                          <a:spcPct val="113000"/>
+                        </a:lnSpc>
+                        <a:spcBef>
+                          <a:spcPts val="0"/>
+                        </a:spcBef>
+                        <a:spcAft>
+                          <a:spcPts val="0"/>
+                        </a:spcAft>
+                      </a:pPr>
+                      <a:r>
+                        <a:rPr sz="1350" b="0" lang="ko-KR">
+                          <a:solidFill>
+                            <a:srgbClr val="172B49"/>
+                          </a:solidFill>
+                          <a:latin typeface="맑은 고딕"/>
+                          <a:ea typeface="맑은 고딕"/>
+                        </a:rPr>
+                        <a:t>업무 사건 즉시 + 15분마다 재시도</a:t>
+                      </a:r>
+                    </a:p>
+                  </a:txBody>
+                  <a:tcPr>
+                    <a:solidFill>
+                      <a:srgbClr val="FFFFFF"/>
+                    </a:solidFill>
+                    <a:lnL w="6350">
+                      <a:solidFill>
+                        <a:srgbClr val="F7F9FC"/>
+                      </a:solidFill>
+                    </a:lnL>
+                    <a:lnR w="6350">
+                      <a:solidFill>
+                        <a:srgbClr val="F7F9FC"/>
+                      </a:solidFill>
+                    </a:lnR>
+                    <a:lnT w="6350">
+                      <a:solidFill>
+                        <a:srgbClr val="F7F9FC"/>
+                      </a:solidFill>
+                    </a:lnT>
+                    <a:lnB w="6350">
+                      <a:solidFill>
+                        <a:srgbClr val="F7F9FC"/>
+                      </a:solidFill>
+                    </a:lnB>
+                  </a:tcPr>
+                </a:tc>
+                <a:tc>
+                  <a:txBody>
+                    <a:bodyPr wrap="square" anchor="ctr" lIns="82296" rIns="82296" tIns="82296" bIns="82296">
+                      <a:noAutofit/>
+                    </a:bodyPr>
+                    <a:lstStyle/>
+                    <a:p>
+                      <a:pPr algn="l">
+                        <a:lnSpc>
+                          <a:spcPct val="113000"/>
+                        </a:lnSpc>
+                        <a:spcBef>
+                          <a:spcPts val="0"/>
+                        </a:spcBef>
+                        <a:spcAft>
+                          <a:spcPts val="0"/>
+                        </a:spcAft>
+                      </a:pPr>
+                      <a:r>
+                        <a:rPr sz="1350" b="0" lang="ko-KR">
+                          <a:solidFill>
+                            <a:srgbClr val="172B49"/>
+                          </a:solidFill>
+                          <a:latin typeface="맑은 고딕"/>
+                          <a:ea typeface="맑은 고딕"/>
+                        </a:rPr>
+                        <a:t>실패 이력 기록 · 총 3회 재시도</a:t>
+                      </a:r>
+                    </a:p>
+                    <a:p>
+                      <a:pPr algn="l">
+                        <a:lnSpc>
+                          <a:spcPct val="113000"/>
+                        </a:lnSpc>
+                        <a:spcBef>
+                          <a:spcPts val="0"/>
+                        </a:spcBef>
+                        <a:spcAft>
+                          <a:spcPts val="0"/>
+                        </a:spcAft>
+                      </a:pPr>
+                      <a:r>
+                        <a:rPr sz="1350" b="0" lang="ko-KR">
+                          <a:solidFill>
+                            <a:srgbClr val="172B49"/>
+                          </a:solidFill>
+                          <a:latin typeface="맑은 고딕"/>
+                          <a:ea typeface="맑은 고딕"/>
+                        </a:rPr>
+                        <a:t>이후 관리자 수동 재발송</a:t>
+                      </a:r>
+                    </a:p>
+                    <a:p>
+                      <a:pPr algn="l">
+                        <a:lnSpc>
+                          <a:spcPct val="113000"/>
+                        </a:lnSpc>
+                        <a:spcBef>
+                          <a:spcPts val="0"/>
+                        </a:spcBef>
+                        <a:spcAft>
+                          <a:spcPts val="0"/>
+                        </a:spcAft>
+                      </a:pPr>
+                      <a:r>
+                        <a:rPr sz="1350" b="0" lang="ko-KR">
+                          <a:solidFill>
+                            <a:srgbClr val="172B49"/>
+                          </a:solidFill>
+                          <a:latin typeface="맑은 고딕"/>
+                          <a:ea typeface="맑은 고딕"/>
+                        </a:rPr>
+                        <a:t>업무 처리에는 영향 없음</a:t>
+                      </a:r>
+                    </a:p>
+                  </a:txBody>
+                  <a:tcPr>
+                    <a:solidFill>
+                      <a:srgbClr val="FFFFFF"/>
+                    </a:solidFill>
+                    <a:lnL w="6350">
+                      <a:solidFill>
+                        <a:srgbClr val="F7F9FC"/>
+                      </a:solidFill>
+                    </a:lnL>
+                    <a:lnR w="6350">
+                      <a:solidFill>
+                        <a:srgbClr val="F7F9FC"/>
+                      </a:solidFill>
+                    </a:lnR>
+                    <a:lnT w="6350">
+                      <a:solidFill>
+                        <a:srgbClr val="F7F9FC"/>
+                      </a:solidFill>
+                    </a:lnT>
+                    <a:lnB w="6350">
+                      <a:solidFill>
+                        <a:srgbClr val="F7F9FC"/>
+                      </a:solidFill>
+                    </a:lnB>
+                  </a:tcPr>
+                </a:tc>
+                <a:tc>
+                  <a:txBody>
+                    <a:bodyPr wrap="square" anchor="ctr" lIns="82296" rIns="82296" tIns="82296" bIns="82296">
+                      <a:noAutofit/>
+                    </a:bodyPr>
+                    <a:lstStyle/>
+                    <a:p>
+                      <a:pPr algn="l">
+                        <a:lnSpc>
+                          <a:spcPct val="113000"/>
+                        </a:lnSpc>
+                        <a:spcBef>
+                          <a:spcPts val="0"/>
+                        </a:spcBef>
+                        <a:spcAft>
+                          <a:spcPts val="0"/>
+                        </a:spcAft>
+                      </a:pPr>
+                      <a:r>
+                        <a:rPr sz="1350" b="0" lang="ko-KR">
+                          <a:solidFill>
+                            <a:srgbClr val="172B49"/>
+                          </a:solidFill>
+                          <a:latin typeface="맑은 고딕"/>
+                          <a:ea typeface="맑은 고딕"/>
+                        </a:rPr>
+                        <a:t>관리자 화면에서 암호화 저장</a:t>
+                      </a:r>
+                    </a:p>
+                    <a:p>
+                      <a:pPr algn="l">
+                        <a:lnSpc>
+                          <a:spcPct val="113000"/>
+                        </a:lnSpc>
+                        <a:spcBef>
+                          <a:spcPts val="0"/>
+                        </a:spcBef>
+                        <a:spcAft>
+                          <a:spcPts val="0"/>
+                        </a:spcAft>
+                      </a:pPr>
+                      <a:r>
+                        <a:rPr sz="1350" b="0" lang="ko-KR">
+                          <a:solidFill>
+                            <a:srgbClr val="172B49"/>
+                          </a:solidFill>
+                          <a:latin typeface="맑은 고딕"/>
+                          <a:ea typeface="맑은 고딕"/>
+                        </a:rPr>
+                        <a:t>없으면 서버 환경변수</a:t>
+                      </a:r>
+                    </a:p>
+                  </a:txBody>
+                  <a:tcPr>
+                    <a:solidFill>
+                      <a:srgbClr val="FFFFFF"/>
+                    </a:solidFill>
+                    <a:lnL w="6350">
+                      <a:solidFill>
+                        <a:srgbClr val="F7F9FC"/>
+                      </a:solidFill>
+                    </a:lnL>
+                    <a:lnR w="6350">
+                      <a:solidFill>
+                        <a:srgbClr val="F7F9FC"/>
+                      </a:solidFill>
+                    </a:lnR>
+                    <a:lnT w="6350">
+                      <a:solidFill>
+                        <a:srgbClr val="F7F9FC"/>
+                      </a:solidFill>
+                    </a:lnT>
+                    <a:lnB w="6350">
+                      <a:solidFill>
+                        <a:srgbClr val="F7F9FC"/>
+                      </a:solidFill>
+                    </a:lnB>
+                  </a:tcPr>
+                </a:tc>
+              </a:tr>
+            </a:tbl>
+          </a:graphicData>
+        </a:graphic>
+      </p:graphicFrame>
+      <p:sp>
+        <p:nvSpPr>
+          <p:cNvPr id="6" name="TextBox 5"/>
+          <p:cNvSpPr txBox="1"/>
+          <p:nvPr/>
+        </p:nvSpPr>
+        <p:spPr>
+          <a:xfrm>
+            <a:off x="621792" y="6062472"/>
+            <a:ext cx="10927080" cy="365760"/>
+          </a:xfrm>
+          <a:prstGeom prst="rect">
+            <a:avLst/>
+          </a:prstGeom>
+          <a:noFill/>
+        </p:spPr>
+        <p:txBody>
+          <a:bodyPr wrap="square" anchor="t" lIns="0" rIns="0" tIns="0" bIns="0">
+            <a:noAutofit/>
+          </a:bodyPr>
+          <a:lstStyle/>
+          <a:p>
+            <a:pPr algn="l">
+              <a:lnSpc>
+                <a:spcPct val="113000"/>
+              </a:lnSpc>
+              <a:spcBef>
+                <a:spcPts val="0"/>
+              </a:spcBef>
+              <a:spcAft>
+                <a:spcPts val="0"/>
+              </a:spcAft>
+            </a:pPr>
+            <a:r>
+              <a:rPr sz="1300" b="0" lang="ko-KR">
+                <a:solidFill>
+                  <a:srgbClr val="53657D"/>
+                </a:solidFill>
+                <a:latin typeface="맑은 고딕"/>
+                <a:ea typeface="맑은 고딕"/>
+              </a:rPr>
+              <a:t>자격 증명은 저장만 되고 화면에는 마스킹된 값만 보입니다. 공휴일은 요청마다 외부를 부르지 않고 DB 캐시를 씁니다.</a:t>
+            </a:r>
+          </a:p>
+        </p:txBody>
+      </p:sp>
+    </p:spTree>
+  </p:cSld>
+  <p:clrMapOvr>
+    <a:masterClrMapping/>
+  </p:clrMapOvr>
+</p:sld>
+</file>
+
+<file path=ppt/slides/slide13.xml><?xml version="1.0" encoding="utf-8"?>
+<p:sld xmlns:a="http://schemas.openxmlformats.org/drawingml/2006/main" xmlns:p="http://schemas.openxmlformats.org/presentationml/2006/main" xmlns:r="http://schemas.openxmlformats.org/officeDocument/2006/relationships">
+  <p:cSld>
+    <p:bg>
+      <p:bgPr>
+        <a:solidFill>
+          <a:srgbClr val="F7F9FC"/>
+        </a:solidFill>
+        <a:effectLst/>
+      </p:bgPr>
+    </p:bg>
+    <p:spTree>
+      <p:nvGrpSpPr>
+        <p:cNvPr id="1" name=""/>
+        <p:cNvGrpSpPr/>
+        <p:nvPr/>
+      </p:nvGrpSpPr>
+      <p:grpSpPr/>
+      <p:sp>
+        <p:nvSpPr>
+          <p:cNvPr id="2" name="TextBox 1"/>
+          <p:cNvSpPr txBox="1"/>
+          <p:nvPr/>
+        </p:nvSpPr>
+        <p:spPr>
+          <a:xfrm>
+            <a:off x="594360" y="438912"/>
+            <a:ext cx="10972800" cy="594360"/>
+          </a:xfrm>
+          <a:prstGeom prst="rect">
+            <a:avLst/>
+          </a:prstGeom>
+          <a:noFill/>
+        </p:spPr>
+        <p:txBody>
+          <a:bodyPr wrap="square" anchor="t" lIns="0" rIns="0" tIns="0" bIns="0">
+            <a:noAutofit/>
+          </a:bodyPr>
+          <a:lstStyle/>
+          <a:p>
+            <a:pPr algn="l">
+              <a:lnSpc>
+                <a:spcPct val="113000"/>
+              </a:lnSpc>
+              <a:spcBef>
+                <a:spcPts val="0"/>
+              </a:spcBef>
+              <a:spcAft>
+                <a:spcPts val="0"/>
+              </a:spcAft>
+            </a:pPr>
+            <a:r>
+              <a:rPr sz="3200" b="1" lang="ko-KR">
+                <a:solidFill>
+                  <a:srgbClr val="172B49"/>
+                </a:solidFill>
+                <a:latin typeface="맑은 고딕"/>
+                <a:ea typeface="맑은 고딕"/>
+              </a:rPr>
+              <a:t>서버 내부의 업무 구조</a:t>
+            </a:r>
+          </a:p>
+        </p:txBody>
+      </p:sp>
+      <p:sp>
+        <p:nvSpPr>
+          <p:cNvPr id="3" name="TextBox 2"/>
+          <p:cNvSpPr txBox="1"/>
+          <p:nvPr/>
+        </p:nvSpPr>
+        <p:spPr>
+          <a:xfrm>
+            <a:off x="621792" y="1124712"/>
+            <a:ext cx="10972800" cy="548640"/>
+          </a:xfrm>
+          <a:prstGeom prst="rect">
+            <a:avLst/>
+          </a:prstGeom>
+          <a:noFill/>
+        </p:spPr>
+        <p:txBody>
+          <a:bodyPr wrap="square" anchor="t" lIns="0" rIns="0" tIns="0" bIns="0">
+            <a:noAutofit/>
+          </a:bodyPr>
+          <a:lstStyle/>
+          <a:p>
+            <a:pPr algn="l">
+              <a:lnSpc>
+                <a:spcPct val="113000"/>
+              </a:lnSpc>
+              <a:spcBef>
+                <a:spcPts val="0"/>
+              </a:spcBef>
+              <a:spcAft>
+                <a:spcPts val="0"/>
+              </a:spcAft>
+            </a:pPr>
+            <a:r>
+              <a:rPr sz="1650" b="0" lang="ko-KR">
+                <a:solidFill>
+                  <a:srgbClr val="53657D"/>
+                </a:solidFill>
+                <a:latin typeface="맑은 고딕"/>
+                <a:ea typeface="맑은 고딕"/>
+              </a:rPr>
+              <a:t>12개 업무 영역을 나누고, 요청 처리와 업무 규칙·데이터 저장의 역할을 분리했습니다.</a:t>
+            </a:r>
+          </a:p>
+        </p:txBody>
+      </p:sp>
+      <p:sp>
+        <p:nvSpPr>
+          <p:cNvPr id="4" name="TextBox 3"/>
+          <p:cNvSpPr txBox="1"/>
+          <p:nvPr/>
+        </p:nvSpPr>
+        <p:spPr>
+          <a:xfrm>
+            <a:off x="10954512" y="6428232"/>
+            <a:ext cx="594360" cy="228600"/>
+          </a:xfrm>
+          <a:prstGeom prst="rect">
+            <a:avLst/>
+          </a:prstGeom>
+          <a:noFill/>
+        </p:spPr>
+        <p:txBody>
+          <a:bodyPr wrap="square" anchor="t" lIns="0" rIns="0" tIns="0" bIns="0">
+            <a:noAutofit/>
+          </a:bodyPr>
+          <a:lstStyle/>
+          <a:p>
+            <a:pPr algn="r">
+              <a:lnSpc>
+                <a:spcPct val="113000"/>
+              </a:lnSpc>
+              <a:spcBef>
+                <a:spcPts val="0"/>
+              </a:spcBef>
+              <a:spcAft>
+                <a:spcPts val="0"/>
+              </a:spcAft>
+            </a:pPr>
+            <a:r>
+              <a:rPr sz="1100" b="0" lang="ko-KR">
+                <a:solidFill>
+                  <a:srgbClr val="53657D"/>
+                </a:solidFill>
+                <a:latin typeface="맑은 고딕"/>
+                <a:ea typeface="맑은 고딕"/>
+              </a:rPr>
+              <a:t>13</a:t>
             </a:r>
           </a:p>
         </p:txBody>
@@ -9275,816 +10807,6 @@
 </p:sld>
 </file>
 
-<file path=ppt/slides/slide13.xml><?xml version="1.0" encoding="utf-8"?>
-<p:sld xmlns:a="http://schemas.openxmlformats.org/drawingml/2006/main" xmlns:p="http://schemas.openxmlformats.org/presentationml/2006/main" xmlns:r="http://schemas.openxmlformats.org/officeDocument/2006/relationships">
-  <p:cSld>
-    <p:bg>
-      <p:bgPr>
-        <a:solidFill>
-          <a:srgbClr val="F7F9FC"/>
-        </a:solidFill>
-        <a:effectLst/>
-      </p:bgPr>
-    </p:bg>
-    <p:spTree>
-      <p:nvGrpSpPr>
-        <p:cNvPr id="1" name=""/>
-        <p:cNvGrpSpPr/>
-        <p:nvPr/>
-      </p:nvGrpSpPr>
-      <p:grpSpPr/>
-      <p:sp>
-        <p:nvSpPr>
-          <p:cNvPr id="2" name="TextBox 1"/>
-          <p:cNvSpPr txBox="1"/>
-          <p:nvPr/>
-        </p:nvSpPr>
-        <p:spPr>
-          <a:xfrm>
-            <a:off x="594360" y="438912"/>
-            <a:ext cx="10972800" cy="594360"/>
-          </a:xfrm>
-          <a:prstGeom prst="rect">
-            <a:avLst/>
-          </a:prstGeom>
-          <a:noFill/>
-        </p:spPr>
-        <p:txBody>
-          <a:bodyPr wrap="square" anchor="t" lIns="0" rIns="0" tIns="0" bIns="0">
-            <a:noAutofit/>
-          </a:bodyPr>
-          <a:lstStyle/>
-          <a:p>
-            <a:pPr algn="l">
-              <a:lnSpc>
-                <a:spcPct val="113000"/>
-              </a:lnSpc>
-              <a:spcBef>
-                <a:spcPts val="0"/>
-              </a:spcBef>
-              <a:spcAft>
-                <a:spcPts val="0"/>
-              </a:spcAft>
-            </a:pPr>
-            <a:r>
-              <a:rPr sz="3200" b="1" lang="ko-KR">
-                <a:solidFill>
-                  <a:srgbClr val="172B49"/>
-                </a:solidFill>
-                <a:latin typeface="맑은 고딕"/>
-                <a:ea typeface="맑은 고딕"/>
-              </a:rPr>
-              <a:t>화면과 데이터의 연결</a:t>
-            </a:r>
-          </a:p>
-        </p:txBody>
-      </p:sp>
-      <p:sp>
-        <p:nvSpPr>
-          <p:cNvPr id="3" name="TextBox 2"/>
-          <p:cNvSpPr txBox="1"/>
-          <p:nvPr/>
-        </p:nvSpPr>
-        <p:spPr>
-          <a:xfrm>
-            <a:off x="621792" y="1124712"/>
-            <a:ext cx="10972800" cy="548640"/>
-          </a:xfrm>
-          <a:prstGeom prst="rect">
-            <a:avLst/>
-          </a:prstGeom>
-          <a:noFill/>
-        </p:spPr>
-        <p:txBody>
-          <a:bodyPr wrap="square" anchor="t" lIns="0" rIns="0" tIns="0" bIns="0">
-            <a:noAutofit/>
-          </a:bodyPr>
-          <a:lstStyle/>
-          <a:p>
-            <a:pPr algn="l">
-              <a:lnSpc>
-                <a:spcPct val="113000"/>
-              </a:lnSpc>
-              <a:spcBef>
-                <a:spcPts val="0"/>
-              </a:spcBef>
-              <a:spcAft>
-                <a:spcPts val="0"/>
-              </a:spcAft>
-            </a:pPr>
-            <a:r>
-              <a:rPr sz="1650" b="0" lang="ko-KR">
-                <a:solidFill>
-                  <a:srgbClr val="53657D"/>
-                </a:solidFill>
-                <a:latin typeface="맑은 고딕"/>
-                <a:ea typeface="맑은 고딕"/>
-              </a:rPr>
-              <a:t>17개 화면이 서버 데이터를 공통 방식으로 요청하고 갱신합니다.</a:t>
-            </a:r>
-          </a:p>
-        </p:txBody>
-      </p:sp>
-      <p:sp>
-        <p:nvSpPr>
-          <p:cNvPr id="4" name="TextBox 3"/>
-          <p:cNvSpPr txBox="1"/>
-          <p:nvPr/>
-        </p:nvSpPr>
-        <p:spPr>
-          <a:xfrm>
-            <a:off x="10954512" y="6428232"/>
-            <a:ext cx="594360" cy="228600"/>
-          </a:xfrm>
-          <a:prstGeom prst="rect">
-            <a:avLst/>
-          </a:prstGeom>
-          <a:noFill/>
-        </p:spPr>
-        <p:txBody>
-          <a:bodyPr wrap="square" anchor="t" lIns="0" rIns="0" tIns="0" bIns="0">
-            <a:noAutofit/>
-          </a:bodyPr>
-          <a:lstStyle/>
-          <a:p>
-            <a:pPr algn="r">
-              <a:lnSpc>
-                <a:spcPct val="113000"/>
-              </a:lnSpc>
-              <a:spcBef>
-                <a:spcPts val="0"/>
-              </a:spcBef>
-              <a:spcAft>
-                <a:spcPts val="0"/>
-              </a:spcAft>
-            </a:pPr>
-            <a:r>
-              <a:rPr sz="1100" b="0" lang="ko-KR">
-                <a:solidFill>
-                  <a:srgbClr val="53657D"/>
-                </a:solidFill>
-                <a:latin typeface="맑은 고딕"/>
-                <a:ea typeface="맑은 고딕"/>
-              </a:rPr>
-              <a:t>13</a:t>
-            </a:r>
-          </a:p>
-        </p:txBody>
-      </p:sp>
-      <p:sp>
-        <p:nvSpPr>
-          <p:cNvPr id="5" name="Rectangle 4"/>
-          <p:cNvSpPr/>
-          <p:nvPr/>
-        </p:nvSpPr>
-        <p:spPr>
-          <a:xfrm>
-            <a:off x="685800" y="1947672"/>
-            <a:ext cx="2999232" cy="1060704"/>
-          </a:xfrm>
-          <a:prstGeom prst="rect">
-            <a:avLst/>
-          </a:prstGeom>
-          <a:solidFill>
-            <a:srgbClr val="FFFFFF"/>
-          </a:solidFill>
-          <a:ln w="12700">
-            <a:solidFill>
-              <a:srgbClr val="8C9CB2"/>
-            </a:solidFill>
-          </a:ln>
-          <a:effectLst/>
-        </p:spPr>
-        <p:style>
-          <a:lnRef idx="1">
-            <a:schemeClr val="accent1"/>
-          </a:lnRef>
-          <a:fillRef idx="3">
-            <a:schemeClr val="accent1"/>
-          </a:fillRef>
-          <a:effectRef idx="2">
-            <a:schemeClr val="accent1"/>
-          </a:effectRef>
-          <a:fontRef idx="minor">
-            <a:schemeClr val="lt1"/>
-          </a:fontRef>
-        </p:style>
-        <p:txBody>
-          <a:bodyPr rtlCol="0" anchor="ctr" wrap="square" tIns="91440" bIns="91440">
-            <a:noAutofit/>
-          </a:bodyPr>
-          <a:lstStyle/>
-          <a:p>
-            <a:pPr algn="ctr">
-              <a:lnSpc>
-                <a:spcPct val="113000"/>
-              </a:lnSpc>
-              <a:spcBef>
-                <a:spcPts val="0"/>
-              </a:spcBef>
-              <a:spcAft>
-                <a:spcPts val="0"/>
-              </a:spcAft>
-            </a:pPr>
-            <a:r>
-              <a:rPr sz="2200" b="1" lang="ko-KR">
-                <a:solidFill>
-                  <a:srgbClr val="172B49"/>
-                </a:solidFill>
-                <a:latin typeface="맑은 고딕"/>
-                <a:ea typeface="맑은 고딕"/>
-              </a:rPr>
-              <a:t>서버 API 연결</a:t>
-            </a:r>
-          </a:p>
-          <a:p>
-            <a:pPr algn="ctr">
-              <a:lnSpc>
-                <a:spcPct val="113000"/>
-              </a:lnSpc>
-              <a:spcBef>
-                <a:spcPts val="0"/>
-              </a:spcBef>
-              <a:spcAft>
-                <a:spcPts val="0"/>
-              </a:spcAft>
-            </a:pPr>
-            <a:r>
-              <a:rPr sz="1600" b="0" lang="ko-KR">
-                <a:solidFill>
-                  <a:srgbClr val="172B49"/>
-                </a:solidFill>
-                <a:latin typeface="맑은 고딕"/>
-                <a:ea typeface="맑은 고딕"/>
-              </a:rPr>
-              <a:t>Axios로 요청·응답 처리</a:t>
-            </a:r>
-          </a:p>
-        </p:txBody>
-      </p:sp>
-      <p:sp>
-        <p:nvSpPr>
-          <p:cNvPr id="6" name="Rectangle 5"/>
-          <p:cNvSpPr/>
-          <p:nvPr/>
-        </p:nvSpPr>
-        <p:spPr>
-          <a:xfrm>
-            <a:off x="4599432" y="1947672"/>
-            <a:ext cx="2999232" cy="1060704"/>
-          </a:xfrm>
-          <a:prstGeom prst="rect">
-            <a:avLst/>
-          </a:prstGeom>
-          <a:solidFill>
-            <a:srgbClr val="EAF0FA"/>
-          </a:solidFill>
-          <a:ln w="12700">
-            <a:solidFill>
-              <a:srgbClr val="245BCE"/>
-            </a:solidFill>
-          </a:ln>
-          <a:effectLst/>
-        </p:spPr>
-        <p:style>
-          <a:lnRef idx="1">
-            <a:schemeClr val="accent1"/>
-          </a:lnRef>
-          <a:fillRef idx="3">
-            <a:schemeClr val="accent1"/>
-          </a:fillRef>
-          <a:effectRef idx="2">
-            <a:schemeClr val="accent1"/>
-          </a:effectRef>
-          <a:fontRef idx="minor">
-            <a:schemeClr val="lt1"/>
-          </a:fontRef>
-        </p:style>
-        <p:txBody>
-          <a:bodyPr rtlCol="0" anchor="ctr" wrap="square" tIns="91440" bIns="91440">
-            <a:noAutofit/>
-          </a:bodyPr>
-          <a:lstStyle/>
-          <a:p>
-            <a:pPr algn="ctr">
-              <a:lnSpc>
-                <a:spcPct val="113000"/>
-              </a:lnSpc>
-              <a:spcBef>
-                <a:spcPts val="0"/>
-              </a:spcBef>
-              <a:spcAft>
-                <a:spcPts val="0"/>
-              </a:spcAft>
-            </a:pPr>
-            <a:r>
-              <a:rPr sz="2200" b="1" lang="ko-KR">
-                <a:solidFill>
-                  <a:srgbClr val="245BCE"/>
-                </a:solidFill>
-                <a:latin typeface="맑은 고딕"/>
-                <a:ea typeface="맑은 고딕"/>
-              </a:rPr>
-              <a:t>데이터 조회·캐시</a:t>
-            </a:r>
-          </a:p>
-          <a:p>
-            <a:pPr algn="ctr">
-              <a:lnSpc>
-                <a:spcPct val="113000"/>
-              </a:lnSpc>
-              <a:spcBef>
-                <a:spcPts val="0"/>
-              </a:spcBef>
-              <a:spcAft>
-                <a:spcPts val="0"/>
-              </a:spcAft>
-            </a:pPr>
-            <a:r>
-              <a:rPr sz="1600" b="0" lang="ko-KR">
-                <a:solidFill>
-                  <a:srgbClr val="245BCE"/>
-                </a:solidFill>
-                <a:latin typeface="맑은 고딕"/>
-                <a:ea typeface="맑은 고딕"/>
-              </a:rPr>
-              <a:t>React Query로 공통 관리</a:t>
-            </a:r>
-          </a:p>
-        </p:txBody>
-      </p:sp>
-      <p:sp>
-        <p:nvSpPr>
-          <p:cNvPr id="7" name="Rectangle 6"/>
-          <p:cNvSpPr/>
-          <p:nvPr/>
-        </p:nvSpPr>
-        <p:spPr>
-          <a:xfrm>
-            <a:off x="8513064" y="1947672"/>
-            <a:ext cx="2999232" cy="1060704"/>
-          </a:xfrm>
-          <a:prstGeom prst="rect">
-            <a:avLst/>
-          </a:prstGeom>
-          <a:solidFill>
-            <a:srgbClr val="FFFFFF"/>
-          </a:solidFill>
-          <a:ln w="12700">
-            <a:solidFill>
-              <a:srgbClr val="8C9CB2"/>
-            </a:solidFill>
-          </a:ln>
-          <a:effectLst/>
-        </p:spPr>
-        <p:style>
-          <a:lnRef idx="1">
-            <a:schemeClr val="accent1"/>
-          </a:lnRef>
-          <a:fillRef idx="3">
-            <a:schemeClr val="accent1"/>
-          </a:fillRef>
-          <a:effectRef idx="2">
-            <a:schemeClr val="accent1"/>
-          </a:effectRef>
-          <a:fontRef idx="minor">
-            <a:schemeClr val="lt1"/>
-          </a:fontRef>
-        </p:style>
-        <p:txBody>
-          <a:bodyPr rtlCol="0" anchor="ctr" wrap="square" tIns="91440" bIns="91440">
-            <a:noAutofit/>
-          </a:bodyPr>
-          <a:lstStyle/>
-          <a:p>
-            <a:pPr algn="ctr">
-              <a:lnSpc>
-                <a:spcPct val="113000"/>
-              </a:lnSpc>
-              <a:spcBef>
-                <a:spcPts val="0"/>
-              </a:spcBef>
-              <a:spcAft>
-                <a:spcPts val="0"/>
-              </a:spcAft>
-            </a:pPr>
-            <a:r>
-              <a:rPr sz="2200" b="1" lang="ko-KR">
-                <a:solidFill>
-                  <a:srgbClr val="172B49"/>
-                </a:solidFill>
-                <a:latin typeface="맑은 고딕"/>
-                <a:ea typeface="맑은 고딕"/>
-              </a:rPr>
-              <a:t>업무 화면</a:t>
-            </a:r>
-          </a:p>
-          <a:p>
-            <a:pPr algn="ctr">
-              <a:lnSpc>
-                <a:spcPct val="113000"/>
-              </a:lnSpc>
-              <a:spcBef>
-                <a:spcPts val="0"/>
-              </a:spcBef>
-              <a:spcAft>
-                <a:spcPts val="0"/>
-              </a:spcAft>
-            </a:pPr>
-            <a:r>
-              <a:rPr sz="1600" b="0" lang="ko-KR">
-                <a:solidFill>
-                  <a:srgbClr val="172B49"/>
-                </a:solidFill>
-                <a:latin typeface="맑은 고딕"/>
-                <a:ea typeface="맑은 고딕"/>
-              </a:rPr>
-              <a:t>페이지가 데이터를 표시</a:t>
-            </a:r>
-          </a:p>
-        </p:txBody>
-      </p:sp>
-      <p:cxnSp>
-        <p:nvCxnSpPr>
-          <p:cNvPr id="8" name="Connector 7"/>
-          <p:cNvCxnSpPr/>
-          <p:nvPr/>
-        </p:nvCxnSpPr>
-        <p:spPr>
-          <a:xfrm>
-            <a:off x="3685032" y="2478024"/>
-            <a:ext cx="914400" cy="0"/>
-          </a:xfrm>
-          <a:prstGeom prst="line">
-            <a:avLst/>
-          </a:prstGeom>
-          <a:ln w="19050">
-            <a:solidFill>
-              <a:srgbClr val="245BCE"/>
-            </a:solidFill>
-            <a:tailEnd type="triangle" w="sm" len="sm"/>
-          </a:ln>
-          <a:effectLst/>
-        </p:spPr>
-        <p:style>
-          <a:lnRef idx="2">
-            <a:schemeClr val="accent1"/>
-          </a:lnRef>
-          <a:fillRef idx="0">
-            <a:schemeClr val="accent1"/>
-          </a:fillRef>
-          <a:effectRef idx="1">
-            <a:schemeClr val="accent1"/>
-          </a:effectRef>
-          <a:fontRef idx="minor">
-            <a:schemeClr val="tx1"/>
-          </a:fontRef>
-        </p:style>
-      </p:cxnSp>
-      <p:cxnSp>
-        <p:nvCxnSpPr>
-          <p:cNvPr id="9" name="Connector 8"/>
-          <p:cNvCxnSpPr/>
-          <p:nvPr/>
-        </p:nvCxnSpPr>
-        <p:spPr>
-          <a:xfrm>
-            <a:off x="7598664" y="2478024"/>
-            <a:ext cx="914400" cy="0"/>
-          </a:xfrm>
-          <a:prstGeom prst="line">
-            <a:avLst/>
-          </a:prstGeom>
-          <a:ln w="19050">
-            <a:solidFill>
-              <a:srgbClr val="245BCE"/>
-            </a:solidFill>
-            <a:tailEnd type="triangle" w="sm" len="sm"/>
-          </a:ln>
-          <a:effectLst/>
-        </p:spPr>
-        <p:style>
-          <a:lnRef idx="2">
-            <a:schemeClr val="accent1"/>
-          </a:lnRef>
-          <a:fillRef idx="0">
-            <a:schemeClr val="accent1"/>
-          </a:fillRef>
-          <a:effectRef idx="1">
-            <a:schemeClr val="accent1"/>
-          </a:effectRef>
-          <a:fontRef idx="minor">
-            <a:schemeClr val="tx1"/>
-          </a:fontRef>
-        </p:style>
-      </p:cxnSp>
-      <p:sp>
-        <p:nvSpPr>
-          <p:cNvPr id="10" name="TextBox 9"/>
-          <p:cNvSpPr txBox="1"/>
-          <p:nvPr/>
-        </p:nvSpPr>
-        <p:spPr>
-          <a:xfrm>
-            <a:off x="704088" y="3611880"/>
-            <a:ext cx="5257800" cy="502920"/>
-          </a:xfrm>
-          <a:prstGeom prst="rect">
-            <a:avLst/>
-          </a:prstGeom>
-          <a:noFill/>
-        </p:spPr>
-        <p:txBody>
-          <a:bodyPr wrap="square" anchor="t" lIns="0" rIns="0" tIns="0" bIns="0">
-            <a:noAutofit/>
-          </a:bodyPr>
-          <a:lstStyle/>
-          <a:p>
-            <a:pPr algn="l">
-              <a:lnSpc>
-                <a:spcPct val="113000"/>
-              </a:lnSpc>
-              <a:spcBef>
-                <a:spcPts val="0"/>
-              </a:spcBef>
-              <a:spcAft>
-                <a:spcPts val="0"/>
-              </a:spcAft>
-            </a:pPr>
-            <a:r>
-              <a:rPr sz="2300" b="1" lang="ko-KR">
-                <a:solidFill>
-                  <a:srgbClr val="172B49"/>
-                </a:solidFill>
-                <a:latin typeface="맑은 고딕"/>
-                <a:ea typeface="맑은 고딕"/>
-              </a:rPr>
-              <a:t>공통 화면</a:t>
-            </a:r>
-          </a:p>
-        </p:txBody>
-      </p:sp>
-      <p:sp>
-        <p:nvSpPr>
-          <p:cNvPr id="11" name="TextBox 10"/>
-          <p:cNvSpPr txBox="1"/>
-          <p:nvPr/>
-        </p:nvSpPr>
-        <p:spPr>
-          <a:xfrm>
-            <a:off x="704088" y="4306824"/>
-            <a:ext cx="5056632" cy="1115568"/>
-          </a:xfrm>
-          <a:prstGeom prst="rect">
-            <a:avLst/>
-          </a:prstGeom>
-          <a:noFill/>
-        </p:spPr>
-        <p:txBody>
-          <a:bodyPr wrap="square" anchor="t" lIns="0" rIns="0" tIns="0" bIns="0">
-            <a:noAutofit/>
-          </a:bodyPr>
-          <a:lstStyle/>
-          <a:p>
-            <a:pPr algn="l">
-              <a:lnSpc>
-                <a:spcPct val="113000"/>
-              </a:lnSpc>
-              <a:spcBef>
-                <a:spcPts val="0"/>
-              </a:spcBef>
-              <a:spcAft>
-                <a:spcPts val="0"/>
-              </a:spcAft>
-            </a:pPr>
-            <a:r>
-              <a:rPr sz="1700" b="0" lang="ko-KR">
-                <a:solidFill>
-                  <a:srgbClr val="53657D"/>
-                </a:solidFill>
-                <a:latin typeface="맑은 고딕"/>
-                <a:ea typeface="맑은 고딕"/>
-              </a:rPr>
-              <a:t>대시보드 · 캘린더 · 내역 · 복리후생</a:t>
-            </a:r>
-          </a:p>
-          <a:p>
-            <a:pPr algn="l">
-              <a:lnSpc>
-                <a:spcPct val="113000"/>
-              </a:lnSpc>
-              <a:spcBef>
-                <a:spcPts val="0"/>
-              </a:spcBef>
-              <a:spcAft>
-                <a:spcPts val="0"/>
-              </a:spcAft>
-            </a:pPr>
-            <a:r>
-              <a:rPr sz="1700" b="0" lang="ko-KR">
-                <a:solidFill>
-                  <a:srgbClr val="53657D"/>
-                </a:solidFill>
-                <a:latin typeface="맑은 고딕"/>
-                <a:ea typeface="맑은 고딕"/>
-              </a:rPr>
-              <a:t>내 정보 · 결재 관리 · 팀 현황</a:t>
-            </a:r>
-          </a:p>
-          <a:p>
-            <a:pPr algn="l">
-              <a:lnSpc>
-                <a:spcPct val="113000"/>
-              </a:lnSpc>
-              <a:spcBef>
-                <a:spcPts val="0"/>
-              </a:spcBef>
-              <a:spcAft>
-                <a:spcPts val="0"/>
-              </a:spcAft>
-            </a:pPr>
-            <a:r>
-              <a:rPr sz="1700" b="0" lang="ko-KR">
-                <a:solidFill>
-                  <a:srgbClr val="53657D"/>
-                </a:solidFill>
-                <a:latin typeface="맑은 고딕"/>
-                <a:ea typeface="맑은 고딕"/>
-              </a:rPr>
-              <a:t>로그인 · 로그인 연결 · 온보딩</a:t>
-            </a:r>
-          </a:p>
-        </p:txBody>
-      </p:sp>
-      <p:sp>
-        <p:nvSpPr>
-          <p:cNvPr id="12" name="TextBox 11"/>
-          <p:cNvSpPr txBox="1"/>
-          <p:nvPr/>
-        </p:nvSpPr>
-        <p:spPr>
-          <a:xfrm>
-            <a:off x="6409944" y="3611880"/>
-            <a:ext cx="5056632" cy="502920"/>
-          </a:xfrm>
-          <a:prstGeom prst="rect">
-            <a:avLst/>
-          </a:prstGeom>
-          <a:noFill/>
-        </p:spPr>
-        <p:txBody>
-          <a:bodyPr wrap="square" anchor="t" lIns="0" rIns="0" tIns="0" bIns="0">
-            <a:noAutofit/>
-          </a:bodyPr>
-          <a:lstStyle/>
-          <a:p>
-            <a:pPr algn="l">
-              <a:lnSpc>
-                <a:spcPct val="113000"/>
-              </a:lnSpc>
-              <a:spcBef>
-                <a:spcPts val="0"/>
-              </a:spcBef>
-              <a:spcAft>
-                <a:spcPts val="0"/>
-              </a:spcAft>
-            </a:pPr>
-            <a:r>
-              <a:rPr sz="2300" b="1" lang="ko-KR">
-                <a:solidFill>
-                  <a:srgbClr val="172B49"/>
-                </a:solidFill>
-                <a:latin typeface="맑은 고딕"/>
-                <a:ea typeface="맑은 고딕"/>
-              </a:rPr>
-              <a:t>관리자 화면</a:t>
-            </a:r>
-          </a:p>
-        </p:txBody>
-      </p:sp>
-      <p:sp>
-        <p:nvSpPr>
-          <p:cNvPr id="13" name="TextBox 12"/>
-          <p:cNvSpPr txBox="1"/>
-          <p:nvPr/>
-        </p:nvSpPr>
-        <p:spPr>
-          <a:xfrm>
-            <a:off x="6409944" y="4306824"/>
-            <a:ext cx="5056632" cy="1115568"/>
-          </a:xfrm>
-          <a:prstGeom prst="rect">
-            <a:avLst/>
-          </a:prstGeom>
-          <a:noFill/>
-        </p:spPr>
-        <p:txBody>
-          <a:bodyPr wrap="square" anchor="t" lIns="0" rIns="0" tIns="0" bIns="0">
-            <a:noAutofit/>
-          </a:bodyPr>
-          <a:lstStyle/>
-          <a:p>
-            <a:pPr algn="l">
-              <a:lnSpc>
-                <a:spcPct val="113000"/>
-              </a:lnSpc>
-              <a:spcBef>
-                <a:spcPts val="0"/>
-              </a:spcBef>
-              <a:spcAft>
-                <a:spcPts val="0"/>
-              </a:spcAft>
-            </a:pPr>
-            <a:r>
-              <a:rPr sz="1700" b="0" lang="ko-KR">
-                <a:solidFill>
-                  <a:srgbClr val="53657D"/>
-                </a:solidFill>
-                <a:latin typeface="맑은 고딕"/>
-                <a:ea typeface="맑은 고딕"/>
-              </a:rPr>
-              <a:t>구성원 · 부서 · 연차 정책 · 복리후생 정책</a:t>
-            </a:r>
-          </a:p>
-          <a:p>
-            <a:pPr algn="l">
-              <a:lnSpc>
-                <a:spcPct val="113000"/>
-              </a:lnSpc>
-              <a:spcBef>
-                <a:spcPts val="0"/>
-              </a:spcBef>
-              <a:spcAft>
-                <a:spcPts val="0"/>
-              </a:spcAft>
-            </a:pPr>
-            <a:r>
-              <a:rPr sz="1700" b="0" lang="ko-KR">
-                <a:solidFill>
-                  <a:srgbClr val="53657D"/>
-                </a:solidFill>
-                <a:latin typeface="맑은 고딕"/>
-                <a:ea typeface="맑은 고딕"/>
-              </a:rPr>
-              <a:t>처리 이력 · 이메일 · 외부 연동</a:t>
-            </a:r>
-          </a:p>
-        </p:txBody>
-      </p:sp>
-      <p:sp>
-        <p:nvSpPr>
-          <p:cNvPr id="14" name="TextBox 13"/>
-          <p:cNvSpPr txBox="1"/>
-          <p:nvPr/>
-        </p:nvSpPr>
-        <p:spPr>
-          <a:xfrm>
-            <a:off x="621792" y="6062472"/>
-            <a:ext cx="10927080" cy="365760"/>
-          </a:xfrm>
-          <a:prstGeom prst="rect">
-            <a:avLst/>
-          </a:prstGeom>
-          <a:noFill/>
-        </p:spPr>
-        <p:txBody>
-          <a:bodyPr wrap="square" anchor="t" lIns="0" rIns="0" tIns="0" bIns="0">
-            <a:noAutofit/>
-          </a:bodyPr>
-          <a:lstStyle/>
-          <a:p>
-            <a:pPr algn="l">
-              <a:lnSpc>
-                <a:spcPct val="113000"/>
-              </a:lnSpc>
-              <a:spcBef>
-                <a:spcPts val="0"/>
-              </a:spcBef>
-              <a:spcAft>
-                <a:spcPts val="0"/>
-              </a:spcAft>
-            </a:pPr>
-            <a:r>
-              <a:rPr sz="1300" b="0" lang="ko-KR">
-                <a:solidFill>
-                  <a:srgbClr val="53657D"/>
-                </a:solidFill>
-                <a:latin typeface="맑은 고딕"/>
-                <a:ea typeface="맑은 고딕"/>
-              </a:rPr>
-              <a:t>권한에 맞춰 화면을 열고, 오류 알림을 공통 처리합니다. 디자인 값은 Tailwind v4의 CSS에서 관리합니다.</a:t>
-            </a:r>
-          </a:p>
-        </p:txBody>
-      </p:sp>
-    </p:spTree>
-  </p:cSld>
-  <p:clrMapOvr>
-    <a:masterClrMapping/>
-  </p:clrMapOvr>
-</p:sld>
-</file>
-
 <file path=ppt/slides/slide14.xml><?xml version="1.0" encoding="utf-8"?>
 <p:sld xmlns:a="http://schemas.openxmlformats.org/drawingml/2006/main" xmlns:p="http://schemas.openxmlformats.org/presentationml/2006/main" xmlns:r="http://schemas.openxmlformats.org/officeDocument/2006/relationships">
   <p:cSld>
@@ -10144,7 +10866,7 @@
                 <a:latin typeface="맑은 고딕"/>
                 <a:ea typeface="맑은 고딕"/>
               </a:rPr>
-              <a:t>백엔드 기술과 라이브러리</a:t>
+              <a:t>화면과 데이터의 연결</a:t>
             </a:r>
           </a:p>
         </p:txBody>
@@ -10190,7 +10912,7 @@
                 <a:latin typeface="맑은 고딕"/>
                 <a:ea typeface="맑은 고딕"/>
               </a:rPr>
-              <a:t>Java 21 · Spring Boot 4.1.0 · Gradle</a:t>
+              <a:t>17개 화면이 서버 데이터를 공통 방식으로 요청하고 갱신합니다.</a:t>
             </a:r>
           </a:p>
         </p:txBody>
@@ -10237,6 +10959,816 @@
                 <a:ea typeface="맑은 고딕"/>
               </a:rPr>
               <a:t>14</a:t>
+            </a:r>
+          </a:p>
+        </p:txBody>
+      </p:sp>
+      <p:sp>
+        <p:nvSpPr>
+          <p:cNvPr id="5" name="Rectangle 4"/>
+          <p:cNvSpPr/>
+          <p:nvPr/>
+        </p:nvSpPr>
+        <p:spPr>
+          <a:xfrm>
+            <a:off x="685800" y="1947672"/>
+            <a:ext cx="2999232" cy="1060704"/>
+          </a:xfrm>
+          <a:prstGeom prst="rect">
+            <a:avLst/>
+          </a:prstGeom>
+          <a:solidFill>
+            <a:srgbClr val="FFFFFF"/>
+          </a:solidFill>
+          <a:ln w="12700">
+            <a:solidFill>
+              <a:srgbClr val="8C9CB2"/>
+            </a:solidFill>
+          </a:ln>
+          <a:effectLst/>
+        </p:spPr>
+        <p:style>
+          <a:lnRef idx="1">
+            <a:schemeClr val="accent1"/>
+          </a:lnRef>
+          <a:fillRef idx="3">
+            <a:schemeClr val="accent1"/>
+          </a:fillRef>
+          <a:effectRef idx="2">
+            <a:schemeClr val="accent1"/>
+          </a:effectRef>
+          <a:fontRef idx="minor">
+            <a:schemeClr val="lt1"/>
+          </a:fontRef>
+        </p:style>
+        <p:txBody>
+          <a:bodyPr rtlCol="0" anchor="ctr" wrap="square" tIns="91440" bIns="91440">
+            <a:noAutofit/>
+          </a:bodyPr>
+          <a:lstStyle/>
+          <a:p>
+            <a:pPr algn="ctr">
+              <a:lnSpc>
+                <a:spcPct val="113000"/>
+              </a:lnSpc>
+              <a:spcBef>
+                <a:spcPts val="0"/>
+              </a:spcBef>
+              <a:spcAft>
+                <a:spcPts val="0"/>
+              </a:spcAft>
+            </a:pPr>
+            <a:r>
+              <a:rPr sz="2200" b="1" lang="ko-KR">
+                <a:solidFill>
+                  <a:srgbClr val="172B49"/>
+                </a:solidFill>
+                <a:latin typeface="맑은 고딕"/>
+                <a:ea typeface="맑은 고딕"/>
+              </a:rPr>
+              <a:t>서버 API 연결</a:t>
+            </a:r>
+          </a:p>
+          <a:p>
+            <a:pPr algn="ctr">
+              <a:lnSpc>
+                <a:spcPct val="113000"/>
+              </a:lnSpc>
+              <a:spcBef>
+                <a:spcPts val="0"/>
+              </a:spcBef>
+              <a:spcAft>
+                <a:spcPts val="0"/>
+              </a:spcAft>
+            </a:pPr>
+            <a:r>
+              <a:rPr sz="1600" b="0" lang="ko-KR">
+                <a:solidFill>
+                  <a:srgbClr val="172B49"/>
+                </a:solidFill>
+                <a:latin typeface="맑은 고딕"/>
+                <a:ea typeface="맑은 고딕"/>
+              </a:rPr>
+              <a:t>Axios로 요청·응답 처리</a:t>
+            </a:r>
+          </a:p>
+        </p:txBody>
+      </p:sp>
+      <p:sp>
+        <p:nvSpPr>
+          <p:cNvPr id="6" name="Rectangle 5"/>
+          <p:cNvSpPr/>
+          <p:nvPr/>
+        </p:nvSpPr>
+        <p:spPr>
+          <a:xfrm>
+            <a:off x="4599432" y="1947672"/>
+            <a:ext cx="2999232" cy="1060704"/>
+          </a:xfrm>
+          <a:prstGeom prst="rect">
+            <a:avLst/>
+          </a:prstGeom>
+          <a:solidFill>
+            <a:srgbClr val="EAF0FA"/>
+          </a:solidFill>
+          <a:ln w="12700">
+            <a:solidFill>
+              <a:srgbClr val="245BCE"/>
+            </a:solidFill>
+          </a:ln>
+          <a:effectLst/>
+        </p:spPr>
+        <p:style>
+          <a:lnRef idx="1">
+            <a:schemeClr val="accent1"/>
+          </a:lnRef>
+          <a:fillRef idx="3">
+            <a:schemeClr val="accent1"/>
+          </a:fillRef>
+          <a:effectRef idx="2">
+            <a:schemeClr val="accent1"/>
+          </a:effectRef>
+          <a:fontRef idx="minor">
+            <a:schemeClr val="lt1"/>
+          </a:fontRef>
+        </p:style>
+        <p:txBody>
+          <a:bodyPr rtlCol="0" anchor="ctr" wrap="square" tIns="91440" bIns="91440">
+            <a:noAutofit/>
+          </a:bodyPr>
+          <a:lstStyle/>
+          <a:p>
+            <a:pPr algn="ctr">
+              <a:lnSpc>
+                <a:spcPct val="113000"/>
+              </a:lnSpc>
+              <a:spcBef>
+                <a:spcPts val="0"/>
+              </a:spcBef>
+              <a:spcAft>
+                <a:spcPts val="0"/>
+              </a:spcAft>
+            </a:pPr>
+            <a:r>
+              <a:rPr sz="2200" b="1" lang="ko-KR">
+                <a:solidFill>
+                  <a:srgbClr val="245BCE"/>
+                </a:solidFill>
+                <a:latin typeface="맑은 고딕"/>
+                <a:ea typeface="맑은 고딕"/>
+              </a:rPr>
+              <a:t>데이터 조회·캐시</a:t>
+            </a:r>
+          </a:p>
+          <a:p>
+            <a:pPr algn="ctr">
+              <a:lnSpc>
+                <a:spcPct val="113000"/>
+              </a:lnSpc>
+              <a:spcBef>
+                <a:spcPts val="0"/>
+              </a:spcBef>
+              <a:spcAft>
+                <a:spcPts val="0"/>
+              </a:spcAft>
+            </a:pPr>
+            <a:r>
+              <a:rPr sz="1600" b="0" lang="ko-KR">
+                <a:solidFill>
+                  <a:srgbClr val="245BCE"/>
+                </a:solidFill>
+                <a:latin typeface="맑은 고딕"/>
+                <a:ea typeface="맑은 고딕"/>
+              </a:rPr>
+              <a:t>React Query로 공통 관리</a:t>
+            </a:r>
+          </a:p>
+        </p:txBody>
+      </p:sp>
+      <p:sp>
+        <p:nvSpPr>
+          <p:cNvPr id="7" name="Rectangle 6"/>
+          <p:cNvSpPr/>
+          <p:nvPr/>
+        </p:nvSpPr>
+        <p:spPr>
+          <a:xfrm>
+            <a:off x="8513064" y="1947672"/>
+            <a:ext cx="2999232" cy="1060704"/>
+          </a:xfrm>
+          <a:prstGeom prst="rect">
+            <a:avLst/>
+          </a:prstGeom>
+          <a:solidFill>
+            <a:srgbClr val="FFFFFF"/>
+          </a:solidFill>
+          <a:ln w="12700">
+            <a:solidFill>
+              <a:srgbClr val="8C9CB2"/>
+            </a:solidFill>
+          </a:ln>
+          <a:effectLst/>
+        </p:spPr>
+        <p:style>
+          <a:lnRef idx="1">
+            <a:schemeClr val="accent1"/>
+          </a:lnRef>
+          <a:fillRef idx="3">
+            <a:schemeClr val="accent1"/>
+          </a:fillRef>
+          <a:effectRef idx="2">
+            <a:schemeClr val="accent1"/>
+          </a:effectRef>
+          <a:fontRef idx="minor">
+            <a:schemeClr val="lt1"/>
+          </a:fontRef>
+        </p:style>
+        <p:txBody>
+          <a:bodyPr rtlCol="0" anchor="ctr" wrap="square" tIns="91440" bIns="91440">
+            <a:noAutofit/>
+          </a:bodyPr>
+          <a:lstStyle/>
+          <a:p>
+            <a:pPr algn="ctr">
+              <a:lnSpc>
+                <a:spcPct val="113000"/>
+              </a:lnSpc>
+              <a:spcBef>
+                <a:spcPts val="0"/>
+              </a:spcBef>
+              <a:spcAft>
+                <a:spcPts val="0"/>
+              </a:spcAft>
+            </a:pPr>
+            <a:r>
+              <a:rPr sz="2200" b="1" lang="ko-KR">
+                <a:solidFill>
+                  <a:srgbClr val="172B49"/>
+                </a:solidFill>
+                <a:latin typeface="맑은 고딕"/>
+                <a:ea typeface="맑은 고딕"/>
+              </a:rPr>
+              <a:t>업무 화면</a:t>
+            </a:r>
+          </a:p>
+          <a:p>
+            <a:pPr algn="ctr">
+              <a:lnSpc>
+                <a:spcPct val="113000"/>
+              </a:lnSpc>
+              <a:spcBef>
+                <a:spcPts val="0"/>
+              </a:spcBef>
+              <a:spcAft>
+                <a:spcPts val="0"/>
+              </a:spcAft>
+            </a:pPr>
+            <a:r>
+              <a:rPr sz="1600" b="0" lang="ko-KR">
+                <a:solidFill>
+                  <a:srgbClr val="172B49"/>
+                </a:solidFill>
+                <a:latin typeface="맑은 고딕"/>
+                <a:ea typeface="맑은 고딕"/>
+              </a:rPr>
+              <a:t>페이지가 데이터를 표시</a:t>
+            </a:r>
+          </a:p>
+        </p:txBody>
+      </p:sp>
+      <p:cxnSp>
+        <p:nvCxnSpPr>
+          <p:cNvPr id="8" name="Connector 7"/>
+          <p:cNvCxnSpPr/>
+          <p:nvPr/>
+        </p:nvCxnSpPr>
+        <p:spPr>
+          <a:xfrm>
+            <a:off x="3685032" y="2478024"/>
+            <a:ext cx="914400" cy="0"/>
+          </a:xfrm>
+          <a:prstGeom prst="line">
+            <a:avLst/>
+          </a:prstGeom>
+          <a:ln w="19050">
+            <a:solidFill>
+              <a:srgbClr val="245BCE"/>
+            </a:solidFill>
+            <a:tailEnd type="triangle" w="sm" len="sm"/>
+          </a:ln>
+          <a:effectLst/>
+        </p:spPr>
+        <p:style>
+          <a:lnRef idx="2">
+            <a:schemeClr val="accent1"/>
+          </a:lnRef>
+          <a:fillRef idx="0">
+            <a:schemeClr val="accent1"/>
+          </a:fillRef>
+          <a:effectRef idx="1">
+            <a:schemeClr val="accent1"/>
+          </a:effectRef>
+          <a:fontRef idx="minor">
+            <a:schemeClr val="tx1"/>
+          </a:fontRef>
+        </p:style>
+      </p:cxnSp>
+      <p:cxnSp>
+        <p:nvCxnSpPr>
+          <p:cNvPr id="9" name="Connector 8"/>
+          <p:cNvCxnSpPr/>
+          <p:nvPr/>
+        </p:nvCxnSpPr>
+        <p:spPr>
+          <a:xfrm>
+            <a:off x="7598664" y="2478024"/>
+            <a:ext cx="914400" cy="0"/>
+          </a:xfrm>
+          <a:prstGeom prst="line">
+            <a:avLst/>
+          </a:prstGeom>
+          <a:ln w="19050">
+            <a:solidFill>
+              <a:srgbClr val="245BCE"/>
+            </a:solidFill>
+            <a:tailEnd type="triangle" w="sm" len="sm"/>
+          </a:ln>
+          <a:effectLst/>
+        </p:spPr>
+        <p:style>
+          <a:lnRef idx="2">
+            <a:schemeClr val="accent1"/>
+          </a:lnRef>
+          <a:fillRef idx="0">
+            <a:schemeClr val="accent1"/>
+          </a:fillRef>
+          <a:effectRef idx="1">
+            <a:schemeClr val="accent1"/>
+          </a:effectRef>
+          <a:fontRef idx="minor">
+            <a:schemeClr val="tx1"/>
+          </a:fontRef>
+        </p:style>
+      </p:cxnSp>
+      <p:sp>
+        <p:nvSpPr>
+          <p:cNvPr id="10" name="TextBox 9"/>
+          <p:cNvSpPr txBox="1"/>
+          <p:nvPr/>
+        </p:nvSpPr>
+        <p:spPr>
+          <a:xfrm>
+            <a:off x="704088" y="3611880"/>
+            <a:ext cx="5257800" cy="502920"/>
+          </a:xfrm>
+          <a:prstGeom prst="rect">
+            <a:avLst/>
+          </a:prstGeom>
+          <a:noFill/>
+        </p:spPr>
+        <p:txBody>
+          <a:bodyPr wrap="square" anchor="t" lIns="0" rIns="0" tIns="0" bIns="0">
+            <a:noAutofit/>
+          </a:bodyPr>
+          <a:lstStyle/>
+          <a:p>
+            <a:pPr algn="l">
+              <a:lnSpc>
+                <a:spcPct val="113000"/>
+              </a:lnSpc>
+              <a:spcBef>
+                <a:spcPts val="0"/>
+              </a:spcBef>
+              <a:spcAft>
+                <a:spcPts val="0"/>
+              </a:spcAft>
+            </a:pPr>
+            <a:r>
+              <a:rPr sz="2300" b="1" lang="ko-KR">
+                <a:solidFill>
+                  <a:srgbClr val="172B49"/>
+                </a:solidFill>
+                <a:latin typeface="맑은 고딕"/>
+                <a:ea typeface="맑은 고딕"/>
+              </a:rPr>
+              <a:t>공통 화면</a:t>
+            </a:r>
+          </a:p>
+        </p:txBody>
+      </p:sp>
+      <p:sp>
+        <p:nvSpPr>
+          <p:cNvPr id="11" name="TextBox 10"/>
+          <p:cNvSpPr txBox="1"/>
+          <p:nvPr/>
+        </p:nvSpPr>
+        <p:spPr>
+          <a:xfrm>
+            <a:off x="704088" y="4306824"/>
+            <a:ext cx="5056632" cy="1115568"/>
+          </a:xfrm>
+          <a:prstGeom prst="rect">
+            <a:avLst/>
+          </a:prstGeom>
+          <a:noFill/>
+        </p:spPr>
+        <p:txBody>
+          <a:bodyPr wrap="square" anchor="t" lIns="0" rIns="0" tIns="0" bIns="0">
+            <a:noAutofit/>
+          </a:bodyPr>
+          <a:lstStyle/>
+          <a:p>
+            <a:pPr algn="l">
+              <a:lnSpc>
+                <a:spcPct val="113000"/>
+              </a:lnSpc>
+              <a:spcBef>
+                <a:spcPts val="0"/>
+              </a:spcBef>
+              <a:spcAft>
+                <a:spcPts val="0"/>
+              </a:spcAft>
+            </a:pPr>
+            <a:r>
+              <a:rPr sz="1700" b="0" lang="ko-KR">
+                <a:solidFill>
+                  <a:srgbClr val="53657D"/>
+                </a:solidFill>
+                <a:latin typeface="맑은 고딕"/>
+                <a:ea typeface="맑은 고딕"/>
+              </a:rPr>
+              <a:t>대시보드 · 캘린더 · 내역 · 복리후생</a:t>
+            </a:r>
+          </a:p>
+          <a:p>
+            <a:pPr algn="l">
+              <a:lnSpc>
+                <a:spcPct val="113000"/>
+              </a:lnSpc>
+              <a:spcBef>
+                <a:spcPts val="0"/>
+              </a:spcBef>
+              <a:spcAft>
+                <a:spcPts val="0"/>
+              </a:spcAft>
+            </a:pPr>
+            <a:r>
+              <a:rPr sz="1700" b="0" lang="ko-KR">
+                <a:solidFill>
+                  <a:srgbClr val="53657D"/>
+                </a:solidFill>
+                <a:latin typeface="맑은 고딕"/>
+                <a:ea typeface="맑은 고딕"/>
+              </a:rPr>
+              <a:t>내 정보 · 결재 관리 · 팀 현황</a:t>
+            </a:r>
+          </a:p>
+          <a:p>
+            <a:pPr algn="l">
+              <a:lnSpc>
+                <a:spcPct val="113000"/>
+              </a:lnSpc>
+              <a:spcBef>
+                <a:spcPts val="0"/>
+              </a:spcBef>
+              <a:spcAft>
+                <a:spcPts val="0"/>
+              </a:spcAft>
+            </a:pPr>
+            <a:r>
+              <a:rPr sz="1700" b="0" lang="ko-KR">
+                <a:solidFill>
+                  <a:srgbClr val="53657D"/>
+                </a:solidFill>
+                <a:latin typeface="맑은 고딕"/>
+                <a:ea typeface="맑은 고딕"/>
+              </a:rPr>
+              <a:t>로그인 · 로그인 연결 · 온보딩</a:t>
+            </a:r>
+          </a:p>
+        </p:txBody>
+      </p:sp>
+      <p:sp>
+        <p:nvSpPr>
+          <p:cNvPr id="12" name="TextBox 11"/>
+          <p:cNvSpPr txBox="1"/>
+          <p:nvPr/>
+        </p:nvSpPr>
+        <p:spPr>
+          <a:xfrm>
+            <a:off x="6409944" y="3611880"/>
+            <a:ext cx="5056632" cy="502920"/>
+          </a:xfrm>
+          <a:prstGeom prst="rect">
+            <a:avLst/>
+          </a:prstGeom>
+          <a:noFill/>
+        </p:spPr>
+        <p:txBody>
+          <a:bodyPr wrap="square" anchor="t" lIns="0" rIns="0" tIns="0" bIns="0">
+            <a:noAutofit/>
+          </a:bodyPr>
+          <a:lstStyle/>
+          <a:p>
+            <a:pPr algn="l">
+              <a:lnSpc>
+                <a:spcPct val="113000"/>
+              </a:lnSpc>
+              <a:spcBef>
+                <a:spcPts val="0"/>
+              </a:spcBef>
+              <a:spcAft>
+                <a:spcPts val="0"/>
+              </a:spcAft>
+            </a:pPr>
+            <a:r>
+              <a:rPr sz="2300" b="1" lang="ko-KR">
+                <a:solidFill>
+                  <a:srgbClr val="172B49"/>
+                </a:solidFill>
+                <a:latin typeface="맑은 고딕"/>
+                <a:ea typeface="맑은 고딕"/>
+              </a:rPr>
+              <a:t>관리자 화면</a:t>
+            </a:r>
+          </a:p>
+        </p:txBody>
+      </p:sp>
+      <p:sp>
+        <p:nvSpPr>
+          <p:cNvPr id="13" name="TextBox 12"/>
+          <p:cNvSpPr txBox="1"/>
+          <p:nvPr/>
+        </p:nvSpPr>
+        <p:spPr>
+          <a:xfrm>
+            <a:off x="6409944" y="4306824"/>
+            <a:ext cx="5056632" cy="1115568"/>
+          </a:xfrm>
+          <a:prstGeom prst="rect">
+            <a:avLst/>
+          </a:prstGeom>
+          <a:noFill/>
+        </p:spPr>
+        <p:txBody>
+          <a:bodyPr wrap="square" anchor="t" lIns="0" rIns="0" tIns="0" bIns="0">
+            <a:noAutofit/>
+          </a:bodyPr>
+          <a:lstStyle/>
+          <a:p>
+            <a:pPr algn="l">
+              <a:lnSpc>
+                <a:spcPct val="113000"/>
+              </a:lnSpc>
+              <a:spcBef>
+                <a:spcPts val="0"/>
+              </a:spcBef>
+              <a:spcAft>
+                <a:spcPts val="0"/>
+              </a:spcAft>
+            </a:pPr>
+            <a:r>
+              <a:rPr sz="1700" b="0" lang="ko-KR">
+                <a:solidFill>
+                  <a:srgbClr val="53657D"/>
+                </a:solidFill>
+                <a:latin typeface="맑은 고딕"/>
+                <a:ea typeface="맑은 고딕"/>
+              </a:rPr>
+              <a:t>구성원 · 부서 · 연차 정책 · 복리후생 정책</a:t>
+            </a:r>
+          </a:p>
+          <a:p>
+            <a:pPr algn="l">
+              <a:lnSpc>
+                <a:spcPct val="113000"/>
+              </a:lnSpc>
+              <a:spcBef>
+                <a:spcPts val="0"/>
+              </a:spcBef>
+              <a:spcAft>
+                <a:spcPts val="0"/>
+              </a:spcAft>
+            </a:pPr>
+            <a:r>
+              <a:rPr sz="1700" b="0" lang="ko-KR">
+                <a:solidFill>
+                  <a:srgbClr val="53657D"/>
+                </a:solidFill>
+                <a:latin typeface="맑은 고딕"/>
+                <a:ea typeface="맑은 고딕"/>
+              </a:rPr>
+              <a:t>처리 이력 · 이메일 · 외부 연동</a:t>
+            </a:r>
+          </a:p>
+        </p:txBody>
+      </p:sp>
+      <p:sp>
+        <p:nvSpPr>
+          <p:cNvPr id="14" name="TextBox 13"/>
+          <p:cNvSpPr txBox="1"/>
+          <p:nvPr/>
+        </p:nvSpPr>
+        <p:spPr>
+          <a:xfrm>
+            <a:off x="621792" y="6062472"/>
+            <a:ext cx="10927080" cy="365760"/>
+          </a:xfrm>
+          <a:prstGeom prst="rect">
+            <a:avLst/>
+          </a:prstGeom>
+          <a:noFill/>
+        </p:spPr>
+        <p:txBody>
+          <a:bodyPr wrap="square" anchor="t" lIns="0" rIns="0" tIns="0" bIns="0">
+            <a:noAutofit/>
+          </a:bodyPr>
+          <a:lstStyle/>
+          <a:p>
+            <a:pPr algn="l">
+              <a:lnSpc>
+                <a:spcPct val="113000"/>
+              </a:lnSpc>
+              <a:spcBef>
+                <a:spcPts val="0"/>
+              </a:spcBef>
+              <a:spcAft>
+                <a:spcPts val="0"/>
+              </a:spcAft>
+            </a:pPr>
+            <a:r>
+              <a:rPr sz="1300" b="0" lang="ko-KR">
+                <a:solidFill>
+                  <a:srgbClr val="53657D"/>
+                </a:solidFill>
+                <a:latin typeface="맑은 고딕"/>
+                <a:ea typeface="맑은 고딕"/>
+              </a:rPr>
+              <a:t>권한에 맞춰 화면을 열고, 오류 알림을 공통 처리합니다. 디자인 값은 Tailwind v4의 CSS에서 관리합니다.</a:t>
+            </a:r>
+          </a:p>
+        </p:txBody>
+      </p:sp>
+    </p:spTree>
+  </p:cSld>
+  <p:clrMapOvr>
+    <a:masterClrMapping/>
+  </p:clrMapOvr>
+</p:sld>
+</file>
+
+<file path=ppt/slides/slide15.xml><?xml version="1.0" encoding="utf-8"?>
+<p:sld xmlns:a="http://schemas.openxmlformats.org/drawingml/2006/main" xmlns:p="http://schemas.openxmlformats.org/presentationml/2006/main" xmlns:r="http://schemas.openxmlformats.org/officeDocument/2006/relationships">
+  <p:cSld>
+    <p:bg>
+      <p:bgPr>
+        <a:solidFill>
+          <a:srgbClr val="F7F9FC"/>
+        </a:solidFill>
+        <a:effectLst/>
+      </p:bgPr>
+    </p:bg>
+    <p:spTree>
+      <p:nvGrpSpPr>
+        <p:cNvPr id="1" name=""/>
+        <p:cNvGrpSpPr/>
+        <p:nvPr/>
+      </p:nvGrpSpPr>
+      <p:grpSpPr/>
+      <p:sp>
+        <p:nvSpPr>
+          <p:cNvPr id="2" name="TextBox 1"/>
+          <p:cNvSpPr txBox="1"/>
+          <p:nvPr/>
+        </p:nvSpPr>
+        <p:spPr>
+          <a:xfrm>
+            <a:off x="594360" y="438912"/>
+            <a:ext cx="10972800" cy="594360"/>
+          </a:xfrm>
+          <a:prstGeom prst="rect">
+            <a:avLst/>
+          </a:prstGeom>
+          <a:noFill/>
+        </p:spPr>
+        <p:txBody>
+          <a:bodyPr wrap="square" anchor="t" lIns="0" rIns="0" tIns="0" bIns="0">
+            <a:noAutofit/>
+          </a:bodyPr>
+          <a:lstStyle/>
+          <a:p>
+            <a:pPr algn="l">
+              <a:lnSpc>
+                <a:spcPct val="113000"/>
+              </a:lnSpc>
+              <a:spcBef>
+                <a:spcPts val="0"/>
+              </a:spcBef>
+              <a:spcAft>
+                <a:spcPts val="0"/>
+              </a:spcAft>
+            </a:pPr>
+            <a:r>
+              <a:rPr sz="3200" b="1" lang="ko-KR">
+                <a:solidFill>
+                  <a:srgbClr val="172B49"/>
+                </a:solidFill>
+                <a:latin typeface="맑은 고딕"/>
+                <a:ea typeface="맑은 고딕"/>
+              </a:rPr>
+              <a:t>백엔드 기술과 라이브러리</a:t>
+            </a:r>
+          </a:p>
+        </p:txBody>
+      </p:sp>
+      <p:sp>
+        <p:nvSpPr>
+          <p:cNvPr id="3" name="TextBox 2"/>
+          <p:cNvSpPr txBox="1"/>
+          <p:nvPr/>
+        </p:nvSpPr>
+        <p:spPr>
+          <a:xfrm>
+            <a:off x="621792" y="1124712"/>
+            <a:ext cx="10972800" cy="548640"/>
+          </a:xfrm>
+          <a:prstGeom prst="rect">
+            <a:avLst/>
+          </a:prstGeom>
+          <a:noFill/>
+        </p:spPr>
+        <p:txBody>
+          <a:bodyPr wrap="square" anchor="t" lIns="0" rIns="0" tIns="0" bIns="0">
+            <a:noAutofit/>
+          </a:bodyPr>
+          <a:lstStyle/>
+          <a:p>
+            <a:pPr algn="l">
+              <a:lnSpc>
+                <a:spcPct val="113000"/>
+              </a:lnSpc>
+              <a:spcBef>
+                <a:spcPts val="0"/>
+              </a:spcBef>
+              <a:spcAft>
+                <a:spcPts val="0"/>
+              </a:spcAft>
+            </a:pPr>
+            <a:r>
+              <a:rPr sz="1650" b="0" lang="ko-KR">
+                <a:solidFill>
+                  <a:srgbClr val="53657D"/>
+                </a:solidFill>
+                <a:latin typeface="맑은 고딕"/>
+                <a:ea typeface="맑은 고딕"/>
+              </a:rPr>
+              <a:t>Java 21 · Spring Boot 4.1.0 · Gradle</a:t>
+            </a:r>
+          </a:p>
+        </p:txBody>
+      </p:sp>
+      <p:sp>
+        <p:nvSpPr>
+          <p:cNvPr id="4" name="TextBox 3"/>
+          <p:cNvSpPr txBox="1"/>
+          <p:nvPr/>
+        </p:nvSpPr>
+        <p:spPr>
+          <a:xfrm>
+            <a:off x="10954512" y="6428232"/>
+            <a:ext cx="594360" cy="228600"/>
+          </a:xfrm>
+          <a:prstGeom prst="rect">
+            <a:avLst/>
+          </a:prstGeom>
+          <a:noFill/>
+        </p:spPr>
+        <p:txBody>
+          <a:bodyPr wrap="square" anchor="t" lIns="0" rIns="0" tIns="0" bIns="0">
+            <a:noAutofit/>
+          </a:bodyPr>
+          <a:lstStyle/>
+          <a:p>
+            <a:pPr algn="r">
+              <a:lnSpc>
+                <a:spcPct val="113000"/>
+              </a:lnSpc>
+              <a:spcBef>
+                <a:spcPts val="0"/>
+              </a:spcBef>
+              <a:spcAft>
+                <a:spcPts val="0"/>
+              </a:spcAft>
+            </a:pPr>
+            <a:r>
+              <a:rPr sz="1100" b="0" lang="ko-KR">
+                <a:solidFill>
+                  <a:srgbClr val="53657D"/>
+                </a:solidFill>
+                <a:latin typeface="맑은 고딕"/>
+                <a:ea typeface="맑은 고딕"/>
+              </a:rPr>
+              <a:t>15</a:t>
             </a:r>
           </a:p>
         </p:txBody>
@@ -11461,7 +12993,7 @@
 </p:sld>
 </file>
 
-<file path=ppt/slides/slide15.xml><?xml version="1.0" encoding="utf-8"?>
+<file path=ppt/slides/slide16.xml><?xml version="1.0" encoding="utf-8"?>
 <p:sld xmlns:a="http://schemas.openxmlformats.org/drawingml/2006/main" xmlns:p="http://schemas.openxmlformats.org/presentationml/2006/main" xmlns:r="http://schemas.openxmlformats.org/officeDocument/2006/relationships">
   <p:cSld>
     <p:bg>
@@ -11612,7 +13144,7 @@
                 <a:latin typeface="맑은 고딕"/>
                 <a:ea typeface="맑은 고딕"/>
               </a:rPr>
-              <a:t>15</a:t>
+              <a:t>16</a:t>
             </a:r>
           </a:p>
         </p:txBody>
@@ -12837,735 +14369,6 @@
 </p:sld>
 </file>
 
-<file path=ppt/slides/slide16.xml><?xml version="1.0" encoding="utf-8"?>
-<p:sld xmlns:a="http://schemas.openxmlformats.org/drawingml/2006/main" xmlns:p="http://schemas.openxmlformats.org/presentationml/2006/main" xmlns:r="http://schemas.openxmlformats.org/officeDocument/2006/relationships">
-  <p:cSld>
-    <p:bg>
-      <p:bgPr>
-        <a:solidFill>
-          <a:srgbClr val="F7F9FC"/>
-        </a:solidFill>
-        <a:effectLst/>
-      </p:bgPr>
-    </p:bg>
-    <p:spTree>
-      <p:nvGrpSpPr>
-        <p:cNvPr id="1" name=""/>
-        <p:cNvGrpSpPr/>
-        <p:nvPr/>
-      </p:nvGrpSpPr>
-      <p:grpSpPr/>
-      <p:sp>
-        <p:nvSpPr>
-          <p:cNvPr id="2" name="TextBox 1"/>
-          <p:cNvSpPr txBox="1"/>
-          <p:nvPr/>
-        </p:nvSpPr>
-        <p:spPr>
-          <a:xfrm>
-            <a:off x="594360" y="438912"/>
-            <a:ext cx="10972800" cy="594360"/>
-          </a:xfrm>
-          <a:prstGeom prst="rect">
-            <a:avLst/>
-          </a:prstGeom>
-          <a:noFill/>
-        </p:spPr>
-        <p:txBody>
-          <a:bodyPr wrap="square" anchor="t" lIns="0" rIns="0" tIns="0" bIns="0">
-            <a:noAutofit/>
-          </a:bodyPr>
-          <a:lstStyle/>
-          <a:p>
-            <a:pPr algn="l">
-              <a:lnSpc>
-                <a:spcPct val="113000"/>
-              </a:lnSpc>
-              <a:spcBef>
-                <a:spcPts val="0"/>
-              </a:spcBef>
-              <a:spcAft>
-                <a:spcPts val="0"/>
-              </a:spcAft>
-            </a:pPr>
-            <a:r>
-              <a:rPr sz="3200" b="1" lang="ko-KR">
-                <a:solidFill>
-                  <a:srgbClr val="172B49"/>
-                </a:solidFill>
-                <a:latin typeface="맑은 고딕"/>
-                <a:ea typeface="맑은 고딕"/>
-              </a:rPr>
-              <a:t>현재 구현 규모</a:t>
-            </a:r>
-          </a:p>
-        </p:txBody>
-      </p:sp>
-      <p:sp>
-        <p:nvSpPr>
-          <p:cNvPr id="3" name="TextBox 2"/>
-          <p:cNvSpPr txBox="1"/>
-          <p:nvPr/>
-        </p:nvSpPr>
-        <p:spPr>
-          <a:xfrm>
-            <a:off x="621792" y="1124712"/>
-            <a:ext cx="10972800" cy="548640"/>
-          </a:xfrm>
-          <a:prstGeom prst="rect">
-            <a:avLst/>
-          </a:prstGeom>
-          <a:noFill/>
-        </p:spPr>
-        <p:txBody>
-          <a:bodyPr wrap="square" anchor="t" lIns="0" rIns="0" tIns="0" bIns="0">
-            <a:noAutofit/>
-          </a:bodyPr>
-          <a:lstStyle/>
-          <a:p>
-            <a:pPr algn="l">
-              <a:lnSpc>
-                <a:spcPct val="113000"/>
-              </a:lnSpc>
-              <a:spcBef>
-                <a:spcPts val="0"/>
-              </a:spcBef>
-              <a:spcAft>
-                <a:spcPts val="0"/>
-              </a:spcAft>
-            </a:pPr>
-            <a:r>
-              <a:rPr sz="1650" b="0" lang="ko-KR">
-                <a:solidFill>
-                  <a:srgbClr val="53657D"/>
-                </a:solidFill>
-                <a:latin typeface="맑은 고딕"/>
-                <a:ea typeface="맑은 고딕"/>
-              </a:rPr>
-              <a:t>코드와 설계 파일을 다시 확인한 2026-09-11 기준입니다.</a:t>
-            </a:r>
-          </a:p>
-        </p:txBody>
-      </p:sp>
-      <p:sp>
-        <p:nvSpPr>
-          <p:cNvPr id="4" name="TextBox 3"/>
-          <p:cNvSpPr txBox="1"/>
-          <p:nvPr/>
-        </p:nvSpPr>
-        <p:spPr>
-          <a:xfrm>
-            <a:off x="10954512" y="6428232"/>
-            <a:ext cx="594360" cy="228600"/>
-          </a:xfrm>
-          <a:prstGeom prst="rect">
-            <a:avLst/>
-          </a:prstGeom>
-          <a:noFill/>
-        </p:spPr>
-        <p:txBody>
-          <a:bodyPr wrap="square" anchor="t" lIns="0" rIns="0" tIns="0" bIns="0">
-            <a:noAutofit/>
-          </a:bodyPr>
-          <a:lstStyle/>
-          <a:p>
-            <a:pPr algn="r">
-              <a:lnSpc>
-                <a:spcPct val="113000"/>
-              </a:lnSpc>
-              <a:spcBef>
-                <a:spcPts val="0"/>
-              </a:spcBef>
-              <a:spcAft>
-                <a:spcPts val="0"/>
-              </a:spcAft>
-            </a:pPr>
-            <a:r>
-              <a:rPr sz="1100" b="0" lang="ko-KR">
-                <a:solidFill>
-                  <a:srgbClr val="53657D"/>
-                </a:solidFill>
-                <a:latin typeface="맑은 고딕"/>
-                <a:ea typeface="맑은 고딕"/>
-              </a:rPr>
-              <a:t>16</a:t>
-            </a:r>
-          </a:p>
-        </p:txBody>
-      </p:sp>
-      <p:sp>
-        <p:nvSpPr>
-          <p:cNvPr id="5" name="TextBox 4"/>
-          <p:cNvSpPr txBox="1"/>
-          <p:nvPr/>
-        </p:nvSpPr>
-        <p:spPr>
-          <a:xfrm>
-            <a:off x="704088" y="1883664"/>
-            <a:ext cx="2148840" cy="886968"/>
-          </a:xfrm>
-          <a:prstGeom prst="rect">
-            <a:avLst/>
-          </a:prstGeom>
-          <a:noFill/>
-        </p:spPr>
-        <p:txBody>
-          <a:bodyPr wrap="square" anchor="t" lIns="0" rIns="0" tIns="0" bIns="0">
-            <a:noAutofit/>
-          </a:bodyPr>
-          <a:lstStyle/>
-          <a:p>
-            <a:pPr algn="l">
-              <a:lnSpc>
-                <a:spcPct val="113000"/>
-              </a:lnSpc>
-              <a:spcBef>
-                <a:spcPts val="0"/>
-              </a:spcBef>
-              <a:spcAft>
-                <a:spcPts val="0"/>
-              </a:spcAft>
-            </a:pPr>
-            <a:r>
-              <a:rPr sz="5200" b="1" lang="ko-KR">
-                <a:solidFill>
-                  <a:srgbClr val="245BCE"/>
-                </a:solidFill>
-                <a:latin typeface="맑은 고딕"/>
-                <a:ea typeface="맑은 고딕"/>
-              </a:rPr>
-              <a:t>88</a:t>
-            </a:r>
-          </a:p>
-        </p:txBody>
-      </p:sp>
-      <p:sp>
-        <p:nvSpPr>
-          <p:cNvPr id="6" name="TextBox 5"/>
-          <p:cNvSpPr txBox="1"/>
-          <p:nvPr/>
-        </p:nvSpPr>
-        <p:spPr>
-          <a:xfrm>
-            <a:off x="704088" y="2953512"/>
-            <a:ext cx="2286000" cy="411480"/>
-          </a:xfrm>
-          <a:prstGeom prst="rect">
-            <a:avLst/>
-          </a:prstGeom>
-          <a:noFill/>
-        </p:spPr>
-        <p:txBody>
-          <a:bodyPr wrap="square" anchor="t" lIns="0" rIns="0" tIns="0" bIns="0">
-            <a:noAutofit/>
-          </a:bodyPr>
-          <a:lstStyle/>
-          <a:p>
-            <a:pPr algn="l">
-              <a:lnSpc>
-                <a:spcPct val="113000"/>
-              </a:lnSpc>
-              <a:spcBef>
-                <a:spcPts val="0"/>
-              </a:spcBef>
-              <a:spcAft>
-                <a:spcPts val="0"/>
-              </a:spcAft>
-            </a:pPr>
-            <a:r>
-              <a:rPr sz="2100" b="0" lang="ko-KR">
-                <a:solidFill>
-                  <a:srgbClr val="172B49"/>
-                </a:solidFill>
-                <a:latin typeface="맑은 고딕"/>
-                <a:ea typeface="맑은 고딕"/>
-              </a:rPr>
-              <a:t>업무 API</a:t>
-            </a:r>
-          </a:p>
-        </p:txBody>
-      </p:sp>
-      <p:sp>
-        <p:nvSpPr>
-          <p:cNvPr id="7" name="TextBox 6"/>
-          <p:cNvSpPr txBox="1"/>
-          <p:nvPr/>
-        </p:nvSpPr>
-        <p:spPr>
-          <a:xfrm>
-            <a:off x="3575304" y="1883664"/>
-            <a:ext cx="2148840" cy="886968"/>
-          </a:xfrm>
-          <a:prstGeom prst="rect">
-            <a:avLst/>
-          </a:prstGeom>
-          <a:noFill/>
-        </p:spPr>
-        <p:txBody>
-          <a:bodyPr wrap="square" anchor="t" lIns="0" rIns="0" tIns="0" bIns="0">
-            <a:noAutofit/>
-          </a:bodyPr>
-          <a:lstStyle/>
-          <a:p>
-            <a:pPr algn="l">
-              <a:lnSpc>
-                <a:spcPct val="113000"/>
-              </a:lnSpc>
-              <a:spcBef>
-                <a:spcPts val="0"/>
-              </a:spcBef>
-              <a:spcAft>
-                <a:spcPts val="0"/>
-              </a:spcAft>
-            </a:pPr>
-            <a:r>
-              <a:rPr sz="5200" b="1" lang="ko-KR">
-                <a:solidFill>
-                  <a:srgbClr val="245BCE"/>
-                </a:solidFill>
-                <a:latin typeface="맑은 고딕"/>
-                <a:ea typeface="맑은 고딕"/>
-              </a:rPr>
-              <a:t>17</a:t>
-            </a:r>
-          </a:p>
-        </p:txBody>
-      </p:sp>
-      <p:sp>
-        <p:nvSpPr>
-          <p:cNvPr id="8" name="TextBox 7"/>
-          <p:cNvSpPr txBox="1"/>
-          <p:nvPr/>
-        </p:nvSpPr>
-        <p:spPr>
-          <a:xfrm>
-            <a:off x="3575304" y="2953512"/>
-            <a:ext cx="2286000" cy="411480"/>
-          </a:xfrm>
-          <a:prstGeom prst="rect">
-            <a:avLst/>
-          </a:prstGeom>
-          <a:noFill/>
-        </p:spPr>
-        <p:txBody>
-          <a:bodyPr wrap="square" anchor="t" lIns="0" rIns="0" tIns="0" bIns="0">
-            <a:noAutofit/>
-          </a:bodyPr>
-          <a:lstStyle/>
-          <a:p>
-            <a:pPr algn="l">
-              <a:lnSpc>
-                <a:spcPct val="113000"/>
-              </a:lnSpc>
-              <a:spcBef>
-                <a:spcPts val="0"/>
-              </a:spcBef>
-              <a:spcAft>
-                <a:spcPts val="0"/>
-              </a:spcAft>
-            </a:pPr>
-            <a:r>
-              <a:rPr sz="2100" b="0" lang="ko-KR">
-                <a:solidFill>
-                  <a:srgbClr val="172B49"/>
-                </a:solidFill>
-                <a:latin typeface="맑은 고딕"/>
-                <a:ea typeface="맑은 고딕"/>
-              </a:rPr>
-              <a:t>화면</a:t>
-            </a:r>
-          </a:p>
-        </p:txBody>
-      </p:sp>
-      <p:sp>
-        <p:nvSpPr>
-          <p:cNvPr id="9" name="TextBox 8"/>
-          <p:cNvSpPr txBox="1"/>
-          <p:nvPr/>
-        </p:nvSpPr>
-        <p:spPr>
-          <a:xfrm>
-            <a:off x="6446520" y="1883664"/>
-            <a:ext cx="2148840" cy="886968"/>
-          </a:xfrm>
-          <a:prstGeom prst="rect">
-            <a:avLst/>
-          </a:prstGeom>
-          <a:noFill/>
-        </p:spPr>
-        <p:txBody>
-          <a:bodyPr wrap="square" anchor="t" lIns="0" rIns="0" tIns="0" bIns="0">
-            <a:noAutofit/>
-          </a:bodyPr>
-          <a:lstStyle/>
-          <a:p>
-            <a:pPr algn="l">
-              <a:lnSpc>
-                <a:spcPct val="113000"/>
-              </a:lnSpc>
-              <a:spcBef>
-                <a:spcPts val="0"/>
-              </a:spcBef>
-              <a:spcAft>
-                <a:spcPts val="0"/>
-              </a:spcAft>
-            </a:pPr>
-            <a:r>
-              <a:rPr sz="5200" b="1" lang="ko-KR">
-                <a:solidFill>
-                  <a:srgbClr val="245BCE"/>
-                </a:solidFill>
-                <a:latin typeface="맑은 고딕"/>
-                <a:ea typeface="맑은 고딕"/>
-              </a:rPr>
-              <a:t>21</a:t>
-            </a:r>
-          </a:p>
-        </p:txBody>
-      </p:sp>
-      <p:sp>
-        <p:nvSpPr>
-          <p:cNvPr id="10" name="TextBox 9"/>
-          <p:cNvSpPr txBox="1"/>
-          <p:nvPr/>
-        </p:nvSpPr>
-        <p:spPr>
-          <a:xfrm>
-            <a:off x="6446520" y="2953512"/>
-            <a:ext cx="2286000" cy="411480"/>
-          </a:xfrm>
-          <a:prstGeom prst="rect">
-            <a:avLst/>
-          </a:prstGeom>
-          <a:noFill/>
-        </p:spPr>
-        <p:txBody>
-          <a:bodyPr wrap="square" anchor="t" lIns="0" rIns="0" tIns="0" bIns="0">
-            <a:noAutofit/>
-          </a:bodyPr>
-          <a:lstStyle/>
-          <a:p>
-            <a:pPr algn="l">
-              <a:lnSpc>
-                <a:spcPct val="113000"/>
-              </a:lnSpc>
-              <a:spcBef>
-                <a:spcPts val="0"/>
-              </a:spcBef>
-              <a:spcAft>
-                <a:spcPts val="0"/>
-              </a:spcAft>
-            </a:pPr>
-            <a:r>
-              <a:rPr sz="2100" b="0" lang="ko-KR">
-                <a:solidFill>
-                  <a:srgbClr val="172B49"/>
-                </a:solidFill>
-                <a:latin typeface="맑은 고딕"/>
-                <a:ea typeface="맑은 고딕"/>
-              </a:rPr>
-              <a:t>DB 테이블</a:t>
-            </a:r>
-          </a:p>
-        </p:txBody>
-      </p:sp>
-      <p:sp>
-        <p:nvSpPr>
-          <p:cNvPr id="11" name="TextBox 10"/>
-          <p:cNvSpPr txBox="1"/>
-          <p:nvPr/>
-        </p:nvSpPr>
-        <p:spPr>
-          <a:xfrm>
-            <a:off x="9317736" y="1883664"/>
-            <a:ext cx="2148840" cy="886968"/>
-          </a:xfrm>
-          <a:prstGeom prst="rect">
-            <a:avLst/>
-          </a:prstGeom>
-          <a:noFill/>
-        </p:spPr>
-        <p:txBody>
-          <a:bodyPr wrap="square" anchor="t" lIns="0" rIns="0" tIns="0" bIns="0">
-            <a:noAutofit/>
-          </a:bodyPr>
-          <a:lstStyle/>
-          <a:p>
-            <a:pPr algn="l">
-              <a:lnSpc>
-                <a:spcPct val="113000"/>
-              </a:lnSpc>
-              <a:spcBef>
-                <a:spcPts val="0"/>
-              </a:spcBef>
-              <a:spcAft>
-                <a:spcPts val="0"/>
-              </a:spcAft>
-            </a:pPr>
-            <a:r>
-              <a:rPr sz="5200" b="1" lang="ko-KR">
-                <a:solidFill>
-                  <a:srgbClr val="245BCE"/>
-                </a:solidFill>
-                <a:latin typeface="맑은 고딕"/>
-                <a:ea typeface="맑은 고딕"/>
-              </a:rPr>
-              <a:t>12</a:t>
-            </a:r>
-          </a:p>
-        </p:txBody>
-      </p:sp>
-      <p:sp>
-        <p:nvSpPr>
-          <p:cNvPr id="12" name="TextBox 11"/>
-          <p:cNvSpPr txBox="1"/>
-          <p:nvPr/>
-        </p:nvSpPr>
-        <p:spPr>
-          <a:xfrm>
-            <a:off x="9317736" y="2953512"/>
-            <a:ext cx="2286000" cy="411480"/>
-          </a:xfrm>
-          <a:prstGeom prst="rect">
-            <a:avLst/>
-          </a:prstGeom>
-          <a:noFill/>
-        </p:spPr>
-        <p:txBody>
-          <a:bodyPr wrap="square" anchor="t" lIns="0" rIns="0" tIns="0" bIns="0">
-            <a:noAutofit/>
-          </a:bodyPr>
-          <a:lstStyle/>
-          <a:p>
-            <a:pPr algn="l">
-              <a:lnSpc>
-                <a:spcPct val="113000"/>
-              </a:lnSpc>
-              <a:spcBef>
-                <a:spcPts val="0"/>
-              </a:spcBef>
-              <a:spcAft>
-                <a:spcPts val="0"/>
-              </a:spcAft>
-            </a:pPr>
-            <a:r>
-              <a:rPr sz="2100" b="0" lang="ko-KR">
-                <a:solidFill>
-                  <a:srgbClr val="172B49"/>
-                </a:solidFill>
-                <a:latin typeface="맑은 고딕"/>
-                <a:ea typeface="맑은 고딕"/>
-              </a:rPr>
-              <a:t>관리자 설정</a:t>
-            </a:r>
-          </a:p>
-        </p:txBody>
-      </p:sp>
-      <p:cxnSp>
-        <p:nvCxnSpPr>
-          <p:cNvPr id="13" name="Connector 12"/>
-          <p:cNvCxnSpPr/>
-          <p:nvPr/>
-        </p:nvCxnSpPr>
-        <p:spPr>
-          <a:xfrm>
-            <a:off x="704088" y="3675887"/>
-            <a:ext cx="10789920" cy="0"/>
-          </a:xfrm>
-          <a:prstGeom prst="line">
-            <a:avLst/>
-          </a:prstGeom>
-          <a:ln w="8890">
-            <a:solidFill>
-              <a:srgbClr val="CCD6E5"/>
-            </a:solidFill>
-          </a:ln>
-          <a:effectLst/>
-        </p:spPr>
-        <p:style>
-          <a:lnRef idx="2">
-            <a:schemeClr val="accent1"/>
-          </a:lnRef>
-          <a:fillRef idx="0">
-            <a:schemeClr val="accent1"/>
-          </a:fillRef>
-          <a:effectRef idx="1">
-            <a:schemeClr val="accent1"/>
-          </a:effectRef>
-          <a:fontRef idx="minor">
-            <a:schemeClr val="tx1"/>
-          </a:fontRef>
-        </p:style>
-      </p:cxnSp>
-      <p:sp>
-        <p:nvSpPr>
-          <p:cNvPr id="14" name="TextBox 13"/>
-          <p:cNvSpPr txBox="1"/>
-          <p:nvPr/>
-        </p:nvSpPr>
-        <p:spPr>
-          <a:xfrm>
-            <a:off x="704088" y="4114800"/>
-            <a:ext cx="2880360" cy="758952"/>
-          </a:xfrm>
-          <a:prstGeom prst="rect">
-            <a:avLst/>
-          </a:prstGeom>
-          <a:noFill/>
-        </p:spPr>
-        <p:txBody>
-          <a:bodyPr wrap="square" anchor="t" lIns="0" rIns="0" tIns="0" bIns="0">
-            <a:noAutofit/>
-          </a:bodyPr>
-          <a:lstStyle/>
-          <a:p>
-            <a:pPr algn="l">
-              <a:lnSpc>
-                <a:spcPct val="113000"/>
-              </a:lnSpc>
-              <a:spcBef>
-                <a:spcPts val="0"/>
-              </a:spcBef>
-              <a:spcAft>
-                <a:spcPts val="0"/>
-              </a:spcAft>
-            </a:pPr>
-            <a:r>
-              <a:rPr sz="4200" b="1" lang="ko-KR">
-                <a:solidFill>
-                  <a:srgbClr val="172B49"/>
-                </a:solidFill>
-                <a:latin typeface="맑은 고딕"/>
-                <a:ea typeface="맑은 고딕"/>
-              </a:rPr>
-              <a:t>832건</a:t>
-            </a:r>
-          </a:p>
-        </p:txBody>
-      </p:sp>
-      <p:sp>
-        <p:nvSpPr>
-          <p:cNvPr id="15" name="TextBox 14"/>
-          <p:cNvSpPr txBox="1"/>
-          <p:nvPr/>
-        </p:nvSpPr>
-        <p:spPr>
-          <a:xfrm>
-            <a:off x="3941063" y="4169663"/>
-            <a:ext cx="7543800" cy="1024128"/>
-          </a:xfrm>
-          <a:prstGeom prst="rect">
-            <a:avLst/>
-          </a:prstGeom>
-          <a:noFill/>
-        </p:spPr>
-        <p:txBody>
-          <a:bodyPr wrap="square" anchor="t" lIns="0" rIns="0" tIns="0" bIns="0">
-            <a:noAutofit/>
-          </a:bodyPr>
-          <a:lstStyle/>
-          <a:p>
-            <a:pPr algn="l">
-              <a:lnSpc>
-                <a:spcPct val="113000"/>
-              </a:lnSpc>
-              <a:spcBef>
-                <a:spcPts val="0"/>
-              </a:spcBef>
-              <a:spcAft>
-                <a:spcPts val="0"/>
-              </a:spcAft>
-            </a:pPr>
-            <a:r>
-              <a:rPr sz="2000" b="0" lang="ko-KR">
-                <a:solidFill>
-                  <a:srgbClr val="172B49"/>
-                </a:solidFill>
-                <a:latin typeface="맑은 고딕"/>
-                <a:ea typeface="맑은 고딕"/>
-              </a:rPr>
-              <a:t>자동 테스트 기록</a:t>
-            </a:r>
-          </a:p>
-          <a:p>
-            <a:pPr algn="l">
-              <a:lnSpc>
-                <a:spcPct val="113000"/>
-              </a:lnSpc>
-              <a:spcBef>
-                <a:spcPts val="0"/>
-              </a:spcBef>
-              <a:spcAft>
-                <a:spcPts val="0"/>
-              </a:spcAft>
-            </a:pPr>
-            <a:r>
-              <a:rPr sz="2000" b="0" lang="ko-KR">
-                <a:solidFill>
-                  <a:srgbClr val="172B49"/>
-                </a:solidFill>
-                <a:latin typeface="맑은 고딕"/>
-                <a:ea typeface="맑은 고딕"/>
-              </a:rPr>
-              <a:t>백엔드 500 + 프론트엔드 332 · 2026-09-08 실행</a:t>
-            </a:r>
-          </a:p>
-        </p:txBody>
-      </p:sp>
-      <p:sp>
-        <p:nvSpPr>
-          <p:cNvPr id="16" name="TextBox 15"/>
-          <p:cNvSpPr txBox="1"/>
-          <p:nvPr/>
-        </p:nvSpPr>
-        <p:spPr>
-          <a:xfrm>
-            <a:off x="621792" y="6062472"/>
-            <a:ext cx="10927080" cy="365760"/>
-          </a:xfrm>
-          <a:prstGeom prst="rect">
-            <a:avLst/>
-          </a:prstGeom>
-          <a:noFill/>
-        </p:spPr>
-        <p:txBody>
-          <a:bodyPr wrap="square" anchor="t" lIns="0" rIns="0" tIns="0" bIns="0">
-            <a:noAutofit/>
-          </a:bodyPr>
-          <a:lstStyle/>
-          <a:p>
-            <a:pPr algn="l">
-              <a:lnSpc>
-                <a:spcPct val="113000"/>
-              </a:lnSpc>
-              <a:spcBef>
-                <a:spcPts val="0"/>
-              </a:spcBef>
-              <a:spcAft>
-                <a:spcPts val="0"/>
-              </a:spcAft>
-            </a:pPr>
-            <a:r>
-              <a:rPr sz="1300" b="0" lang="ko-KR">
-                <a:solidFill>
-                  <a:srgbClr val="53657D"/>
-                </a:solidFill>
-                <a:latin typeface="맑은 고딕"/>
-                <a:ea typeface="맑은 고딕"/>
-              </a:rPr>
-              <a:t>인프라: Docker 단계별 빌드로 화면·서버를 통합하며, Docker Compose로 앱과 MySQL 8을 구성합니다.</a:t>
-            </a:r>
-          </a:p>
-        </p:txBody>
-      </p:sp>
-    </p:spTree>
-  </p:cSld>
-  <p:clrMapOvr>
-    <a:masterClrMapping/>
-  </p:clrMapOvr>
-</p:sld>
-</file>
-
 <file path=ppt/slides/slide17.xml><?xml version="1.0" encoding="utf-8"?>
 <p:sld xmlns:a="http://schemas.openxmlformats.org/drawingml/2006/main" xmlns:p="http://schemas.openxmlformats.org/presentationml/2006/main" xmlns:r="http://schemas.openxmlformats.org/officeDocument/2006/relationships">
   <p:cSld>
@@ -13625,7 +14428,7 @@
                 <a:latin typeface="맑은 고딕"/>
                 <a:ea typeface="맑은 고딕"/>
               </a:rPr>
-              <a:t>구현된 범위와 남은 확인</a:t>
+              <a:t>현재 구현 규모</a:t>
             </a:r>
           </a:p>
         </p:txBody>
@@ -13671,7 +14474,7 @@
                 <a:latin typeface="맑은 고딕"/>
                 <a:ea typeface="맑은 고딕"/>
               </a:rPr>
-              <a:t>소개한 핵심 기능은 코드와 테스트가 있으며, 운영 배포와 실제 환경 검증은 남아 있습니다.</a:t>
+              <a:t>코드와 설계 파일을 다시 확인한 2026-09-11 기준입니다.</a:t>
             </a:r>
           </a:p>
         </p:txBody>
@@ -13718,6 +14521,735 @@
                 <a:ea typeface="맑은 고딕"/>
               </a:rPr>
               <a:t>17</a:t>
+            </a:r>
+          </a:p>
+        </p:txBody>
+      </p:sp>
+      <p:sp>
+        <p:nvSpPr>
+          <p:cNvPr id="5" name="TextBox 4"/>
+          <p:cNvSpPr txBox="1"/>
+          <p:nvPr/>
+        </p:nvSpPr>
+        <p:spPr>
+          <a:xfrm>
+            <a:off x="704088" y="1883664"/>
+            <a:ext cx="2148840" cy="886968"/>
+          </a:xfrm>
+          <a:prstGeom prst="rect">
+            <a:avLst/>
+          </a:prstGeom>
+          <a:noFill/>
+        </p:spPr>
+        <p:txBody>
+          <a:bodyPr wrap="square" anchor="t" lIns="0" rIns="0" tIns="0" bIns="0">
+            <a:noAutofit/>
+          </a:bodyPr>
+          <a:lstStyle/>
+          <a:p>
+            <a:pPr algn="l">
+              <a:lnSpc>
+                <a:spcPct val="113000"/>
+              </a:lnSpc>
+              <a:spcBef>
+                <a:spcPts val="0"/>
+              </a:spcBef>
+              <a:spcAft>
+                <a:spcPts val="0"/>
+              </a:spcAft>
+            </a:pPr>
+            <a:r>
+              <a:rPr sz="5200" b="1" lang="ko-KR">
+                <a:solidFill>
+                  <a:srgbClr val="245BCE"/>
+                </a:solidFill>
+                <a:latin typeface="맑은 고딕"/>
+                <a:ea typeface="맑은 고딕"/>
+              </a:rPr>
+              <a:t>88</a:t>
+            </a:r>
+          </a:p>
+        </p:txBody>
+      </p:sp>
+      <p:sp>
+        <p:nvSpPr>
+          <p:cNvPr id="6" name="TextBox 5"/>
+          <p:cNvSpPr txBox="1"/>
+          <p:nvPr/>
+        </p:nvSpPr>
+        <p:spPr>
+          <a:xfrm>
+            <a:off x="704088" y="2953512"/>
+            <a:ext cx="2286000" cy="411480"/>
+          </a:xfrm>
+          <a:prstGeom prst="rect">
+            <a:avLst/>
+          </a:prstGeom>
+          <a:noFill/>
+        </p:spPr>
+        <p:txBody>
+          <a:bodyPr wrap="square" anchor="t" lIns="0" rIns="0" tIns="0" bIns="0">
+            <a:noAutofit/>
+          </a:bodyPr>
+          <a:lstStyle/>
+          <a:p>
+            <a:pPr algn="l">
+              <a:lnSpc>
+                <a:spcPct val="113000"/>
+              </a:lnSpc>
+              <a:spcBef>
+                <a:spcPts val="0"/>
+              </a:spcBef>
+              <a:spcAft>
+                <a:spcPts val="0"/>
+              </a:spcAft>
+            </a:pPr>
+            <a:r>
+              <a:rPr sz="2100" b="0" lang="ko-KR">
+                <a:solidFill>
+                  <a:srgbClr val="172B49"/>
+                </a:solidFill>
+                <a:latin typeface="맑은 고딕"/>
+                <a:ea typeface="맑은 고딕"/>
+              </a:rPr>
+              <a:t>업무 API</a:t>
+            </a:r>
+          </a:p>
+        </p:txBody>
+      </p:sp>
+      <p:sp>
+        <p:nvSpPr>
+          <p:cNvPr id="7" name="TextBox 6"/>
+          <p:cNvSpPr txBox="1"/>
+          <p:nvPr/>
+        </p:nvSpPr>
+        <p:spPr>
+          <a:xfrm>
+            <a:off x="3575304" y="1883664"/>
+            <a:ext cx="2148840" cy="886968"/>
+          </a:xfrm>
+          <a:prstGeom prst="rect">
+            <a:avLst/>
+          </a:prstGeom>
+          <a:noFill/>
+        </p:spPr>
+        <p:txBody>
+          <a:bodyPr wrap="square" anchor="t" lIns="0" rIns="0" tIns="0" bIns="0">
+            <a:noAutofit/>
+          </a:bodyPr>
+          <a:lstStyle/>
+          <a:p>
+            <a:pPr algn="l">
+              <a:lnSpc>
+                <a:spcPct val="113000"/>
+              </a:lnSpc>
+              <a:spcBef>
+                <a:spcPts val="0"/>
+              </a:spcBef>
+              <a:spcAft>
+                <a:spcPts val="0"/>
+              </a:spcAft>
+            </a:pPr>
+            <a:r>
+              <a:rPr sz="5200" b="1" lang="ko-KR">
+                <a:solidFill>
+                  <a:srgbClr val="245BCE"/>
+                </a:solidFill>
+                <a:latin typeface="맑은 고딕"/>
+                <a:ea typeface="맑은 고딕"/>
+              </a:rPr>
+              <a:t>17</a:t>
+            </a:r>
+          </a:p>
+        </p:txBody>
+      </p:sp>
+      <p:sp>
+        <p:nvSpPr>
+          <p:cNvPr id="8" name="TextBox 7"/>
+          <p:cNvSpPr txBox="1"/>
+          <p:nvPr/>
+        </p:nvSpPr>
+        <p:spPr>
+          <a:xfrm>
+            <a:off x="3575304" y="2953512"/>
+            <a:ext cx="2286000" cy="411480"/>
+          </a:xfrm>
+          <a:prstGeom prst="rect">
+            <a:avLst/>
+          </a:prstGeom>
+          <a:noFill/>
+        </p:spPr>
+        <p:txBody>
+          <a:bodyPr wrap="square" anchor="t" lIns="0" rIns="0" tIns="0" bIns="0">
+            <a:noAutofit/>
+          </a:bodyPr>
+          <a:lstStyle/>
+          <a:p>
+            <a:pPr algn="l">
+              <a:lnSpc>
+                <a:spcPct val="113000"/>
+              </a:lnSpc>
+              <a:spcBef>
+                <a:spcPts val="0"/>
+              </a:spcBef>
+              <a:spcAft>
+                <a:spcPts val="0"/>
+              </a:spcAft>
+            </a:pPr>
+            <a:r>
+              <a:rPr sz="2100" b="0" lang="ko-KR">
+                <a:solidFill>
+                  <a:srgbClr val="172B49"/>
+                </a:solidFill>
+                <a:latin typeface="맑은 고딕"/>
+                <a:ea typeface="맑은 고딕"/>
+              </a:rPr>
+              <a:t>화면</a:t>
+            </a:r>
+          </a:p>
+        </p:txBody>
+      </p:sp>
+      <p:sp>
+        <p:nvSpPr>
+          <p:cNvPr id="9" name="TextBox 8"/>
+          <p:cNvSpPr txBox="1"/>
+          <p:nvPr/>
+        </p:nvSpPr>
+        <p:spPr>
+          <a:xfrm>
+            <a:off x="6446520" y="1883664"/>
+            <a:ext cx="2148840" cy="886968"/>
+          </a:xfrm>
+          <a:prstGeom prst="rect">
+            <a:avLst/>
+          </a:prstGeom>
+          <a:noFill/>
+        </p:spPr>
+        <p:txBody>
+          <a:bodyPr wrap="square" anchor="t" lIns="0" rIns="0" tIns="0" bIns="0">
+            <a:noAutofit/>
+          </a:bodyPr>
+          <a:lstStyle/>
+          <a:p>
+            <a:pPr algn="l">
+              <a:lnSpc>
+                <a:spcPct val="113000"/>
+              </a:lnSpc>
+              <a:spcBef>
+                <a:spcPts val="0"/>
+              </a:spcBef>
+              <a:spcAft>
+                <a:spcPts val="0"/>
+              </a:spcAft>
+            </a:pPr>
+            <a:r>
+              <a:rPr sz="5200" b="1" lang="ko-KR">
+                <a:solidFill>
+                  <a:srgbClr val="245BCE"/>
+                </a:solidFill>
+                <a:latin typeface="맑은 고딕"/>
+                <a:ea typeface="맑은 고딕"/>
+              </a:rPr>
+              <a:t>21</a:t>
+            </a:r>
+          </a:p>
+        </p:txBody>
+      </p:sp>
+      <p:sp>
+        <p:nvSpPr>
+          <p:cNvPr id="10" name="TextBox 9"/>
+          <p:cNvSpPr txBox="1"/>
+          <p:nvPr/>
+        </p:nvSpPr>
+        <p:spPr>
+          <a:xfrm>
+            <a:off x="6446520" y="2953512"/>
+            <a:ext cx="2286000" cy="411480"/>
+          </a:xfrm>
+          <a:prstGeom prst="rect">
+            <a:avLst/>
+          </a:prstGeom>
+          <a:noFill/>
+        </p:spPr>
+        <p:txBody>
+          <a:bodyPr wrap="square" anchor="t" lIns="0" rIns="0" tIns="0" bIns="0">
+            <a:noAutofit/>
+          </a:bodyPr>
+          <a:lstStyle/>
+          <a:p>
+            <a:pPr algn="l">
+              <a:lnSpc>
+                <a:spcPct val="113000"/>
+              </a:lnSpc>
+              <a:spcBef>
+                <a:spcPts val="0"/>
+              </a:spcBef>
+              <a:spcAft>
+                <a:spcPts val="0"/>
+              </a:spcAft>
+            </a:pPr>
+            <a:r>
+              <a:rPr sz="2100" b="0" lang="ko-KR">
+                <a:solidFill>
+                  <a:srgbClr val="172B49"/>
+                </a:solidFill>
+                <a:latin typeface="맑은 고딕"/>
+                <a:ea typeface="맑은 고딕"/>
+              </a:rPr>
+              <a:t>DB 테이블</a:t>
+            </a:r>
+          </a:p>
+        </p:txBody>
+      </p:sp>
+      <p:sp>
+        <p:nvSpPr>
+          <p:cNvPr id="11" name="TextBox 10"/>
+          <p:cNvSpPr txBox="1"/>
+          <p:nvPr/>
+        </p:nvSpPr>
+        <p:spPr>
+          <a:xfrm>
+            <a:off x="9317736" y="1883664"/>
+            <a:ext cx="2148840" cy="886968"/>
+          </a:xfrm>
+          <a:prstGeom prst="rect">
+            <a:avLst/>
+          </a:prstGeom>
+          <a:noFill/>
+        </p:spPr>
+        <p:txBody>
+          <a:bodyPr wrap="square" anchor="t" lIns="0" rIns="0" tIns="0" bIns="0">
+            <a:noAutofit/>
+          </a:bodyPr>
+          <a:lstStyle/>
+          <a:p>
+            <a:pPr algn="l">
+              <a:lnSpc>
+                <a:spcPct val="113000"/>
+              </a:lnSpc>
+              <a:spcBef>
+                <a:spcPts val="0"/>
+              </a:spcBef>
+              <a:spcAft>
+                <a:spcPts val="0"/>
+              </a:spcAft>
+            </a:pPr>
+            <a:r>
+              <a:rPr sz="5200" b="1" lang="ko-KR">
+                <a:solidFill>
+                  <a:srgbClr val="245BCE"/>
+                </a:solidFill>
+                <a:latin typeface="맑은 고딕"/>
+                <a:ea typeface="맑은 고딕"/>
+              </a:rPr>
+              <a:t>12</a:t>
+            </a:r>
+          </a:p>
+        </p:txBody>
+      </p:sp>
+      <p:sp>
+        <p:nvSpPr>
+          <p:cNvPr id="12" name="TextBox 11"/>
+          <p:cNvSpPr txBox="1"/>
+          <p:nvPr/>
+        </p:nvSpPr>
+        <p:spPr>
+          <a:xfrm>
+            <a:off x="9317736" y="2953512"/>
+            <a:ext cx="2286000" cy="411480"/>
+          </a:xfrm>
+          <a:prstGeom prst="rect">
+            <a:avLst/>
+          </a:prstGeom>
+          <a:noFill/>
+        </p:spPr>
+        <p:txBody>
+          <a:bodyPr wrap="square" anchor="t" lIns="0" rIns="0" tIns="0" bIns="0">
+            <a:noAutofit/>
+          </a:bodyPr>
+          <a:lstStyle/>
+          <a:p>
+            <a:pPr algn="l">
+              <a:lnSpc>
+                <a:spcPct val="113000"/>
+              </a:lnSpc>
+              <a:spcBef>
+                <a:spcPts val="0"/>
+              </a:spcBef>
+              <a:spcAft>
+                <a:spcPts val="0"/>
+              </a:spcAft>
+            </a:pPr>
+            <a:r>
+              <a:rPr sz="2100" b="0" lang="ko-KR">
+                <a:solidFill>
+                  <a:srgbClr val="172B49"/>
+                </a:solidFill>
+                <a:latin typeface="맑은 고딕"/>
+                <a:ea typeface="맑은 고딕"/>
+              </a:rPr>
+              <a:t>관리자 설정</a:t>
+            </a:r>
+          </a:p>
+        </p:txBody>
+      </p:sp>
+      <p:cxnSp>
+        <p:nvCxnSpPr>
+          <p:cNvPr id="13" name="Connector 12"/>
+          <p:cNvCxnSpPr/>
+          <p:nvPr/>
+        </p:nvCxnSpPr>
+        <p:spPr>
+          <a:xfrm>
+            <a:off x="704088" y="3675887"/>
+            <a:ext cx="10789920" cy="0"/>
+          </a:xfrm>
+          <a:prstGeom prst="line">
+            <a:avLst/>
+          </a:prstGeom>
+          <a:ln w="8890">
+            <a:solidFill>
+              <a:srgbClr val="CCD6E5"/>
+            </a:solidFill>
+          </a:ln>
+          <a:effectLst/>
+        </p:spPr>
+        <p:style>
+          <a:lnRef idx="2">
+            <a:schemeClr val="accent1"/>
+          </a:lnRef>
+          <a:fillRef idx="0">
+            <a:schemeClr val="accent1"/>
+          </a:fillRef>
+          <a:effectRef idx="1">
+            <a:schemeClr val="accent1"/>
+          </a:effectRef>
+          <a:fontRef idx="minor">
+            <a:schemeClr val="tx1"/>
+          </a:fontRef>
+        </p:style>
+      </p:cxnSp>
+      <p:sp>
+        <p:nvSpPr>
+          <p:cNvPr id="14" name="TextBox 13"/>
+          <p:cNvSpPr txBox="1"/>
+          <p:nvPr/>
+        </p:nvSpPr>
+        <p:spPr>
+          <a:xfrm>
+            <a:off x="704088" y="4114800"/>
+            <a:ext cx="2880360" cy="758952"/>
+          </a:xfrm>
+          <a:prstGeom prst="rect">
+            <a:avLst/>
+          </a:prstGeom>
+          <a:noFill/>
+        </p:spPr>
+        <p:txBody>
+          <a:bodyPr wrap="square" anchor="t" lIns="0" rIns="0" tIns="0" bIns="0">
+            <a:noAutofit/>
+          </a:bodyPr>
+          <a:lstStyle/>
+          <a:p>
+            <a:pPr algn="l">
+              <a:lnSpc>
+                <a:spcPct val="113000"/>
+              </a:lnSpc>
+              <a:spcBef>
+                <a:spcPts val="0"/>
+              </a:spcBef>
+              <a:spcAft>
+                <a:spcPts val="0"/>
+              </a:spcAft>
+            </a:pPr>
+            <a:r>
+              <a:rPr sz="4200" b="1" lang="ko-KR">
+                <a:solidFill>
+                  <a:srgbClr val="172B49"/>
+                </a:solidFill>
+                <a:latin typeface="맑은 고딕"/>
+                <a:ea typeface="맑은 고딕"/>
+              </a:rPr>
+              <a:t>832건</a:t>
+            </a:r>
+          </a:p>
+        </p:txBody>
+      </p:sp>
+      <p:sp>
+        <p:nvSpPr>
+          <p:cNvPr id="15" name="TextBox 14"/>
+          <p:cNvSpPr txBox="1"/>
+          <p:nvPr/>
+        </p:nvSpPr>
+        <p:spPr>
+          <a:xfrm>
+            <a:off x="3941063" y="4169663"/>
+            <a:ext cx="7543800" cy="1024128"/>
+          </a:xfrm>
+          <a:prstGeom prst="rect">
+            <a:avLst/>
+          </a:prstGeom>
+          <a:noFill/>
+        </p:spPr>
+        <p:txBody>
+          <a:bodyPr wrap="square" anchor="t" lIns="0" rIns="0" tIns="0" bIns="0">
+            <a:noAutofit/>
+          </a:bodyPr>
+          <a:lstStyle/>
+          <a:p>
+            <a:pPr algn="l">
+              <a:lnSpc>
+                <a:spcPct val="113000"/>
+              </a:lnSpc>
+              <a:spcBef>
+                <a:spcPts val="0"/>
+              </a:spcBef>
+              <a:spcAft>
+                <a:spcPts val="0"/>
+              </a:spcAft>
+            </a:pPr>
+            <a:r>
+              <a:rPr sz="2000" b="0" lang="ko-KR">
+                <a:solidFill>
+                  <a:srgbClr val="172B49"/>
+                </a:solidFill>
+                <a:latin typeface="맑은 고딕"/>
+                <a:ea typeface="맑은 고딕"/>
+              </a:rPr>
+              <a:t>자동 테스트 기록</a:t>
+            </a:r>
+          </a:p>
+          <a:p>
+            <a:pPr algn="l">
+              <a:lnSpc>
+                <a:spcPct val="113000"/>
+              </a:lnSpc>
+              <a:spcBef>
+                <a:spcPts val="0"/>
+              </a:spcBef>
+              <a:spcAft>
+                <a:spcPts val="0"/>
+              </a:spcAft>
+            </a:pPr>
+            <a:r>
+              <a:rPr sz="2000" b="0" lang="ko-KR">
+                <a:solidFill>
+                  <a:srgbClr val="172B49"/>
+                </a:solidFill>
+                <a:latin typeface="맑은 고딕"/>
+                <a:ea typeface="맑은 고딕"/>
+              </a:rPr>
+              <a:t>백엔드 500 + 프론트엔드 332 · 2026-09-08 실행</a:t>
+            </a:r>
+          </a:p>
+        </p:txBody>
+      </p:sp>
+      <p:sp>
+        <p:nvSpPr>
+          <p:cNvPr id="16" name="TextBox 15"/>
+          <p:cNvSpPr txBox="1"/>
+          <p:nvPr/>
+        </p:nvSpPr>
+        <p:spPr>
+          <a:xfrm>
+            <a:off x="621792" y="6062472"/>
+            <a:ext cx="10927080" cy="365760"/>
+          </a:xfrm>
+          <a:prstGeom prst="rect">
+            <a:avLst/>
+          </a:prstGeom>
+          <a:noFill/>
+        </p:spPr>
+        <p:txBody>
+          <a:bodyPr wrap="square" anchor="t" lIns="0" rIns="0" tIns="0" bIns="0">
+            <a:noAutofit/>
+          </a:bodyPr>
+          <a:lstStyle/>
+          <a:p>
+            <a:pPr algn="l">
+              <a:lnSpc>
+                <a:spcPct val="113000"/>
+              </a:lnSpc>
+              <a:spcBef>
+                <a:spcPts val="0"/>
+              </a:spcBef>
+              <a:spcAft>
+                <a:spcPts val="0"/>
+              </a:spcAft>
+            </a:pPr>
+            <a:r>
+              <a:rPr sz="1300" b="0" lang="ko-KR">
+                <a:solidFill>
+                  <a:srgbClr val="53657D"/>
+                </a:solidFill>
+                <a:latin typeface="맑은 고딕"/>
+                <a:ea typeface="맑은 고딕"/>
+              </a:rPr>
+              <a:t>인프라: Docker 단계별 빌드로 화면·서버를 통합하며, Docker Compose로 앱과 MySQL 8을 구성합니다.</a:t>
+            </a:r>
+          </a:p>
+        </p:txBody>
+      </p:sp>
+    </p:spTree>
+  </p:cSld>
+  <p:clrMapOvr>
+    <a:masterClrMapping/>
+  </p:clrMapOvr>
+</p:sld>
+</file>
+
+<file path=ppt/slides/slide18.xml><?xml version="1.0" encoding="utf-8"?>
+<p:sld xmlns:a="http://schemas.openxmlformats.org/drawingml/2006/main" xmlns:p="http://schemas.openxmlformats.org/presentationml/2006/main" xmlns:r="http://schemas.openxmlformats.org/officeDocument/2006/relationships">
+  <p:cSld>
+    <p:bg>
+      <p:bgPr>
+        <a:solidFill>
+          <a:srgbClr val="F7F9FC"/>
+        </a:solidFill>
+        <a:effectLst/>
+      </p:bgPr>
+    </p:bg>
+    <p:spTree>
+      <p:nvGrpSpPr>
+        <p:cNvPr id="1" name=""/>
+        <p:cNvGrpSpPr/>
+        <p:nvPr/>
+      </p:nvGrpSpPr>
+      <p:grpSpPr/>
+      <p:sp>
+        <p:nvSpPr>
+          <p:cNvPr id="2" name="TextBox 1"/>
+          <p:cNvSpPr txBox="1"/>
+          <p:nvPr/>
+        </p:nvSpPr>
+        <p:spPr>
+          <a:xfrm>
+            <a:off x="594360" y="438912"/>
+            <a:ext cx="10972800" cy="594360"/>
+          </a:xfrm>
+          <a:prstGeom prst="rect">
+            <a:avLst/>
+          </a:prstGeom>
+          <a:noFill/>
+        </p:spPr>
+        <p:txBody>
+          <a:bodyPr wrap="square" anchor="t" lIns="0" rIns="0" tIns="0" bIns="0">
+            <a:noAutofit/>
+          </a:bodyPr>
+          <a:lstStyle/>
+          <a:p>
+            <a:pPr algn="l">
+              <a:lnSpc>
+                <a:spcPct val="113000"/>
+              </a:lnSpc>
+              <a:spcBef>
+                <a:spcPts val="0"/>
+              </a:spcBef>
+              <a:spcAft>
+                <a:spcPts val="0"/>
+              </a:spcAft>
+            </a:pPr>
+            <a:r>
+              <a:rPr sz="3200" b="1" lang="ko-KR">
+                <a:solidFill>
+                  <a:srgbClr val="172B49"/>
+                </a:solidFill>
+                <a:latin typeface="맑은 고딕"/>
+                <a:ea typeface="맑은 고딕"/>
+              </a:rPr>
+              <a:t>구현된 범위와 남은 확인</a:t>
+            </a:r>
+          </a:p>
+        </p:txBody>
+      </p:sp>
+      <p:sp>
+        <p:nvSpPr>
+          <p:cNvPr id="3" name="TextBox 2"/>
+          <p:cNvSpPr txBox="1"/>
+          <p:nvPr/>
+        </p:nvSpPr>
+        <p:spPr>
+          <a:xfrm>
+            <a:off x="621792" y="1124712"/>
+            <a:ext cx="10972800" cy="548640"/>
+          </a:xfrm>
+          <a:prstGeom prst="rect">
+            <a:avLst/>
+          </a:prstGeom>
+          <a:noFill/>
+        </p:spPr>
+        <p:txBody>
+          <a:bodyPr wrap="square" anchor="t" lIns="0" rIns="0" tIns="0" bIns="0">
+            <a:noAutofit/>
+          </a:bodyPr>
+          <a:lstStyle/>
+          <a:p>
+            <a:pPr algn="l">
+              <a:lnSpc>
+                <a:spcPct val="113000"/>
+              </a:lnSpc>
+              <a:spcBef>
+                <a:spcPts val="0"/>
+              </a:spcBef>
+              <a:spcAft>
+                <a:spcPts val="0"/>
+              </a:spcAft>
+            </a:pPr>
+            <a:r>
+              <a:rPr sz="1650" b="0" lang="ko-KR">
+                <a:solidFill>
+                  <a:srgbClr val="53657D"/>
+                </a:solidFill>
+                <a:latin typeface="맑은 고딕"/>
+                <a:ea typeface="맑은 고딕"/>
+              </a:rPr>
+              <a:t>소개한 핵심 기능은 코드와 테스트가 있으며, 운영 배포와 실제 환경 검증은 남아 있습니다.</a:t>
+            </a:r>
+          </a:p>
+        </p:txBody>
+      </p:sp>
+      <p:sp>
+        <p:nvSpPr>
+          <p:cNvPr id="4" name="TextBox 3"/>
+          <p:cNvSpPr txBox="1"/>
+          <p:nvPr/>
+        </p:nvSpPr>
+        <p:spPr>
+          <a:xfrm>
+            <a:off x="10954512" y="6428232"/>
+            <a:ext cx="594360" cy="228600"/>
+          </a:xfrm>
+          <a:prstGeom prst="rect">
+            <a:avLst/>
+          </a:prstGeom>
+          <a:noFill/>
+        </p:spPr>
+        <p:txBody>
+          <a:bodyPr wrap="square" anchor="t" lIns="0" rIns="0" tIns="0" bIns="0">
+            <a:noAutofit/>
+          </a:bodyPr>
+          <a:lstStyle/>
+          <a:p>
+            <a:pPr algn="r">
+              <a:lnSpc>
+                <a:spcPct val="113000"/>
+              </a:lnSpc>
+              <a:spcBef>
+                <a:spcPts val="0"/>
+              </a:spcBef>
+              <a:spcAft>
+                <a:spcPts val="0"/>
+              </a:spcAft>
+            </a:pPr>
+            <a:r>
+              <a:rPr sz="1100" b="0" lang="ko-KR">
+                <a:solidFill>
+                  <a:srgbClr val="53657D"/>
+                </a:solidFill>
+                <a:latin typeface="맑은 고딕"/>
+                <a:ea typeface="맑은 고딕"/>
+              </a:rPr>
+              <a:t>18</a:t>
             </a:r>
           </a:p>
         </p:txBody>

--- a/docs/발표자료/연차ON-프로젝트-소개-2026-09-11.pptx
+++ b/docs/발표자료/연차ON-프로젝트-소개-2026-09-11.pptx
@@ -19295,7 +19295,7 @@
                 <a:latin typeface="맑은 고딕"/>
                 <a:ea typeface="맑은 고딕"/>
               </a:rPr>
-              <a:t>소개한 핵심 기능은 코드와 테스트가 있으며, 운영 배포와 실제 환경 검증은 남아 있습니다.</a:t>
+              <a:t>소개한 기능은 코드와 테스트가 있으며, 실제 운영 환경에서의 확인이 남아 있습니다.</a:t>
             </a:r>
           </a:p>
         </p:txBody>
@@ -19571,7 +19571,7 @@
                 <a:latin typeface="맑은 고딕"/>
                 <a:ea typeface="맑은 고딕"/>
               </a:rPr>
-              <a:t>남은 작업</a:t>
+              <a:t>운영 전 확인</a:t>
             </a:r>
           </a:p>
         </p:txBody>
@@ -19617,7 +19617,7 @@
                 <a:latin typeface="맑은 고딕"/>
                 <a:ea typeface="맑은 고딕"/>
               </a:rPr>
-              <a:t>실제 메일 수신과 외부 연동 확인</a:t>
+              <a:t>회사 Google 계정으로 로그인해 실제 사원 데이터로 확인</a:t>
             </a:r>
           </a:p>
           <a:p>
@@ -19640,7 +19640,7 @@
                 <a:latin typeface="맑은 고딕"/>
                 <a:ea typeface="맑은 고딕"/>
               </a:rPr>
-              <a:t>사용자 시나리오별 화면 검증</a:t>
+              <a:t>실제 메일 수신과 외부 연동(SMTP · 공휴일 API) 확인</a:t>
             </a:r>
           </a:p>
           <a:p>
@@ -19663,53 +19663,7 @@
                 <a:latin typeface="맑은 고딕"/>
                 <a:ea typeface="맑은 고딕"/>
               </a:rPr>
-              <a:t>관리자 문의 기능 개발</a:t>
-            </a:r>
-          </a:p>
-          <a:p>
-            <a:pPr algn="l">
-              <a:lnSpc>
-                <a:spcPct val="113000"/>
-              </a:lnSpc>
-              <a:spcBef>
-                <a:spcPts val="0"/>
-              </a:spcBef>
-              <a:spcAft>
-                <a:spcPts val="0"/>
-              </a:spcAft>
-            </a:pPr>
-            <a:r>
-              <a:rPr sz="2000" b="0" lang="ko-KR">
-                <a:solidFill>
-                  <a:srgbClr val="172B49"/>
-                </a:solidFill>
-                <a:latin typeface="맑은 고딕"/>
-                <a:ea typeface="맑은 고딕"/>
-              </a:rPr>
-              <a:t>운영 DB 반영과 배포 검증</a:t>
-            </a:r>
-          </a:p>
-          <a:p>
-            <a:pPr algn="l">
-              <a:lnSpc>
-                <a:spcPct val="113000"/>
-              </a:lnSpc>
-              <a:spcBef>
-                <a:spcPts val="0"/>
-              </a:spcBef>
-              <a:spcAft>
-                <a:spcPts val="0"/>
-              </a:spcAft>
-            </a:pPr>
-            <a:r>
-              <a:rPr sz="2000" b="0" lang="ko-KR">
-                <a:solidFill>
-                  <a:srgbClr val="172B49"/>
-                </a:solidFill>
-                <a:latin typeface="맑은 고딕"/>
-                <a:ea typeface="맑은 고딕"/>
-              </a:rPr>
-              <a:t>일부 조직 변경의 동시 처리 보완</a:t>
+              <a:t>운영 DB 스키마 반영과 배포 검증</a:t>
             </a:r>
           </a:p>
         </p:txBody>

--- a/docs/발표자료/연차ON-프로젝트-소개-2026-09-11.pptx
+++ b/docs/발표자료/연차ON-프로젝트-소개-2026-09-11.pptx
@@ -5144,8 +5144,8 @@
         </p:nvSpPr>
         <p:spPr>
           <a:xfrm>
-            <a:off x="786384" y="1828800"/>
-            <a:ext cx="10698480" cy="1143000"/>
+            <a:off x="786384" y="1783080"/>
+            <a:ext cx="10698480" cy="1920240"/>
           </a:xfrm>
           <a:prstGeom prst="rect">
             <a:avLst/>
@@ -5170,14 +5170,37 @@
               </a:spcAft>
             </a:pPr>
             <a:r>
-              <a:rPr sz="6800" b="1" lang="ko-KR">
+              <a:rPr sz="4600" b="1" lang="ko-KR">
                 <a:solidFill>
                   <a:srgbClr val="FFFFFF"/>
                 </a:solidFill>
                 <a:latin typeface="맑은 고딕"/>
                 <a:ea typeface="맑은 고딕"/>
               </a:rPr>
-              <a:t>연차ON</a:t>
+              <a:t>MLsoft 사내 연차·복리후생</a:t>
+            </a:r>
+          </a:p>
+          <a:p>
+            <a:pPr algn="l">
+              <a:lnSpc>
+                <a:spcPct val="113000"/>
+              </a:lnSpc>
+              <a:spcBef>
+                <a:spcPts val="0"/>
+              </a:spcBef>
+              <a:spcAft>
+                <a:spcPts val="0"/>
+              </a:spcAft>
+            </a:pPr>
+            <a:r>
+              <a:rPr sz="4600" b="1" lang="ko-KR">
+                <a:solidFill>
+                  <a:srgbClr val="FFFFFF"/>
+                </a:solidFill>
+                <a:latin typeface="맑은 고딕"/>
+                <a:ea typeface="맑은 고딕"/>
+              </a:rPr>
+              <a:t>관리 시스템 V2</a:t>
             </a:r>
           </a:p>
         </p:txBody>
@@ -5190,8 +5213,8 @@
         </p:nvSpPr>
         <p:spPr>
           <a:xfrm>
-            <a:off x="841248" y="3108960"/>
-            <a:ext cx="10515600" cy="960120"/>
+            <a:off x="841248" y="3840480"/>
+            <a:ext cx="10515600" cy="548640"/>
           </a:xfrm>
           <a:prstGeom prst="rect">
             <a:avLst/>
@@ -5216,37 +5239,14 @@
               </a:spcAft>
             </a:pPr>
             <a:r>
-              <a:rPr sz="2900" b="0" lang="ko-KR">
-                <a:solidFill>
-                  <a:srgbClr val="FFFFFF"/>
-                </a:solidFill>
-                <a:latin typeface="맑은 고딕"/>
-                <a:ea typeface="맑은 고딕"/>
-              </a:rPr>
-              <a:t>MLsoft 사내 연차·복리후생</a:t>
-            </a:r>
-          </a:p>
-          <a:p>
-            <a:pPr algn="l">
-              <a:lnSpc>
-                <a:spcPct val="113000"/>
-              </a:lnSpc>
-              <a:spcBef>
-                <a:spcPts val="0"/>
-              </a:spcBef>
-              <a:spcAft>
-                <a:spcPts val="0"/>
-              </a:spcAft>
-            </a:pPr>
-            <a:r>
-              <a:rPr sz="2900" b="0" lang="ko-KR">
-                <a:solidFill>
-                  <a:srgbClr val="FFFFFF"/>
-                </a:solidFill>
-                <a:latin typeface="맑은 고딕"/>
-                <a:ea typeface="맑은 고딕"/>
-              </a:rPr>
-              <a:t>관리 시스템 V2</a:t>
+              <a:rPr sz="2400" b="0" lang="ko-KR">
+                <a:solidFill>
+                  <a:srgbClr val="B8CBE5"/>
+                </a:solidFill>
+                <a:latin typeface="맑은 고딕"/>
+                <a:ea typeface="맑은 고딕"/>
+              </a:rPr>
+              <a:t>시스템 구성 · 데이터베이스 · 기능 흐름</a:t>
             </a:r>
           </a:p>
         </p:txBody>

--- a/docs/발표자료/연차ON-프로젝트-소개-2026-09-11.pptx
+++ b/docs/발표자료/연차ON-프로젝트-소개-2026-09-11.pptx
@@ -25534,7 +25534,7 @@
         </p:nvGraphicFramePr>
         <p:xfrm>
           <a:off x="621792" y="1783080"/>
-          <a:ext cx="10927079" cy="3968496"/>
+          <a:ext cx="10927080" cy="3200400"/>
         </p:xfrm>
         <a:graphic>
           <a:graphicData uri="http://schemas.openxmlformats.org/drawingml/2006/table">
@@ -25543,11 +25543,11 @@
                 <a:tableStyleId>{5C22544A-7EE6-4342-B048-85BDC9FD1C3A}</a:tableStyleId>
               </a:tblPr>
               <a:tblGrid>
-                <a:gridCol w="1874519"/>
-                <a:gridCol w="2514600"/>
-                <a:gridCol w="6537960"/>
+                <a:gridCol w="1783080"/>
+                <a:gridCol w="2057400"/>
+                <a:gridCol w="7086600"/>
               </a:tblGrid>
-              <a:tr h="566928">
+              <a:tr h="457200">
                 <a:tc>
                   <a:txBody>
                     <a:bodyPr wrap="square" anchor="ctr" lIns="82296" rIns="82296" tIns="82296" bIns="82296">
@@ -25567,7 +25567,7 @@
                         </a:spcAft>
                       </a:pPr>
                       <a:r>
-                        <a:rPr sz="1350" b="1" lang="ko-KR">
+                        <a:rPr sz="1300" b="1" lang="ko-KR">
                           <a:solidFill>
                             <a:srgbClr val="FFFFFF"/>
                           </a:solidFill>
@@ -25575,62 +25575,6 @@
                           <a:ea typeface="맑은 고딕"/>
                         </a:rPr>
                         <a:t>테이블</a:t>
-                      </a:r>
-                    </a:p>
-                  </a:txBody>
-                  <a:tcPr>
-                    <a:solidFill>
-                      <a:srgbClr val="0D203D"/>
-                    </a:solidFill>
-                    <a:lnL w="6350">
-                      <a:solidFill>
-                        <a:srgbClr val="F7F9FC"/>
-                      </a:solidFill>
-                    </a:lnL>
-                    <a:lnR w="6350">
-                      <a:solidFill>
-                        <a:srgbClr val="F7F9FC"/>
-                      </a:solidFill>
-                    </a:lnR>
-                    <a:lnT w="6350">
-                      <a:solidFill>
-                        <a:srgbClr val="F7F9FC"/>
-                      </a:solidFill>
-                    </a:lnT>
-                    <a:lnB w="6350">
-                      <a:solidFill>
-                        <a:srgbClr val="F7F9FC"/>
-                      </a:solidFill>
-                    </a:lnB>
-                  </a:tcPr>
-                </a:tc>
-                <a:tc>
-                  <a:txBody>
-                    <a:bodyPr wrap="square" anchor="ctr" lIns="82296" rIns="82296" tIns="82296" bIns="82296">
-                      <a:noAutofit/>
-                    </a:bodyPr>
-                    <a:lstStyle/>
-                    <a:p>
-                      <a:pPr algn="l">
-                        <a:lnSpc>
-                          <a:spcPct val="113000"/>
-                        </a:lnSpc>
-                        <a:spcBef>
-                          <a:spcPts val="0"/>
-                        </a:spcBef>
-                        <a:spcAft>
-                          <a:spcPts val="0"/>
-                        </a:spcAft>
-                      </a:pPr>
-                      <a:r>
-                        <a:rPr sz="1250" b="1" lang="ko-KR">
-                          <a:solidFill>
-                            <a:srgbClr val="FFFFFF"/>
-                          </a:solidFill>
-                          <a:latin typeface="맑은 고딕"/>
-                          <a:ea typeface="맑은 고딕"/>
-                        </a:rPr>
-                        <a:t>무엇을 담나</a:t>
                       </a:r>
                     </a:p>
                   </a:txBody>
@@ -25686,94 +25630,13 @@
                           <a:latin typeface="맑은 고딕"/>
                           <a:ea typeface="맑은 고딕"/>
                         </a:rPr>
-                        <a:t>주요 컬럼</a:t>
+                        <a:t>무엇을 담나</a:t>
                       </a:r>
                     </a:p>
                   </a:txBody>
                   <a:tcPr>
                     <a:solidFill>
                       <a:srgbClr val="0D203D"/>
-                    </a:solidFill>
-                    <a:lnL w="6350">
-                      <a:solidFill>
-                        <a:srgbClr val="F7F9FC"/>
-                      </a:solidFill>
-                    </a:lnL>
-                    <a:lnR w="6350">
-                      <a:solidFill>
-                        <a:srgbClr val="F7F9FC"/>
-                      </a:solidFill>
-                    </a:lnR>
-                    <a:lnT w="6350">
-                      <a:solidFill>
-                        <a:srgbClr val="F7F9FC"/>
-                      </a:solidFill>
-                    </a:lnT>
-                    <a:lnB w="6350">
-                      <a:solidFill>
-                        <a:srgbClr val="F7F9FC"/>
-                      </a:solidFill>
-                    </a:lnB>
-                  </a:tcPr>
-                </a:tc>
-              </a:tr>
-              <a:tr h="566928">
-                <a:tc>
-                  <a:txBody>
-                    <a:bodyPr wrap="square" anchor="ctr" lIns="82296" rIns="82296" tIns="82296" bIns="82296">
-                      <a:noAutofit/>
-                    </a:bodyPr>
-                    <a:lstStyle/>
-                    <a:p>
-                      <a:pPr algn="l">
-                        <a:lnSpc>
-                          <a:spcPct val="113000"/>
-                        </a:lnSpc>
-                        <a:spcBef>
-                          <a:spcPts val="0"/>
-                        </a:spcBef>
-                        <a:spcAft>
-                          <a:spcPts val="0"/>
-                        </a:spcAft>
-                      </a:pPr>
-                      <a:r>
-                        <a:rPr sz="1350" b="0" lang="ko-KR">
-                          <a:solidFill>
-                            <a:srgbClr val="172B49"/>
-                          </a:solidFill>
-                          <a:latin typeface="맑은 고딕"/>
-                          <a:ea typeface="맑은 고딕"/>
-                        </a:rPr>
-                        <a:t>users</a:t>
-                      </a:r>
-                    </a:p>
-                    <a:p>
-                      <a:pPr algn="l">
-                        <a:lnSpc>
-                          <a:spcPct val="113000"/>
-                        </a:lnSpc>
-                        <a:spcBef>
-                          <a:spcPts val="0"/>
-                        </a:spcBef>
-                        <a:spcAft>
-                          <a:spcPts val="0"/>
-                        </a:spcAft>
-                      </a:pPr>
-                      <a:r>
-                        <a:rPr sz="1350" b="0" lang="ko-KR">
-                          <a:solidFill>
-                            <a:srgbClr val="172B49"/>
-                          </a:solidFill>
-                          <a:latin typeface="맑은 고딕"/>
-                          <a:ea typeface="맑은 고딕"/>
-                        </a:rPr>
-                        <a:t>사원</a:t>
-                      </a:r>
-                    </a:p>
-                  </a:txBody>
-                  <a:tcPr>
-                    <a:solidFill>
-                      <a:srgbClr val="FFFFFF"/>
                     </a:solidFill>
                     <a:lnL w="6350">
                       <a:solidFill>
@@ -25816,16 +25679,51 @@
                         </a:spcAft>
                       </a:pPr>
                       <a:r>
-                        <a:rPr sz="1250" b="0" lang="ko-KR">
+                        <a:rPr sz="1150" b="1" lang="ko-KR">
                           <a:solidFill>
-                            <a:srgbClr val="172B49"/>
+                            <a:srgbClr val="FFFFFF"/>
                           </a:solidFill>
                           <a:latin typeface="맑은 고딕"/>
                           <a:ea typeface="맑은 고딕"/>
                         </a:rPr>
-                        <a:t>계정·역할·소속과 연차 잔액,</a:t>
+                        <a:t>주요 컬럼</a:t>
                       </a:r>
                     </a:p>
+                  </a:txBody>
+                  <a:tcPr>
+                    <a:solidFill>
+                      <a:srgbClr val="0D203D"/>
+                    </a:solidFill>
+                    <a:lnL w="6350">
+                      <a:solidFill>
+                        <a:srgbClr val="F7F9FC"/>
+                      </a:solidFill>
+                    </a:lnL>
+                    <a:lnR w="6350">
+                      <a:solidFill>
+                        <a:srgbClr val="F7F9FC"/>
+                      </a:solidFill>
+                    </a:lnR>
+                    <a:lnT w="6350">
+                      <a:solidFill>
+                        <a:srgbClr val="F7F9FC"/>
+                      </a:solidFill>
+                    </a:lnT>
+                    <a:lnB w="6350">
+                      <a:solidFill>
+                        <a:srgbClr val="F7F9FC"/>
+                      </a:solidFill>
+                    </a:lnB>
+                  </a:tcPr>
+                </a:tc>
+              </a:tr>
+              <a:tr h="457200">
+                <a:tc>
+                  <a:txBody>
+                    <a:bodyPr wrap="square" anchor="ctr" lIns="82296" rIns="82296" tIns="82296" bIns="82296">
+                      <a:noAutofit/>
+                    </a:bodyPr>
+                    <a:lstStyle/>
                     <a:p>
                       <a:pPr algn="l">
                         <a:lnSpc>
@@ -25839,14 +25737,14 @@
                         </a:spcAft>
                       </a:pPr>
                       <a:r>
-                        <a:rPr sz="1250" b="0" lang="ko-KR">
+                        <a:rPr sz="1300" b="0" lang="ko-KR">
                           <a:solidFill>
                             <a:srgbClr val="172B49"/>
                           </a:solidFill>
                           <a:latin typeface="맑은 고딕"/>
                           <a:ea typeface="맑은 고딕"/>
                         </a:rPr>
-                        <a:t>퇴직·파기 상태까지 한 행</a:t>
+                        <a:t>users (사원)</a:t>
                       </a:r>
                     </a:p>
                   </a:txBody>
@@ -25902,117 +25800,13 @@
                           <a:latin typeface="맑은 고딕"/>
                           <a:ea typeface="맑은 고딕"/>
                         </a:rPr>
-                        <a:t>base_days · bonus_days · use_days 잔액 3필드 (advance_days는 파생) · hire_date · last_reset_date 기산일</a:t>
-                      </a:r>
-                    </a:p>
-                    <a:p>
-                      <a:pPr algn="l">
-                        <a:lnSpc>
-                          <a:spcPct val="113000"/>
-                        </a:lnSpc>
-                        <a:spcBef>
-                          <a:spcPts val="0"/>
-                        </a:spcBef>
-                        <a:spcAft>
-                          <a:spcPts val="0"/>
-                        </a:spcAft>
-                      </a:pPr>
-                      <a:r>
-                        <a:rPr sz="1200" b="0" lang="ko-KR">
-                          <a:solidFill>
-                            <a:srgbClr val="172B49"/>
-                          </a:solidFill>
-                          <a:latin typeface="맑은 고딕"/>
-                          <a:ea typeface="맑은 고딕"/>
-                        </a:rPr>
-                        <a:t>role · onboarding_status · is_active · retired_at · purged_at · purge_hold_reason · version 낙관적 락</a:t>
+                        <a:t>계정·역할·소속과 연차 잔액, 퇴직·파기 상태</a:t>
                       </a:r>
                     </a:p>
                   </a:txBody>
                   <a:tcPr>
                     <a:solidFill>
                       <a:srgbClr val="FFFFFF"/>
-                    </a:solidFill>
-                    <a:lnL w="6350">
-                      <a:solidFill>
-                        <a:srgbClr val="F7F9FC"/>
-                      </a:solidFill>
-                    </a:lnL>
-                    <a:lnR w="6350">
-                      <a:solidFill>
-                        <a:srgbClr val="F7F9FC"/>
-                      </a:solidFill>
-                    </a:lnR>
-                    <a:lnT w="6350">
-                      <a:solidFill>
-                        <a:srgbClr val="F7F9FC"/>
-                      </a:solidFill>
-                    </a:lnT>
-                    <a:lnB w="6350">
-                      <a:solidFill>
-                        <a:srgbClr val="F7F9FC"/>
-                      </a:solidFill>
-                    </a:lnB>
-                  </a:tcPr>
-                </a:tc>
-              </a:tr>
-              <a:tr h="566928">
-                <a:tc>
-                  <a:txBody>
-                    <a:bodyPr wrap="square" anchor="ctr" lIns="82296" rIns="82296" tIns="82296" bIns="82296">
-                      <a:noAutofit/>
-                    </a:bodyPr>
-                    <a:lstStyle/>
-                    <a:p>
-                      <a:pPr algn="l">
-                        <a:lnSpc>
-                          <a:spcPct val="113000"/>
-                        </a:lnSpc>
-                        <a:spcBef>
-                          <a:spcPts val="0"/>
-                        </a:spcBef>
-                        <a:spcAft>
-                          <a:spcPts val="0"/>
-                        </a:spcAft>
-                      </a:pPr>
-                      <a:r>
-                        <a:rPr sz="1350" b="0" lang="ko-KR">
-                          <a:solidFill>
-                            <a:srgbClr val="172B49"/>
-                          </a:solidFill>
-                          <a:latin typeface="맑은 고딕"/>
-                          <a:ea typeface="맑은 고딕"/>
-                        </a:rPr>
-                        <a:t>leave_requests</a:t>
-                      </a:r>
-                    </a:p>
-                    <a:p>
-                      <a:pPr algn="l">
-                        <a:lnSpc>
-                          <a:spcPct val="113000"/>
-                        </a:lnSpc>
-                        <a:spcBef>
-                          <a:spcPts val="0"/>
-                        </a:spcBef>
-                        <a:spcAft>
-                          <a:spcPts val="0"/>
-                        </a:spcAft>
-                      </a:pPr>
-                      <a:r>
-                        <a:rPr sz="1350" b="0" lang="ko-KR">
-                          <a:solidFill>
-                            <a:srgbClr val="172B49"/>
-                          </a:solidFill>
-                          <a:latin typeface="맑은 고딕"/>
-                          <a:ea typeface="맑은 고딕"/>
-                        </a:rPr>
-                        <a:t>+ leave_dates</a:t>
-                      </a:r>
-                    </a:p>
-                  </a:txBody>
-                  <a:tcPr>
-                    <a:solidFill>
-                      <a:srgbClr val="EAF0FA"/>
                     </a:solidFill>
                     <a:lnL w="6350">
                       <a:solidFill>
@@ -26055,16 +25849,51 @@
                         </a:spcAft>
                       </a:pPr>
                       <a:r>
-                        <a:rPr sz="1250" b="0" lang="ko-KR">
+                        <a:rPr sz="1150" b="0" lang="ko-KR">
                           <a:solidFill>
                             <a:srgbClr val="172B49"/>
                           </a:solidFill>
                           <a:latin typeface="맑은 고딕"/>
                           <a:ea typeface="맑은 고딕"/>
                         </a:rPr>
-                        <a:t>연차 신청 1건과</a:t>
+                        <a:t>base_days · bonus_days · use_days (잔액) · advance_days (파생) · hire_date · last_reset_date (기산일) · role · onboarding_status · is_active · retired_at · purged_at · purge_hold_reason · version (낙관적 락)</a:t>
                       </a:r>
                     </a:p>
+                  </a:txBody>
+                  <a:tcPr>
+                    <a:solidFill>
+                      <a:srgbClr val="FFFFFF"/>
+                    </a:solidFill>
+                    <a:lnL w="6350">
+                      <a:solidFill>
+                        <a:srgbClr val="F7F9FC"/>
+                      </a:solidFill>
+                    </a:lnL>
+                    <a:lnR w="6350">
+                      <a:solidFill>
+                        <a:srgbClr val="F7F9FC"/>
+                      </a:solidFill>
+                    </a:lnR>
+                    <a:lnT w="6350">
+                      <a:solidFill>
+                        <a:srgbClr val="F7F9FC"/>
+                      </a:solidFill>
+                    </a:lnT>
+                    <a:lnB w="6350">
+                      <a:solidFill>
+                        <a:srgbClr val="F7F9FC"/>
+                      </a:solidFill>
+                    </a:lnB>
+                  </a:tcPr>
+                </a:tc>
+              </a:tr>
+              <a:tr h="457200">
+                <a:tc>
+                  <a:txBody>
+                    <a:bodyPr wrap="square" anchor="ctr" lIns="82296" rIns="82296" tIns="82296" bIns="82296">
+                      <a:noAutofit/>
+                    </a:bodyPr>
+                    <a:lstStyle/>
                     <a:p>
                       <a:pPr algn="l">
                         <a:lnSpc>
@@ -26078,14 +25907,14 @@
                         </a:spcAft>
                       </a:pPr>
                       <a:r>
-                        <a:rPr sz="1250" b="0" lang="ko-KR">
+                        <a:rPr sz="1300" b="0" lang="ko-KR">
                           <a:solidFill>
                             <a:srgbClr val="172B49"/>
                           </a:solidFill>
                           <a:latin typeface="맑은 고딕"/>
                           <a:ea typeface="맑은 고딕"/>
                         </a:rPr>
-                        <a:t>날짜별 행</a:t>
+                        <a:t>leave_requests + leave_dates</a:t>
                       </a:r>
                     </a:p>
                   </a:txBody>
@@ -26141,94 +25970,13 @@
                           <a:latin typeface="맑은 고딕"/>
                           <a:ea typeface="맑은 고딕"/>
                         </a:rPr>
-                        <a:t>status (PENDING · APPROVED · REJECTED · CANCELLED · CANCEL_PENDING) · leave_type (종일 · 오전 · 오후) · days</a:t>
-                      </a:r>
-                    </a:p>
-                    <a:p>
-                      <a:pPr algn="l">
-                        <a:lnSpc>
-                          <a:spcPct val="113000"/>
-                        </a:lnSpc>
-                        <a:spcBef>
-                          <a:spcPts val="0"/>
-                        </a:spcBef>
-                        <a:spcAft>
-                          <a:spcPts val="0"/>
-                        </a:spcAft>
-                      </a:pPr>
-                      <a:r>
-                        <a:rPr sz="1200" b="0" lang="ko-KR">
-                          <a:solidFill>
-                            <a:srgbClr val="172B49"/>
-                          </a:solidFill>
-                          <a:latin typeface="맑은 고딕"/>
-                          <a:ea typeface="맑은 고딕"/>
-                        </a:rPr>
-                        <a:t>primary_approver_id · sub_approver_id · request_reason · cancel_reason · advance_used_days · leave_dates.day</a:t>
+                        <a:t>연차 신청 1건과 날짜별 행</a:t>
                       </a:r>
                     </a:p>
                   </a:txBody>
                   <a:tcPr>
                     <a:solidFill>
                       <a:srgbClr val="EAF0FA"/>
-                    </a:solidFill>
-                    <a:lnL w="6350">
-                      <a:solidFill>
-                        <a:srgbClr val="F7F9FC"/>
-                      </a:solidFill>
-                    </a:lnL>
-                    <a:lnR w="6350">
-                      <a:solidFill>
-                        <a:srgbClr val="F7F9FC"/>
-                      </a:solidFill>
-                    </a:lnR>
-                    <a:lnT w="6350">
-                      <a:solidFill>
-                        <a:srgbClr val="F7F9FC"/>
-                      </a:solidFill>
-                    </a:lnT>
-                    <a:lnB w="6350">
-                      <a:solidFill>
-                        <a:srgbClr val="F7F9FC"/>
-                      </a:solidFill>
-                    </a:lnB>
-                  </a:tcPr>
-                </a:tc>
-              </a:tr>
-              <a:tr h="566928">
-                <a:tc>
-                  <a:txBody>
-                    <a:bodyPr wrap="square" anchor="ctr" lIns="82296" rIns="82296" tIns="82296" bIns="82296">
-                      <a:noAutofit/>
-                    </a:bodyPr>
-                    <a:lstStyle/>
-                    <a:p>
-                      <a:pPr algn="l">
-                        <a:lnSpc>
-                          <a:spcPct val="113000"/>
-                        </a:lnSpc>
-                        <a:spcBef>
-                          <a:spcPts val="0"/>
-                        </a:spcBef>
-                        <a:spcAft>
-                          <a:spcPts val="0"/>
-                        </a:spcAft>
-                      </a:pPr>
-                      <a:r>
-                        <a:rPr sz="1350" b="0" lang="ko-KR">
-                          <a:solidFill>
-                            <a:srgbClr val="172B49"/>
-                          </a:solidFill>
-                          <a:latin typeface="맑은 고딕"/>
-                          <a:ea typeface="맑은 고딕"/>
-                        </a:rPr>
-                        <a:t>welfare_requests</a:t>
-                      </a:r>
-                    </a:p>
-                  </a:txBody>
-                  <a:tcPr>
-                    <a:solidFill>
-                      <a:srgbClr val="FFFFFF"/>
                     </a:solidFill>
                     <a:lnL w="6350">
                       <a:solidFill>
@@ -26271,14 +26019,72 @@
                         </a:spcAft>
                       </a:pPr>
                       <a:r>
-                        <a:rPr sz="1250" b="0" lang="ko-KR">
+                        <a:rPr sz="1150" b="0" lang="ko-KR">
                           <a:solidFill>
                             <a:srgbClr val="172B49"/>
                           </a:solidFill>
                           <a:latin typeface="맑은 고딕"/>
                           <a:ea typeface="맑은 고딕"/>
                         </a:rPr>
-                        <a:t>복리후생 신청</a:t>
+                        <a:t>status (PENDING · APPROVED · REJECTED · CANCELLED · CANCEL_PENDING) · leave_type (종일·오전·오후) · days · primary_approver_id · sub_approver_id · request_reason · cancel_reason · advance_used_days · leave_dates.day</a:t>
+                      </a:r>
+                    </a:p>
+                  </a:txBody>
+                  <a:tcPr>
+                    <a:solidFill>
+                      <a:srgbClr val="EAF0FA"/>
+                    </a:solidFill>
+                    <a:lnL w="6350">
+                      <a:solidFill>
+                        <a:srgbClr val="F7F9FC"/>
+                      </a:solidFill>
+                    </a:lnL>
+                    <a:lnR w="6350">
+                      <a:solidFill>
+                        <a:srgbClr val="F7F9FC"/>
+                      </a:solidFill>
+                    </a:lnR>
+                    <a:lnT w="6350">
+                      <a:solidFill>
+                        <a:srgbClr val="F7F9FC"/>
+                      </a:solidFill>
+                    </a:lnT>
+                    <a:lnB w="6350">
+                      <a:solidFill>
+                        <a:srgbClr val="F7F9FC"/>
+                      </a:solidFill>
+                    </a:lnB>
+                  </a:tcPr>
+                </a:tc>
+              </a:tr>
+              <a:tr h="457200">
+                <a:tc>
+                  <a:txBody>
+                    <a:bodyPr wrap="square" anchor="ctr" lIns="82296" rIns="82296" tIns="82296" bIns="82296">
+                      <a:noAutofit/>
+                    </a:bodyPr>
+                    <a:lstStyle/>
+                    <a:p>
+                      <a:pPr algn="l">
+                        <a:lnSpc>
+                          <a:spcPct val="113000"/>
+                        </a:lnSpc>
+                        <a:spcBef>
+                          <a:spcPts val="0"/>
+                        </a:spcBef>
+                        <a:spcAft>
+                          <a:spcPts val="0"/>
+                        </a:spcAft>
+                      </a:pPr>
+                      <a:r>
+                        <a:rPr sz="1300" b="0" lang="ko-KR">
+                          <a:solidFill>
+                            <a:srgbClr val="172B49"/>
+                          </a:solidFill>
+                          <a:latin typeface="맑은 고딕"/>
+                          <a:ea typeface="맑은 고딕"/>
+                        </a:rPr>
+                        <a:t>welfare_requests</a:t>
                       </a:r>
                     </a:p>
                   </a:txBody>
@@ -26334,71 +26140,13 @@
                           <a:latin typeface="맑은 고딕"/>
                           <a:ea typeface="맑은 고딕"/>
                         </a:rPr>
-                        <a:t>policy_id · category · target · add_days (승인 시 bonus_days에 가산) · status · 승인자 2명 · reason</a:t>
+                        <a:t>복리후생 신청</a:t>
                       </a:r>
                     </a:p>
                   </a:txBody>
                   <a:tcPr>
                     <a:solidFill>
                       <a:srgbClr val="FFFFFF"/>
-                    </a:solidFill>
-                    <a:lnL w="6350">
-                      <a:solidFill>
-                        <a:srgbClr val="F7F9FC"/>
-                      </a:solidFill>
-                    </a:lnL>
-                    <a:lnR w="6350">
-                      <a:solidFill>
-                        <a:srgbClr val="F7F9FC"/>
-                      </a:solidFill>
-                    </a:lnR>
-                    <a:lnT w="6350">
-                      <a:solidFill>
-                        <a:srgbClr val="F7F9FC"/>
-                      </a:solidFill>
-                    </a:lnT>
-                    <a:lnB w="6350">
-                      <a:solidFill>
-                        <a:srgbClr val="F7F9FC"/>
-                      </a:solidFill>
-                    </a:lnB>
-                  </a:tcPr>
-                </a:tc>
-              </a:tr>
-              <a:tr h="566928">
-                <a:tc>
-                  <a:txBody>
-                    <a:bodyPr wrap="square" anchor="ctr" lIns="82296" rIns="82296" tIns="82296" bIns="82296">
-                      <a:noAutofit/>
-                    </a:bodyPr>
-                    <a:lstStyle/>
-                    <a:p>
-                      <a:pPr algn="l">
-                        <a:lnSpc>
-                          <a:spcPct val="113000"/>
-                        </a:lnSpc>
-                        <a:spcBef>
-                          <a:spcPts val="0"/>
-                        </a:spcBef>
-                        <a:spcAft>
-                          <a:spcPts val="0"/>
-                        </a:spcAft>
-                      </a:pPr>
-                      <a:r>
-                        <a:rPr sz="1350" b="0" lang="ko-KR">
-                          <a:solidFill>
-                            <a:srgbClr val="172B49"/>
-                          </a:solidFill>
-                          <a:latin typeface="맑은 고딕"/>
-                          <a:ea typeface="맑은 고딕"/>
-                        </a:rPr>
-                        <a:t>department</a:t>
-                      </a:r>
-                    </a:p>
-                  </a:txBody>
-                  <a:tcPr>
-                    <a:solidFill>
-                      <a:srgbClr val="EAF0FA"/>
                     </a:solidFill>
                     <a:lnL w="6350">
                       <a:solidFill>
@@ -26441,14 +26189,72 @@
                         </a:spcAft>
                       </a:pPr>
                       <a:r>
-                        <a:rPr sz="1250" b="0" lang="ko-KR">
+                        <a:rPr sz="1150" b="0" lang="ko-KR">
                           <a:solidFill>
                             <a:srgbClr val="172B49"/>
                           </a:solidFill>
                           <a:latin typeface="맑은 고딕"/>
                           <a:ea typeface="맑은 고딕"/>
                         </a:rPr>
-                        <a:t>부서 계층과 팀장</a:t>
+                        <a:t>policy_id · category · target · add_days (승인 시 bonus_days에 가산) · status · 승인자 2명 · reason</a:t>
+                      </a:r>
+                    </a:p>
+                  </a:txBody>
+                  <a:tcPr>
+                    <a:solidFill>
+                      <a:srgbClr val="FFFFFF"/>
+                    </a:solidFill>
+                    <a:lnL w="6350">
+                      <a:solidFill>
+                        <a:srgbClr val="F7F9FC"/>
+                      </a:solidFill>
+                    </a:lnL>
+                    <a:lnR w="6350">
+                      <a:solidFill>
+                        <a:srgbClr val="F7F9FC"/>
+                      </a:solidFill>
+                    </a:lnR>
+                    <a:lnT w="6350">
+                      <a:solidFill>
+                        <a:srgbClr val="F7F9FC"/>
+                      </a:solidFill>
+                    </a:lnT>
+                    <a:lnB w="6350">
+                      <a:solidFill>
+                        <a:srgbClr val="F7F9FC"/>
+                      </a:solidFill>
+                    </a:lnB>
+                  </a:tcPr>
+                </a:tc>
+              </a:tr>
+              <a:tr h="457200">
+                <a:tc>
+                  <a:txBody>
+                    <a:bodyPr wrap="square" anchor="ctr" lIns="82296" rIns="82296" tIns="82296" bIns="82296">
+                      <a:noAutofit/>
+                    </a:bodyPr>
+                    <a:lstStyle/>
+                    <a:p>
+                      <a:pPr algn="l">
+                        <a:lnSpc>
+                          <a:spcPct val="113000"/>
+                        </a:lnSpc>
+                        <a:spcBef>
+                          <a:spcPts val="0"/>
+                        </a:spcBef>
+                        <a:spcAft>
+                          <a:spcPts val="0"/>
+                        </a:spcAft>
+                      </a:pPr>
+                      <a:r>
+                        <a:rPr sz="1300" b="0" lang="ko-KR">
+                          <a:solidFill>
+                            <a:srgbClr val="172B49"/>
+                          </a:solidFill>
+                          <a:latin typeface="맑은 고딕"/>
+                          <a:ea typeface="맑은 고딕"/>
+                        </a:rPr>
+                        <a:t>department</a:t>
                       </a:r>
                     </a:p>
                   </a:txBody>
@@ -26504,71 +26310,13 @@
                           <a:latin typeface="맑은 고딕"/>
                           <a:ea typeface="맑은 고딕"/>
                         </a:rPr>
-                        <a:t>name · parent_id (상위 부서) · leader_id (팀장) · system_default (미배정 부서) · active</a:t>
+                        <a:t>부서 계층과 팀장</a:t>
                       </a:r>
                     </a:p>
                   </a:txBody>
                   <a:tcPr>
                     <a:solidFill>
                       <a:srgbClr val="EAF0FA"/>
-                    </a:solidFill>
-                    <a:lnL w="6350">
-                      <a:solidFill>
-                        <a:srgbClr val="F7F9FC"/>
-                      </a:solidFill>
-                    </a:lnL>
-                    <a:lnR w="6350">
-                      <a:solidFill>
-                        <a:srgbClr val="F7F9FC"/>
-                      </a:solidFill>
-                    </a:lnR>
-                    <a:lnT w="6350">
-                      <a:solidFill>
-                        <a:srgbClr val="F7F9FC"/>
-                      </a:solidFill>
-                    </a:lnT>
-                    <a:lnB w="6350">
-                      <a:solidFill>
-                        <a:srgbClr val="F7F9FC"/>
-                      </a:solidFill>
-                    </a:lnB>
-                  </a:tcPr>
-                </a:tc>
-              </a:tr>
-              <a:tr h="566928">
-                <a:tc>
-                  <a:txBody>
-                    <a:bodyPr wrap="square" anchor="ctr" lIns="82296" rIns="82296" tIns="82296" bIns="82296">
-                      <a:noAutofit/>
-                    </a:bodyPr>
-                    <a:lstStyle/>
-                    <a:p>
-                      <a:pPr algn="l">
-                        <a:lnSpc>
-                          <a:spcPct val="113000"/>
-                        </a:lnSpc>
-                        <a:spcBef>
-                          <a:spcPts val="0"/>
-                        </a:spcBef>
-                        <a:spcAft>
-                          <a:spcPts val="0"/>
-                        </a:spcAft>
-                      </a:pPr>
-                      <a:r>
-                        <a:rPr sz="1350" b="0" lang="ko-KR">
-                          <a:solidFill>
-                            <a:srgbClr val="172B49"/>
-                          </a:solidFill>
-                          <a:latin typeface="맑은 고딕"/>
-                          <a:ea typeface="맑은 고딕"/>
-                        </a:rPr>
-                        <a:t>email_history</a:t>
-                      </a:r>
-                    </a:p>
-                  </a:txBody>
-                  <a:tcPr>
-                    <a:solidFill>
-                      <a:srgbClr val="FFFFFF"/>
                     </a:solidFill>
                     <a:lnL w="6350">
                       <a:solidFill>
@@ -26611,14 +26359,72 @@
                         </a:spcAft>
                       </a:pPr>
                       <a:r>
-                        <a:rPr sz="1250" b="0" lang="ko-KR">
+                        <a:rPr sz="1150" b="0" lang="ko-KR">
                           <a:solidFill>
                             <a:srgbClr val="172B49"/>
                           </a:solidFill>
                           <a:latin typeface="맑은 고딕"/>
                           <a:ea typeface="맑은 고딕"/>
                         </a:rPr>
-                        <a:t>발송 큐이자 이력</a:t>
+                        <a:t>name · parent_id (상위 부서) · leader_id (팀장) · system_default (미배정 부서) · active</a:t>
+                      </a:r>
+                    </a:p>
+                  </a:txBody>
+                  <a:tcPr>
+                    <a:solidFill>
+                      <a:srgbClr val="EAF0FA"/>
+                    </a:solidFill>
+                    <a:lnL w="6350">
+                      <a:solidFill>
+                        <a:srgbClr val="F7F9FC"/>
+                      </a:solidFill>
+                    </a:lnL>
+                    <a:lnR w="6350">
+                      <a:solidFill>
+                        <a:srgbClr val="F7F9FC"/>
+                      </a:solidFill>
+                    </a:lnR>
+                    <a:lnT w="6350">
+                      <a:solidFill>
+                        <a:srgbClr val="F7F9FC"/>
+                      </a:solidFill>
+                    </a:lnT>
+                    <a:lnB w="6350">
+                      <a:solidFill>
+                        <a:srgbClr val="F7F9FC"/>
+                      </a:solidFill>
+                    </a:lnB>
+                  </a:tcPr>
+                </a:tc>
+              </a:tr>
+              <a:tr h="457200">
+                <a:tc>
+                  <a:txBody>
+                    <a:bodyPr wrap="square" anchor="ctr" lIns="82296" rIns="82296" tIns="82296" bIns="82296">
+                      <a:noAutofit/>
+                    </a:bodyPr>
+                    <a:lstStyle/>
+                    <a:p>
+                      <a:pPr algn="l">
+                        <a:lnSpc>
+                          <a:spcPct val="113000"/>
+                        </a:lnSpc>
+                        <a:spcBef>
+                          <a:spcPts val="0"/>
+                        </a:spcBef>
+                        <a:spcAft>
+                          <a:spcPts val="0"/>
+                        </a:spcAft>
+                      </a:pPr>
+                      <a:r>
+                        <a:rPr sz="1300" b="0" lang="ko-KR">
+                          <a:solidFill>
+                            <a:srgbClr val="172B49"/>
+                          </a:solidFill>
+                          <a:latin typeface="맑은 고딕"/>
+                          <a:ea typeface="맑은 고딕"/>
+                        </a:rPr>
+                        <a:t>email_history</a:t>
                       </a:r>
                     </a:p>
                   </a:txBody>
@@ -26674,94 +26480,13 @@
                           <a:latin typeface="맑은 고딕"/>
                           <a:ea typeface="맑은 고딕"/>
                         </a:rPr>
-                        <a:t>email_type · status (PENDING · SENDING · SENT · FAILED) · retry_count · sending_at · sent_at · error_message</a:t>
-                      </a:r>
-                    </a:p>
-                    <a:p>
-                      <a:pPr algn="l">
-                        <a:lnSpc>
-                          <a:spcPct val="113000"/>
-                        </a:lnSpc>
-                        <a:spcBef>
-                          <a:spcPts val="0"/>
-                        </a:spcBef>
-                        <a:spcAft>
-                          <a:spcPts val="0"/>
-                        </a:spcAft>
-                      </a:pPr>
-                      <a:r>
-                        <a:rPr sz="1200" b="0" lang="ko-KR">
-                          <a:solidFill>
-                            <a:srgbClr val="172B49"/>
-                          </a:solidFill>
-                          <a:latin typeface="맑은 고딕"/>
-                          <a:ea typeface="맑은 고딕"/>
-                        </a:rPr>
-                        <a:t>title · content (보낸 HTML 원문 보관)</a:t>
+                        <a:t>발송 큐이자 이력</a:t>
                       </a:r>
                     </a:p>
                   </a:txBody>
                   <a:tcPr>
                     <a:solidFill>
                       <a:srgbClr val="FFFFFF"/>
-                    </a:solidFill>
-                    <a:lnL w="6350">
-                      <a:solidFill>
-                        <a:srgbClr val="F7F9FC"/>
-                      </a:solidFill>
-                    </a:lnL>
-                    <a:lnR w="6350">
-                      <a:solidFill>
-                        <a:srgbClr val="F7F9FC"/>
-                      </a:solidFill>
-                    </a:lnR>
-                    <a:lnT w="6350">
-                      <a:solidFill>
-                        <a:srgbClr val="F7F9FC"/>
-                      </a:solidFill>
-                    </a:lnT>
-                    <a:lnB w="6350">
-                      <a:solidFill>
-                        <a:srgbClr val="F7F9FC"/>
-                      </a:solidFill>
-                    </a:lnB>
-                  </a:tcPr>
-                </a:tc>
-              </a:tr>
-              <a:tr h="566928">
-                <a:tc>
-                  <a:txBody>
-                    <a:bodyPr wrap="square" anchor="ctr" lIns="82296" rIns="82296" tIns="82296" bIns="82296">
-                      <a:noAutofit/>
-                    </a:bodyPr>
-                    <a:lstStyle/>
-                    <a:p>
-                      <a:pPr algn="l">
-                        <a:lnSpc>
-                          <a:spcPct val="113000"/>
-                        </a:lnSpc>
-                        <a:spcBef>
-                          <a:spcPts val="0"/>
-                        </a:spcBef>
-                        <a:spcAft>
-                          <a:spcPts val="0"/>
-                        </a:spcAft>
-                      </a:pPr>
-                      <a:r>
-                        <a:rPr sz="1350" b="0" lang="ko-KR">
-                          <a:solidFill>
-                            <a:srgbClr val="172B49"/>
-                          </a:solidFill>
-                          <a:latin typeface="맑은 고딕"/>
-                          <a:ea typeface="맑은 고딕"/>
-                        </a:rPr>
-                        <a:t>admin_audit_log</a:t>
-                      </a:r>
-                    </a:p>
-                  </a:txBody>
-                  <a:tcPr>
-                    <a:solidFill>
-                      <a:srgbClr val="EAF0FA"/>
                     </a:solidFill>
                     <a:lnL w="6350">
                       <a:solidFill>
@@ -26804,14 +26529,72 @@
                         </a:spcAft>
                       </a:pPr>
                       <a:r>
-                        <a:rPr sz="1250" b="0" lang="ko-KR">
+                        <a:rPr sz="1150" b="0" lang="ko-KR">
                           <a:solidFill>
                             <a:srgbClr val="172B49"/>
                           </a:solidFill>
                           <a:latin typeface="맑은 고딕"/>
                           <a:ea typeface="맑은 고딕"/>
                         </a:rPr>
-                        <a:t>관리자 조작 기록</a:t>
+                        <a:t>email_type · status (PENDING · SENDING · SENT · FAILED) · retry_count · sending_at · sent_at · error_message · title · content (보낸 HTML 원문)</a:t>
+                      </a:r>
+                    </a:p>
+                  </a:txBody>
+                  <a:tcPr>
+                    <a:solidFill>
+                      <a:srgbClr val="FFFFFF"/>
+                    </a:solidFill>
+                    <a:lnL w="6350">
+                      <a:solidFill>
+                        <a:srgbClr val="F7F9FC"/>
+                      </a:solidFill>
+                    </a:lnL>
+                    <a:lnR w="6350">
+                      <a:solidFill>
+                        <a:srgbClr val="F7F9FC"/>
+                      </a:solidFill>
+                    </a:lnR>
+                    <a:lnT w="6350">
+                      <a:solidFill>
+                        <a:srgbClr val="F7F9FC"/>
+                      </a:solidFill>
+                    </a:lnT>
+                    <a:lnB w="6350">
+                      <a:solidFill>
+                        <a:srgbClr val="F7F9FC"/>
+                      </a:solidFill>
+                    </a:lnB>
+                  </a:tcPr>
+                </a:tc>
+              </a:tr>
+              <a:tr h="457200">
+                <a:tc>
+                  <a:txBody>
+                    <a:bodyPr wrap="square" anchor="ctr" lIns="82296" rIns="82296" tIns="82296" bIns="82296">
+                      <a:noAutofit/>
+                    </a:bodyPr>
+                    <a:lstStyle/>
+                    <a:p>
+                      <a:pPr algn="l">
+                        <a:lnSpc>
+                          <a:spcPct val="113000"/>
+                        </a:lnSpc>
+                        <a:spcBef>
+                          <a:spcPts val="0"/>
+                        </a:spcBef>
+                        <a:spcAft>
+                          <a:spcPts val="0"/>
+                        </a:spcAft>
+                      </a:pPr>
+                      <a:r>
+                        <a:rPr sz="1300" b="0" lang="ko-KR">
+                          <a:solidFill>
+                            <a:srgbClr val="172B49"/>
+                          </a:solidFill>
+                          <a:latin typeface="맑은 고딕"/>
+                          <a:ea typeface="맑은 고딕"/>
+                        </a:rPr>
+                        <a:t>admin_audit_log</a:t>
                       </a:r>
                     </a:p>
                   </a:txBody>
@@ -26867,6 +26650,62 @@
                           <a:latin typeface="맑은 고딕"/>
                           <a:ea typeface="맑은 고딕"/>
                         </a:rPr>
+                        <a:t>관리자 조작 기록</a:t>
+                      </a:r>
+                    </a:p>
+                  </a:txBody>
+                  <a:tcPr>
+                    <a:solidFill>
+                      <a:srgbClr val="EAF0FA"/>
+                    </a:solidFill>
+                    <a:lnL w="6350">
+                      <a:solidFill>
+                        <a:srgbClr val="F7F9FC"/>
+                      </a:solidFill>
+                    </a:lnL>
+                    <a:lnR w="6350">
+                      <a:solidFill>
+                        <a:srgbClr val="F7F9FC"/>
+                      </a:solidFill>
+                    </a:lnR>
+                    <a:lnT w="6350">
+                      <a:solidFill>
+                        <a:srgbClr val="F7F9FC"/>
+                      </a:solidFill>
+                    </a:lnT>
+                    <a:lnB w="6350">
+                      <a:solidFill>
+                        <a:srgbClr val="F7F9FC"/>
+                      </a:solidFill>
+                    </a:lnB>
+                  </a:tcPr>
+                </a:tc>
+                <a:tc>
+                  <a:txBody>
+                    <a:bodyPr wrap="square" anchor="ctr" lIns="82296" rIns="82296" tIns="82296" bIns="82296">
+                      <a:noAutofit/>
+                    </a:bodyPr>
+                    <a:lstStyle/>
+                    <a:p>
+                      <a:pPr algn="l">
+                        <a:lnSpc>
+                          <a:spcPct val="113000"/>
+                        </a:lnSpc>
+                        <a:spcBef>
+                          <a:spcPts val="0"/>
+                        </a:spcBef>
+                        <a:spcAft>
+                          <a:spcPts val="0"/>
+                        </a:spcAft>
+                      </a:pPr>
+                      <a:r>
+                        <a:rPr sz="1150" b="0" lang="ko-KR">
+                          <a:solidFill>
+                            <a:srgbClr val="172B49"/>
+                          </a:solidFill>
+                          <a:latin typeface="맑은 고딕"/>
+                          <a:ea typeface="맑은 고딕"/>
+                        </a:rPr>
                         <a:t>actor_id 누가 · action 13종 · target_user_id · target_label 누구에게 · before_value · after_value</a:t>
                       </a:r>
                     </a:p>
@@ -26902,52 +26741,6 @@
           </a:graphicData>
         </a:graphic>
       </p:graphicFrame>
-      <p:sp>
-        <p:nvSpPr>
-          <p:cNvPr id="6" name="TextBox 5"/>
-          <p:cNvSpPr txBox="1"/>
-          <p:nvPr/>
-        </p:nvSpPr>
-        <p:spPr>
-          <a:xfrm>
-            <a:off x="621792" y="6062472"/>
-            <a:ext cx="10927080" cy="365760"/>
-          </a:xfrm>
-          <a:prstGeom prst="rect">
-            <a:avLst/>
-          </a:prstGeom>
-          <a:noFill/>
-        </p:spPr>
-        <p:txBody>
-          <a:bodyPr wrap="square" anchor="t" lIns="0" rIns="0" tIns="0" bIns="0">
-            <a:noAutofit/>
-          </a:bodyPr>
-          <a:lstStyle/>
-          <a:p>
-            <a:pPr algn="l">
-              <a:lnSpc>
-                <a:spcPct val="113000"/>
-              </a:lnSpc>
-              <a:spcBef>
-                <a:spcPts val="0"/>
-              </a:spcBef>
-              <a:spcAft>
-                <a:spcPts val="0"/>
-              </a:spcAft>
-            </a:pPr>
-            <a:r>
-              <a:rPr sz="1300" b="0" lang="ko-KR">
-                <a:solidFill>
-                  <a:srgbClr val="53657D"/>
-                </a:solidFill>
-                <a:latin typeface="맑은 고딕"/>
-                <a:ea typeface="맑은 고딕"/>
-              </a:rPr>
-              <a:t>승인자 2명(기본·서브)은 연차와 복리후생이 같은 방식으로 갖습니다. 처리 이력은 별도 *_action_history 테이블에 쌓입니다.</a:t>
-            </a:r>
-          </a:p>
-        </p:txBody>
-      </p:sp>
     </p:spTree>
   </p:cSld>
   <p:clrMapOvr>

--- a/docs/발표자료/연차ON-프로젝트-소개-2026-09-11.pptx
+++ b/docs/발표자료/연차ON-프로젝트-소개-2026-09-11.pptx
@@ -5200,7 +5200,7 @@
                 <a:latin typeface="맑은 고딕"/>
                 <a:ea typeface="맑은 고딕"/>
               </a:rPr>
-              <a:t>관리 시스템 V2</a:t>
+              <a:t>관리 시스템</a:t>
             </a:r>
           </a:p>
         </p:txBody>

--- a/docs/발표자료/연차ON-프로젝트-소개-2026-09-11.pptx
+++ b/docs/발표자료/연차ON-프로젝트-소개-2026-09-11.pptx
@@ -11321,7 +11321,7 @@
         </p:nvGraphicFramePr>
         <p:xfrm>
           <a:off x="621792" y="2304288"/>
-          <a:ext cx="5340096" cy="3337560"/>
+          <a:ext cx="5340096" cy="3369564"/>
         </p:xfrm>
         <a:graphic>
           <a:graphicData uri="http://schemas.openxmlformats.org/drawingml/2006/table">
@@ -11333,10 +11333,10 @@
                 <a:gridCol w="2798064"/>
                 <a:gridCol w="2542032"/>
               </a:tblGrid>
-              <a:tr h="333756">
+              <a:tr h="365760">
                 <a:tc>
                   <a:txBody>
-                    <a:bodyPr wrap="square" anchor="ctr" lIns="82296" rIns="82296" tIns="82296" bIns="82296">
+                    <a:bodyPr wrap="square" anchor="ctr" lIns="0" rIns="0" tIns="0" bIns="0">
                       <a:noAutofit/>
                     </a:bodyPr>
                     <a:lstStyle/>
@@ -11364,7 +11364,7 @@
                       </a:r>
                     </a:p>
                   </a:txBody>
-                  <a:tcPr>
+                  <a:tcPr anchor="ctr" marL="109728" marR="109728" marT="45720" marB="45720">
                     <a:solidFill>
                       <a:srgbClr val="0D203D"/>
                     </a:solidFill>
@@ -11392,7 +11392,7 @@
                 </a:tc>
                 <a:tc>
                   <a:txBody>
-                    <a:bodyPr wrap="square" anchor="ctr" lIns="82296" rIns="82296" tIns="82296" bIns="82296">
+                    <a:bodyPr wrap="square" anchor="ctr" lIns="0" rIns="0" tIns="0" bIns="0">
                       <a:noAutofit/>
                     </a:bodyPr>
                     <a:lstStyle/>
@@ -11420,7 +11420,7 @@
                       </a:r>
                     </a:p>
                   </a:txBody>
-                  <a:tcPr>
+                  <a:tcPr anchor="ctr" marL="109728" marR="109728" marT="45720" marB="45720">
                     <a:solidFill>
                       <a:srgbClr val="0D203D"/>
                     </a:solidFill>
@@ -11450,7 +11450,7 @@
               <a:tr h="333756">
                 <a:tc>
                   <a:txBody>
-                    <a:bodyPr wrap="square" anchor="ctr" lIns="82296" rIns="82296" tIns="82296" bIns="82296">
+                    <a:bodyPr wrap="square" anchor="ctr" lIns="0" rIns="0" tIns="0" bIns="0">
                       <a:noAutofit/>
                     </a:bodyPr>
                     <a:lstStyle/>
@@ -11478,7 +11478,7 @@
                       </a:r>
                     </a:p>
                   </a:txBody>
-                  <a:tcPr>
+                  <a:tcPr anchor="ctr" marL="109728" marR="109728" marT="45720" marB="45720">
                     <a:solidFill>
                       <a:srgbClr val="FFFFFF"/>
                     </a:solidFill>
@@ -11506,7 +11506,7 @@
                 </a:tc>
                 <a:tc>
                   <a:txBody>
-                    <a:bodyPr wrap="square" anchor="ctr" lIns="82296" rIns="82296" tIns="82296" bIns="82296">
+                    <a:bodyPr wrap="square" anchor="ctr" lIns="0" rIns="0" tIns="0" bIns="0">
                       <a:noAutofit/>
                     </a:bodyPr>
                     <a:lstStyle/>
@@ -11534,7 +11534,7 @@
                       </a:r>
                     </a:p>
                   </a:txBody>
-                  <a:tcPr>
+                  <a:tcPr anchor="ctr" marL="109728" marR="109728" marT="45720" marB="45720">
                     <a:solidFill>
                       <a:srgbClr val="FFFFFF"/>
                     </a:solidFill>
@@ -11564,7 +11564,7 @@
               <a:tr h="333756">
                 <a:tc>
                   <a:txBody>
-                    <a:bodyPr wrap="square" anchor="ctr" lIns="82296" rIns="82296" tIns="82296" bIns="82296">
+                    <a:bodyPr wrap="square" anchor="ctr" lIns="0" rIns="0" tIns="0" bIns="0">
                       <a:noAutofit/>
                     </a:bodyPr>
                     <a:lstStyle/>
@@ -11592,7 +11592,7 @@
                       </a:r>
                     </a:p>
                   </a:txBody>
-                  <a:tcPr>
+                  <a:tcPr anchor="ctr" marL="109728" marR="109728" marT="45720" marB="45720">
                     <a:solidFill>
                       <a:srgbClr val="EAF0FA"/>
                     </a:solidFill>
@@ -11620,7 +11620,7 @@
                 </a:tc>
                 <a:tc>
                   <a:txBody>
-                    <a:bodyPr wrap="square" anchor="ctr" lIns="82296" rIns="82296" tIns="82296" bIns="82296">
+                    <a:bodyPr wrap="square" anchor="ctr" lIns="0" rIns="0" tIns="0" bIns="0">
                       <a:noAutofit/>
                     </a:bodyPr>
                     <a:lstStyle/>
@@ -11648,7 +11648,7 @@
                       </a:r>
                     </a:p>
                   </a:txBody>
-                  <a:tcPr>
+                  <a:tcPr anchor="ctr" marL="109728" marR="109728" marT="45720" marB="45720">
                     <a:solidFill>
                       <a:srgbClr val="EAF0FA"/>
                     </a:solidFill>
@@ -11678,7 +11678,7 @@
               <a:tr h="333756">
                 <a:tc>
                   <a:txBody>
-                    <a:bodyPr wrap="square" anchor="ctr" lIns="82296" rIns="82296" tIns="82296" bIns="82296">
+                    <a:bodyPr wrap="square" anchor="ctr" lIns="0" rIns="0" tIns="0" bIns="0">
                       <a:noAutofit/>
                     </a:bodyPr>
                     <a:lstStyle/>
@@ -11706,7 +11706,7 @@
                       </a:r>
                     </a:p>
                   </a:txBody>
-                  <a:tcPr>
+                  <a:tcPr anchor="ctr" marL="109728" marR="109728" marT="45720" marB="45720">
                     <a:solidFill>
                       <a:srgbClr val="FFFFFF"/>
                     </a:solidFill>
@@ -11734,7 +11734,7 @@
                 </a:tc>
                 <a:tc>
                   <a:txBody>
-                    <a:bodyPr wrap="square" anchor="ctr" lIns="82296" rIns="82296" tIns="82296" bIns="82296">
+                    <a:bodyPr wrap="square" anchor="ctr" lIns="0" rIns="0" tIns="0" bIns="0">
                       <a:noAutofit/>
                     </a:bodyPr>
                     <a:lstStyle/>
@@ -11762,7 +11762,7 @@
                       </a:r>
                     </a:p>
                   </a:txBody>
-                  <a:tcPr>
+                  <a:tcPr anchor="ctr" marL="109728" marR="109728" marT="45720" marB="45720">
                     <a:solidFill>
                       <a:srgbClr val="FFFFFF"/>
                     </a:solidFill>
@@ -11792,7 +11792,7 @@
               <a:tr h="333756">
                 <a:tc>
                   <a:txBody>
-                    <a:bodyPr wrap="square" anchor="ctr" lIns="82296" rIns="82296" tIns="82296" bIns="82296">
+                    <a:bodyPr wrap="square" anchor="ctr" lIns="0" rIns="0" tIns="0" bIns="0">
                       <a:noAutofit/>
                     </a:bodyPr>
                     <a:lstStyle/>
@@ -11820,7 +11820,7 @@
                       </a:r>
                     </a:p>
                   </a:txBody>
-                  <a:tcPr>
+                  <a:tcPr anchor="ctr" marL="109728" marR="109728" marT="45720" marB="45720">
                     <a:solidFill>
                       <a:srgbClr val="EAF0FA"/>
                     </a:solidFill>
@@ -11848,7 +11848,7 @@
                 </a:tc>
                 <a:tc>
                   <a:txBody>
-                    <a:bodyPr wrap="square" anchor="ctr" lIns="82296" rIns="82296" tIns="82296" bIns="82296">
+                    <a:bodyPr wrap="square" anchor="ctr" lIns="0" rIns="0" tIns="0" bIns="0">
                       <a:noAutofit/>
                     </a:bodyPr>
                     <a:lstStyle/>
@@ -11876,7 +11876,7 @@
                       </a:r>
                     </a:p>
                   </a:txBody>
-                  <a:tcPr>
+                  <a:tcPr anchor="ctr" marL="109728" marR="109728" marT="45720" marB="45720">
                     <a:solidFill>
                       <a:srgbClr val="EAF0FA"/>
                     </a:solidFill>
@@ -11906,7 +11906,7 @@
               <a:tr h="333756">
                 <a:tc>
                   <a:txBody>
-                    <a:bodyPr wrap="square" anchor="ctr" lIns="82296" rIns="82296" tIns="82296" bIns="82296">
+                    <a:bodyPr wrap="square" anchor="ctr" lIns="0" rIns="0" tIns="0" bIns="0">
                       <a:noAutofit/>
                     </a:bodyPr>
                     <a:lstStyle/>
@@ -11934,7 +11934,7 @@
                       </a:r>
                     </a:p>
                   </a:txBody>
-                  <a:tcPr>
+                  <a:tcPr anchor="ctr" marL="109728" marR="109728" marT="45720" marB="45720">
                     <a:solidFill>
                       <a:srgbClr val="FFFFFF"/>
                     </a:solidFill>
@@ -11962,7 +11962,7 @@
                 </a:tc>
                 <a:tc>
                   <a:txBody>
-                    <a:bodyPr wrap="square" anchor="ctr" lIns="82296" rIns="82296" tIns="82296" bIns="82296">
+                    <a:bodyPr wrap="square" anchor="ctr" lIns="0" rIns="0" tIns="0" bIns="0">
                       <a:noAutofit/>
                     </a:bodyPr>
                     <a:lstStyle/>
@@ -11990,7 +11990,7 @@
                       </a:r>
                     </a:p>
                   </a:txBody>
-                  <a:tcPr>
+                  <a:tcPr anchor="ctr" marL="109728" marR="109728" marT="45720" marB="45720">
                     <a:solidFill>
                       <a:srgbClr val="FFFFFF"/>
                     </a:solidFill>
@@ -12020,7 +12020,7 @@
               <a:tr h="333756">
                 <a:tc>
                   <a:txBody>
-                    <a:bodyPr wrap="square" anchor="ctr" lIns="82296" rIns="82296" tIns="82296" bIns="82296">
+                    <a:bodyPr wrap="square" anchor="ctr" lIns="0" rIns="0" tIns="0" bIns="0">
                       <a:noAutofit/>
                     </a:bodyPr>
                     <a:lstStyle/>
@@ -12048,7 +12048,7 @@
                       </a:r>
                     </a:p>
                   </a:txBody>
-                  <a:tcPr>
+                  <a:tcPr anchor="ctr" marL="109728" marR="109728" marT="45720" marB="45720">
                     <a:solidFill>
                       <a:srgbClr val="EAF0FA"/>
                     </a:solidFill>
@@ -12076,7 +12076,7 @@
                 </a:tc>
                 <a:tc>
                   <a:txBody>
-                    <a:bodyPr wrap="square" anchor="ctr" lIns="82296" rIns="82296" tIns="82296" bIns="82296">
+                    <a:bodyPr wrap="square" anchor="ctr" lIns="0" rIns="0" tIns="0" bIns="0">
                       <a:noAutofit/>
                     </a:bodyPr>
                     <a:lstStyle/>
@@ -12104,7 +12104,7 @@
                       </a:r>
                     </a:p>
                   </a:txBody>
-                  <a:tcPr>
+                  <a:tcPr anchor="ctr" marL="109728" marR="109728" marT="45720" marB="45720">
                     <a:solidFill>
                       <a:srgbClr val="EAF0FA"/>
                     </a:solidFill>
@@ -12134,7 +12134,7 @@
               <a:tr h="333756">
                 <a:tc>
                   <a:txBody>
-                    <a:bodyPr wrap="square" anchor="ctr" lIns="82296" rIns="82296" tIns="82296" bIns="82296">
+                    <a:bodyPr wrap="square" anchor="ctr" lIns="0" rIns="0" tIns="0" bIns="0">
                       <a:noAutofit/>
                     </a:bodyPr>
                     <a:lstStyle/>
@@ -12162,7 +12162,7 @@
                       </a:r>
                     </a:p>
                   </a:txBody>
-                  <a:tcPr>
+                  <a:tcPr anchor="ctr" marL="109728" marR="109728" marT="45720" marB="45720">
                     <a:solidFill>
                       <a:srgbClr val="FFFFFF"/>
                     </a:solidFill>
@@ -12190,7 +12190,7 @@
                 </a:tc>
                 <a:tc>
                   <a:txBody>
-                    <a:bodyPr wrap="square" anchor="ctr" lIns="82296" rIns="82296" tIns="82296" bIns="82296">
+                    <a:bodyPr wrap="square" anchor="ctr" lIns="0" rIns="0" tIns="0" bIns="0">
                       <a:noAutofit/>
                     </a:bodyPr>
                     <a:lstStyle/>
@@ -12218,7 +12218,7 @@
                       </a:r>
                     </a:p>
                   </a:txBody>
-                  <a:tcPr>
+                  <a:tcPr anchor="ctr" marL="109728" marR="109728" marT="45720" marB="45720">
                     <a:solidFill>
                       <a:srgbClr val="FFFFFF"/>
                     </a:solidFill>
@@ -12248,7 +12248,7 @@
               <a:tr h="333756">
                 <a:tc>
                   <a:txBody>
-                    <a:bodyPr wrap="square" anchor="ctr" lIns="82296" rIns="82296" tIns="82296" bIns="82296">
+                    <a:bodyPr wrap="square" anchor="ctr" lIns="0" rIns="0" tIns="0" bIns="0">
                       <a:noAutofit/>
                     </a:bodyPr>
                     <a:lstStyle/>
@@ -12276,7 +12276,7 @@
                       </a:r>
                     </a:p>
                   </a:txBody>
-                  <a:tcPr>
+                  <a:tcPr anchor="ctr" marL="109728" marR="109728" marT="45720" marB="45720">
                     <a:solidFill>
                       <a:srgbClr val="EAF0FA"/>
                     </a:solidFill>
@@ -12304,7 +12304,7 @@
                 </a:tc>
                 <a:tc>
                   <a:txBody>
-                    <a:bodyPr wrap="square" anchor="ctr" lIns="82296" rIns="82296" tIns="82296" bIns="82296">
+                    <a:bodyPr wrap="square" anchor="ctr" lIns="0" rIns="0" tIns="0" bIns="0">
                       <a:noAutofit/>
                     </a:bodyPr>
                     <a:lstStyle/>
@@ -12332,7 +12332,7 @@
                       </a:r>
                     </a:p>
                   </a:txBody>
-                  <a:tcPr>
+                  <a:tcPr anchor="ctr" marL="109728" marR="109728" marT="45720" marB="45720">
                     <a:solidFill>
                       <a:srgbClr val="EAF0FA"/>
                     </a:solidFill>
@@ -12362,7 +12362,7 @@
               <a:tr h="333756">
                 <a:tc>
                   <a:txBody>
-                    <a:bodyPr wrap="square" anchor="ctr" lIns="82296" rIns="82296" tIns="82296" bIns="82296">
+                    <a:bodyPr wrap="square" anchor="ctr" lIns="0" rIns="0" tIns="0" bIns="0">
                       <a:noAutofit/>
                     </a:bodyPr>
                     <a:lstStyle/>
@@ -12390,7 +12390,7 @@
                       </a:r>
                     </a:p>
                   </a:txBody>
-                  <a:tcPr>
+                  <a:tcPr anchor="ctr" marL="109728" marR="109728" marT="45720" marB="45720">
                     <a:solidFill>
                       <a:srgbClr val="FFFFFF"/>
                     </a:solidFill>
@@ -12418,7 +12418,7 @@
                 </a:tc>
                 <a:tc>
                   <a:txBody>
-                    <a:bodyPr wrap="square" anchor="ctr" lIns="82296" rIns="82296" tIns="82296" bIns="82296">
+                    <a:bodyPr wrap="square" anchor="ctr" lIns="0" rIns="0" tIns="0" bIns="0">
                       <a:noAutofit/>
                     </a:bodyPr>
                     <a:lstStyle/>
@@ -12446,7 +12446,7 @@
                       </a:r>
                     </a:p>
                   </a:txBody>
-                  <a:tcPr>
+                  <a:tcPr anchor="ctr" marL="109728" marR="109728" marT="45720" marB="45720">
                     <a:solidFill>
                       <a:srgbClr val="FFFFFF"/>
                     </a:solidFill>
@@ -12487,7 +12487,7 @@
         </p:nvGraphicFramePr>
         <p:xfrm>
           <a:off x="6272784" y="2304288"/>
-          <a:ext cx="5285232" cy="3337560"/>
+          <a:ext cx="5285232" cy="3369564"/>
         </p:xfrm>
         <a:graphic>
           <a:graphicData uri="http://schemas.openxmlformats.org/drawingml/2006/table">
@@ -12499,10 +12499,10 @@
                 <a:gridCol w="2880360"/>
                 <a:gridCol w="2404872"/>
               </a:tblGrid>
-              <a:tr h="333756">
+              <a:tr h="365760">
                 <a:tc>
                   <a:txBody>
-                    <a:bodyPr wrap="square" anchor="ctr" lIns="82296" rIns="82296" tIns="82296" bIns="82296">
+                    <a:bodyPr wrap="square" anchor="ctr" lIns="0" rIns="0" tIns="0" bIns="0">
                       <a:noAutofit/>
                     </a:bodyPr>
                     <a:lstStyle/>
@@ -12530,7 +12530,7 @@
                       </a:r>
                     </a:p>
                   </a:txBody>
-                  <a:tcPr>
+                  <a:tcPr anchor="ctr" marL="109728" marR="109728" marT="45720" marB="45720">
                     <a:solidFill>
                       <a:srgbClr val="0D203D"/>
                     </a:solidFill>
@@ -12558,7 +12558,7 @@
                 </a:tc>
                 <a:tc>
                   <a:txBody>
-                    <a:bodyPr wrap="square" anchor="ctr" lIns="82296" rIns="82296" tIns="82296" bIns="82296">
+                    <a:bodyPr wrap="square" anchor="ctr" lIns="0" rIns="0" tIns="0" bIns="0">
                       <a:noAutofit/>
                     </a:bodyPr>
                     <a:lstStyle/>
@@ -12586,7 +12586,7 @@
                       </a:r>
                     </a:p>
                   </a:txBody>
-                  <a:tcPr>
+                  <a:tcPr anchor="ctr" marL="109728" marR="109728" marT="45720" marB="45720">
                     <a:solidFill>
                       <a:srgbClr val="0D203D"/>
                     </a:solidFill>
@@ -12616,7 +12616,7 @@
               <a:tr h="333756">
                 <a:tc>
                   <a:txBody>
-                    <a:bodyPr wrap="square" anchor="ctr" lIns="82296" rIns="82296" tIns="82296" bIns="82296">
+                    <a:bodyPr wrap="square" anchor="ctr" lIns="0" rIns="0" tIns="0" bIns="0">
                       <a:noAutofit/>
                     </a:bodyPr>
                     <a:lstStyle/>
@@ -12644,7 +12644,7 @@
                       </a:r>
                     </a:p>
                   </a:txBody>
-                  <a:tcPr>
+                  <a:tcPr anchor="ctr" marL="109728" marR="109728" marT="45720" marB="45720">
                     <a:solidFill>
                       <a:srgbClr val="FFFFFF"/>
                     </a:solidFill>
@@ -12672,7 +12672,7 @@
                 </a:tc>
                 <a:tc>
                   <a:txBody>
-                    <a:bodyPr wrap="square" anchor="ctr" lIns="82296" rIns="82296" tIns="82296" bIns="82296">
+                    <a:bodyPr wrap="square" anchor="ctr" lIns="0" rIns="0" tIns="0" bIns="0">
                       <a:noAutofit/>
                     </a:bodyPr>
                     <a:lstStyle/>
@@ -12700,7 +12700,7 @@
                       </a:r>
                     </a:p>
                   </a:txBody>
-                  <a:tcPr>
+                  <a:tcPr anchor="ctr" marL="109728" marR="109728" marT="45720" marB="45720">
                     <a:solidFill>
                       <a:srgbClr val="FFFFFF"/>
                     </a:solidFill>
@@ -12730,7 +12730,7 @@
               <a:tr h="333756">
                 <a:tc>
                   <a:txBody>
-                    <a:bodyPr wrap="square" anchor="ctr" lIns="82296" rIns="82296" tIns="82296" bIns="82296">
+                    <a:bodyPr wrap="square" anchor="ctr" lIns="0" rIns="0" tIns="0" bIns="0">
                       <a:noAutofit/>
                     </a:bodyPr>
                     <a:lstStyle/>
@@ -12758,7 +12758,7 @@
                       </a:r>
                     </a:p>
                   </a:txBody>
-                  <a:tcPr>
+                  <a:tcPr anchor="ctr" marL="109728" marR="109728" marT="45720" marB="45720">
                     <a:solidFill>
                       <a:srgbClr val="EAF0FA"/>
                     </a:solidFill>
@@ -12786,7 +12786,7 @@
                 </a:tc>
                 <a:tc>
                   <a:txBody>
-                    <a:bodyPr wrap="square" anchor="ctr" lIns="82296" rIns="82296" tIns="82296" bIns="82296">
+                    <a:bodyPr wrap="square" anchor="ctr" lIns="0" rIns="0" tIns="0" bIns="0">
                       <a:noAutofit/>
                     </a:bodyPr>
                     <a:lstStyle/>
@@ -12814,7 +12814,7 @@
                       </a:r>
                     </a:p>
                   </a:txBody>
-                  <a:tcPr>
+                  <a:tcPr anchor="ctr" marL="109728" marR="109728" marT="45720" marB="45720">
                     <a:solidFill>
                       <a:srgbClr val="EAF0FA"/>
                     </a:solidFill>
@@ -12844,7 +12844,7 @@
               <a:tr h="333756">
                 <a:tc>
                   <a:txBody>
-                    <a:bodyPr wrap="square" anchor="ctr" lIns="82296" rIns="82296" tIns="82296" bIns="82296">
+                    <a:bodyPr wrap="square" anchor="ctr" lIns="0" rIns="0" tIns="0" bIns="0">
                       <a:noAutofit/>
                     </a:bodyPr>
                     <a:lstStyle/>
@@ -12872,7 +12872,7 @@
                       </a:r>
                     </a:p>
                   </a:txBody>
-                  <a:tcPr>
+                  <a:tcPr anchor="ctr" marL="109728" marR="109728" marT="45720" marB="45720">
                     <a:solidFill>
                       <a:srgbClr val="FFFFFF"/>
                     </a:solidFill>
@@ -12900,7 +12900,7 @@
                 </a:tc>
                 <a:tc>
                   <a:txBody>
-                    <a:bodyPr wrap="square" anchor="ctr" lIns="82296" rIns="82296" tIns="82296" bIns="82296">
+                    <a:bodyPr wrap="square" anchor="ctr" lIns="0" rIns="0" tIns="0" bIns="0">
                       <a:noAutofit/>
                     </a:bodyPr>
                     <a:lstStyle/>
@@ -12928,7 +12928,7 @@
                       </a:r>
                     </a:p>
                   </a:txBody>
-                  <a:tcPr>
+                  <a:tcPr anchor="ctr" marL="109728" marR="109728" marT="45720" marB="45720">
                     <a:solidFill>
                       <a:srgbClr val="FFFFFF"/>
                     </a:solidFill>
@@ -12958,7 +12958,7 @@
               <a:tr h="333756">
                 <a:tc>
                   <a:txBody>
-                    <a:bodyPr wrap="square" anchor="ctr" lIns="82296" rIns="82296" tIns="82296" bIns="82296">
+                    <a:bodyPr wrap="square" anchor="ctr" lIns="0" rIns="0" tIns="0" bIns="0">
                       <a:noAutofit/>
                     </a:bodyPr>
                     <a:lstStyle/>
@@ -12986,7 +12986,7 @@
                       </a:r>
                     </a:p>
                   </a:txBody>
-                  <a:tcPr>
+                  <a:tcPr anchor="ctr" marL="109728" marR="109728" marT="45720" marB="45720">
                     <a:solidFill>
                       <a:srgbClr val="EAF0FA"/>
                     </a:solidFill>
@@ -13014,7 +13014,7 @@
                 </a:tc>
                 <a:tc>
                   <a:txBody>
-                    <a:bodyPr wrap="square" anchor="ctr" lIns="82296" rIns="82296" tIns="82296" bIns="82296">
+                    <a:bodyPr wrap="square" anchor="ctr" lIns="0" rIns="0" tIns="0" bIns="0">
                       <a:noAutofit/>
                     </a:bodyPr>
                     <a:lstStyle/>
@@ -13042,7 +13042,7 @@
                       </a:r>
                     </a:p>
                   </a:txBody>
-                  <a:tcPr>
+                  <a:tcPr anchor="ctr" marL="109728" marR="109728" marT="45720" marB="45720">
                     <a:solidFill>
                       <a:srgbClr val="EAF0FA"/>
                     </a:solidFill>
@@ -13072,7 +13072,7 @@
               <a:tr h="333756">
                 <a:tc>
                   <a:txBody>
-                    <a:bodyPr wrap="square" anchor="ctr" lIns="82296" rIns="82296" tIns="82296" bIns="82296">
+                    <a:bodyPr wrap="square" anchor="ctr" lIns="0" rIns="0" tIns="0" bIns="0">
                       <a:noAutofit/>
                     </a:bodyPr>
                     <a:lstStyle/>
@@ -13100,7 +13100,7 @@
                       </a:r>
                     </a:p>
                   </a:txBody>
-                  <a:tcPr>
+                  <a:tcPr anchor="ctr" marL="109728" marR="109728" marT="45720" marB="45720">
                     <a:solidFill>
                       <a:srgbClr val="FFFFFF"/>
                     </a:solidFill>
@@ -13128,7 +13128,7 @@
                 </a:tc>
                 <a:tc>
                   <a:txBody>
-                    <a:bodyPr wrap="square" anchor="ctr" lIns="82296" rIns="82296" tIns="82296" bIns="82296">
+                    <a:bodyPr wrap="square" anchor="ctr" lIns="0" rIns="0" tIns="0" bIns="0">
                       <a:noAutofit/>
                     </a:bodyPr>
                     <a:lstStyle/>
@@ -13156,7 +13156,7 @@
                       </a:r>
                     </a:p>
                   </a:txBody>
-                  <a:tcPr>
+                  <a:tcPr anchor="ctr" marL="109728" marR="109728" marT="45720" marB="45720">
                     <a:solidFill>
                       <a:srgbClr val="FFFFFF"/>
                     </a:solidFill>
@@ -13186,7 +13186,7 @@
               <a:tr h="333756">
                 <a:tc>
                   <a:txBody>
-                    <a:bodyPr wrap="square" anchor="ctr" lIns="82296" rIns="82296" tIns="82296" bIns="82296">
+                    <a:bodyPr wrap="square" anchor="ctr" lIns="0" rIns="0" tIns="0" bIns="0">
                       <a:noAutofit/>
                     </a:bodyPr>
                     <a:lstStyle/>
@@ -13214,7 +13214,7 @@
                       </a:r>
                     </a:p>
                   </a:txBody>
-                  <a:tcPr>
+                  <a:tcPr anchor="ctr" marL="109728" marR="109728" marT="45720" marB="45720">
                     <a:solidFill>
                       <a:srgbClr val="EAF0FA"/>
                     </a:solidFill>
@@ -13242,7 +13242,7 @@
                 </a:tc>
                 <a:tc>
                   <a:txBody>
-                    <a:bodyPr wrap="square" anchor="ctr" lIns="82296" rIns="82296" tIns="82296" bIns="82296">
+                    <a:bodyPr wrap="square" anchor="ctr" lIns="0" rIns="0" tIns="0" bIns="0">
                       <a:noAutofit/>
                     </a:bodyPr>
                     <a:lstStyle/>
@@ -13270,7 +13270,7 @@
                       </a:r>
                     </a:p>
                   </a:txBody>
-                  <a:tcPr>
+                  <a:tcPr anchor="ctr" marL="109728" marR="109728" marT="45720" marB="45720">
                     <a:solidFill>
                       <a:srgbClr val="EAF0FA"/>
                     </a:solidFill>
@@ -13300,7 +13300,7 @@
               <a:tr h="333756">
                 <a:tc>
                   <a:txBody>
-                    <a:bodyPr wrap="square" anchor="ctr" lIns="82296" rIns="82296" tIns="82296" bIns="82296">
+                    <a:bodyPr wrap="square" anchor="ctr" lIns="0" rIns="0" tIns="0" bIns="0">
                       <a:noAutofit/>
                     </a:bodyPr>
                     <a:lstStyle/>
@@ -13328,7 +13328,7 @@
                       </a:r>
                     </a:p>
                   </a:txBody>
-                  <a:tcPr>
+                  <a:tcPr anchor="ctr" marL="109728" marR="109728" marT="45720" marB="45720">
                     <a:solidFill>
                       <a:srgbClr val="FFFFFF"/>
                     </a:solidFill>
@@ -13356,7 +13356,7 @@
                 </a:tc>
                 <a:tc>
                   <a:txBody>
-                    <a:bodyPr wrap="square" anchor="ctr" lIns="82296" rIns="82296" tIns="82296" bIns="82296">
+                    <a:bodyPr wrap="square" anchor="ctr" lIns="0" rIns="0" tIns="0" bIns="0">
                       <a:noAutofit/>
                     </a:bodyPr>
                     <a:lstStyle/>
@@ -13384,7 +13384,7 @@
                       </a:r>
                     </a:p>
                   </a:txBody>
-                  <a:tcPr>
+                  <a:tcPr anchor="ctr" marL="109728" marR="109728" marT="45720" marB="45720">
                     <a:solidFill>
                       <a:srgbClr val="FFFFFF"/>
                     </a:solidFill>
@@ -13414,7 +13414,7 @@
               <a:tr h="333756">
                 <a:tc>
                   <a:txBody>
-                    <a:bodyPr wrap="square" anchor="ctr" lIns="82296" rIns="82296" tIns="82296" bIns="82296">
+                    <a:bodyPr wrap="square" anchor="ctr" lIns="0" rIns="0" tIns="0" bIns="0">
                       <a:noAutofit/>
                     </a:bodyPr>
                     <a:lstStyle/>
@@ -13442,7 +13442,7 @@
                       </a:r>
                     </a:p>
                   </a:txBody>
-                  <a:tcPr>
+                  <a:tcPr anchor="ctr" marL="109728" marR="109728" marT="45720" marB="45720">
                     <a:solidFill>
                       <a:srgbClr val="EAF0FA"/>
                     </a:solidFill>
@@ -13470,7 +13470,7 @@
                 </a:tc>
                 <a:tc>
                   <a:txBody>
-                    <a:bodyPr wrap="square" anchor="ctr" lIns="82296" rIns="82296" tIns="82296" bIns="82296">
+                    <a:bodyPr wrap="square" anchor="ctr" lIns="0" rIns="0" tIns="0" bIns="0">
                       <a:noAutofit/>
                     </a:bodyPr>
                     <a:lstStyle/>
@@ -13498,7 +13498,7 @@
                       </a:r>
                     </a:p>
                   </a:txBody>
-                  <a:tcPr>
+                  <a:tcPr anchor="ctr" marL="109728" marR="109728" marT="45720" marB="45720">
                     <a:solidFill>
                       <a:srgbClr val="EAF0FA"/>
                     </a:solidFill>
@@ -13528,7 +13528,7 @@
               <a:tr h="333756">
                 <a:tc>
                   <a:txBody>
-                    <a:bodyPr wrap="square" anchor="ctr" lIns="82296" rIns="82296" tIns="82296" bIns="82296">
+                    <a:bodyPr wrap="square" anchor="ctr" lIns="0" rIns="0" tIns="0" bIns="0">
                       <a:noAutofit/>
                     </a:bodyPr>
                     <a:lstStyle/>
@@ -13556,7 +13556,7 @@
                       </a:r>
                     </a:p>
                   </a:txBody>
-                  <a:tcPr>
+                  <a:tcPr anchor="ctr" marL="109728" marR="109728" marT="45720" marB="45720">
                     <a:solidFill>
                       <a:srgbClr val="FFFFFF"/>
                     </a:solidFill>
@@ -13584,7 +13584,7 @@
                 </a:tc>
                 <a:tc>
                   <a:txBody>
-                    <a:bodyPr wrap="square" anchor="ctr" lIns="82296" rIns="82296" tIns="82296" bIns="82296">
+                    <a:bodyPr wrap="square" anchor="ctr" lIns="0" rIns="0" tIns="0" bIns="0">
                       <a:noAutofit/>
                     </a:bodyPr>
                     <a:lstStyle/>
@@ -13612,7 +13612,7 @@
                       </a:r>
                     </a:p>
                   </a:txBody>
-                  <a:tcPr>
+                  <a:tcPr anchor="ctr" marL="109728" marR="109728" marT="45720" marB="45720">
                     <a:solidFill>
                       <a:srgbClr val="FFFFFF"/>
                     </a:solidFill>
@@ -16342,7 +16342,7 @@
         </p:nvGraphicFramePr>
         <p:xfrm>
           <a:off x="621792" y="1783080"/>
-          <a:ext cx="10927080" cy="3657600"/>
+          <a:ext cx="10927080" cy="2944368"/>
         </p:xfrm>
         <a:graphic>
           <a:graphicData uri="http://schemas.openxmlformats.org/drawingml/2006/table">
@@ -16351,15 +16351,15 @@
                 <a:tableStyleId>{5C22544A-7EE6-4342-B048-85BDC9FD1C3A}</a:tableStyleId>
               </a:tblPr>
               <a:tblGrid>
-                <a:gridCol w="2103120"/>
-                <a:gridCol w="3429000"/>
-                <a:gridCol w="3291840"/>
+                <a:gridCol w="2011680"/>
+                <a:gridCol w="3566160"/>
+                <a:gridCol w="3246120"/>
                 <a:gridCol w="2103120"/>
               </a:tblGrid>
-              <a:tr h="914400">
+              <a:tr h="420624">
                 <a:tc>
                   <a:txBody>
-                    <a:bodyPr wrap="square" anchor="ctr" lIns="82296" rIns="82296" tIns="82296" bIns="82296">
+                    <a:bodyPr wrap="square" anchor="ctr" lIns="0" rIns="0" tIns="0" bIns="0">
                       <a:noAutofit/>
                     </a:bodyPr>
                     <a:lstStyle/>
@@ -16376,7 +16376,7 @@
                         </a:spcAft>
                       </a:pPr>
                       <a:r>
-                        <a:rPr sz="1500" b="1" lang="ko-KR">
+                        <a:rPr sz="1400" b="1" lang="ko-KR">
                           <a:solidFill>
                             <a:srgbClr val="FFFFFF"/>
                           </a:solidFill>
@@ -16387,7 +16387,7 @@
                       </a:r>
                     </a:p>
                   </a:txBody>
-                  <a:tcPr>
+                  <a:tcPr anchor="ctr" marL="109728" marR="109728" marT="45720" marB="45720">
                     <a:solidFill>
                       <a:srgbClr val="0D203D"/>
                     </a:solidFill>
@@ -16415,7 +16415,7 @@
                 </a:tc>
                 <a:tc>
                   <a:txBody>
-                    <a:bodyPr wrap="square" anchor="ctr" lIns="82296" rIns="82296" tIns="82296" bIns="82296">
+                    <a:bodyPr wrap="square" anchor="ctr" lIns="0" rIns="0" tIns="0" bIns="0">
                       <a:noAutofit/>
                     </a:bodyPr>
                     <a:lstStyle/>
@@ -16432,7 +16432,7 @@
                         </a:spcAft>
                       </a:pPr>
                       <a:r>
-                        <a:rPr sz="1350" b="1" lang="ko-KR">
+                        <a:rPr sz="1300" b="1" lang="ko-KR">
                           <a:solidFill>
                             <a:srgbClr val="FFFFFF"/>
                           </a:solidFill>
@@ -16443,7 +16443,7 @@
                       </a:r>
                     </a:p>
                   </a:txBody>
-                  <a:tcPr>
+                  <a:tcPr anchor="ctr" marL="109728" marR="109728" marT="45720" marB="45720">
                     <a:solidFill>
                       <a:srgbClr val="0D203D"/>
                     </a:solidFill>
@@ -16471,7 +16471,7 @@
                 </a:tc>
                 <a:tc>
                   <a:txBody>
-                    <a:bodyPr wrap="square" anchor="ctr" lIns="82296" rIns="82296" tIns="82296" bIns="82296">
+                    <a:bodyPr wrap="square" anchor="ctr" lIns="0" rIns="0" tIns="0" bIns="0">
                       <a:noAutofit/>
                     </a:bodyPr>
                     <a:lstStyle/>
@@ -16488,7 +16488,7 @@
                         </a:spcAft>
                       </a:pPr>
                       <a:r>
-                        <a:rPr sz="1350" b="1" lang="ko-KR">
+                        <a:rPr sz="1300" b="1" lang="ko-KR">
                           <a:solidFill>
                             <a:srgbClr val="FFFFFF"/>
                           </a:solidFill>
@@ -16499,7 +16499,7 @@
                       </a:r>
                     </a:p>
                   </a:txBody>
-                  <a:tcPr>
+                  <a:tcPr anchor="ctr" marL="109728" marR="109728" marT="45720" marB="45720">
                     <a:solidFill>
                       <a:srgbClr val="0D203D"/>
                     </a:solidFill>
@@ -16527,7 +16527,7 @@
                 </a:tc>
                 <a:tc>
                   <a:txBody>
-                    <a:bodyPr wrap="square" anchor="ctr" lIns="82296" rIns="82296" tIns="82296" bIns="82296">
+                    <a:bodyPr wrap="square" anchor="ctr" lIns="0" rIns="0" tIns="0" bIns="0">
                       <a:noAutofit/>
                     </a:bodyPr>
                     <a:lstStyle/>
@@ -16544,7 +16544,7 @@
                         </a:spcAft>
                       </a:pPr>
                       <a:r>
-                        <a:rPr sz="1350" b="1" lang="ko-KR">
+                        <a:rPr sz="1300" b="1" lang="ko-KR">
                           <a:solidFill>
                             <a:srgbClr val="FFFFFF"/>
                           </a:solidFill>
@@ -16555,7 +16555,7 @@
                       </a:r>
                     </a:p>
                   </a:txBody>
-                  <a:tcPr>
+                  <a:tcPr anchor="ctr" marL="109728" marR="109728" marT="45720" marB="45720">
                     <a:solidFill>
                       <a:srgbClr val="0D203D"/>
                     </a:solidFill>
@@ -16582,10 +16582,10 @@
                   </a:tcPr>
                 </a:tc>
               </a:tr>
-              <a:tr h="914400">
+              <a:tr h="841248">
                 <a:tc>
                   <a:txBody>
-                    <a:bodyPr wrap="square" anchor="ctr" lIns="82296" rIns="82296" tIns="82296" bIns="82296">
+                    <a:bodyPr wrap="square" anchor="ctr" lIns="0" rIns="0" tIns="0" bIns="0">
                       <a:noAutofit/>
                     </a:bodyPr>
                     <a:lstStyle/>
@@ -16602,7 +16602,7 @@
                         </a:spcAft>
                       </a:pPr>
                       <a:r>
-                        <a:rPr sz="1500" b="0" lang="ko-KR">
+                        <a:rPr sz="1400" b="0" lang="ko-KR">
                           <a:solidFill>
                             <a:srgbClr val="172B49"/>
                           </a:solidFill>
@@ -16625,7 +16625,7 @@
                         </a:spcAft>
                       </a:pPr>
                       <a:r>
-                        <a:rPr sz="1500" b="0" lang="ko-KR">
+                        <a:rPr sz="1400" b="0" lang="ko-KR">
                           <a:solidFill>
                             <a:srgbClr val="172B49"/>
                           </a:solidFill>
@@ -16636,7 +16636,7 @@
                       </a:r>
                     </a:p>
                   </a:txBody>
-                  <a:tcPr>
+                  <a:tcPr anchor="ctr" marL="109728" marR="109728" marT="45720" marB="45720">
                     <a:solidFill>
                       <a:srgbClr val="FFFFFF"/>
                     </a:solidFill>
@@ -16664,7 +16664,7 @@
                 </a:tc>
                 <a:tc>
                   <a:txBody>
-                    <a:bodyPr wrap="square" anchor="ctr" lIns="82296" rIns="82296" tIns="82296" bIns="82296">
+                    <a:bodyPr wrap="square" anchor="ctr" lIns="0" rIns="0" tIns="0" bIns="0">
                       <a:noAutofit/>
                     </a:bodyPr>
                     <a:lstStyle/>
@@ -16681,7 +16681,7 @@
                         </a:spcAft>
                       </a:pPr>
                       <a:r>
-                        <a:rPr sz="1350" b="0" lang="ko-KR">
+                        <a:rPr sz="1300" b="0" lang="ko-KR">
                           <a:solidFill>
                             <a:srgbClr val="172B49"/>
                           </a:solidFill>
@@ -16704,7 +16704,7 @@
                         </a:spcAft>
                       </a:pPr>
                       <a:r>
-                        <a:rPr sz="1350" b="0" lang="ko-KR">
+                        <a:rPr sz="1300" b="0" lang="ko-KR">
                           <a:solidFill>
                             <a:srgbClr val="172B49"/>
                           </a:solidFill>
@@ -16727,7 +16727,7 @@
                         </a:spcAft>
                       </a:pPr>
                       <a:r>
-                        <a:rPr sz="1350" b="0" lang="ko-KR">
+                        <a:rPr sz="1300" b="0" lang="ko-KR">
                           <a:solidFill>
                             <a:srgbClr val="172B49"/>
                           </a:solidFill>
@@ -16738,7 +16738,7 @@
                       </a:r>
                     </a:p>
                   </a:txBody>
-                  <a:tcPr>
+                  <a:tcPr anchor="ctr" marL="109728" marR="109728" marT="45720" marB="45720">
                     <a:solidFill>
                       <a:srgbClr val="FFFFFF"/>
                     </a:solidFill>
@@ -16766,7 +16766,7 @@
                 </a:tc>
                 <a:tc>
                   <a:txBody>
-                    <a:bodyPr wrap="square" anchor="ctr" lIns="82296" rIns="82296" tIns="82296" bIns="82296">
+                    <a:bodyPr wrap="square" anchor="ctr" lIns="0" rIns="0" tIns="0" bIns="0">
                       <a:noAutofit/>
                     </a:bodyPr>
                     <a:lstStyle/>
@@ -16783,7 +16783,7 @@
                         </a:spcAft>
                       </a:pPr>
                       <a:r>
-                        <a:rPr sz="1350" b="0" lang="ko-KR">
+                        <a:rPr sz="1300" b="0" lang="ko-KR">
                           <a:solidFill>
                             <a:srgbClr val="172B49"/>
                           </a:solidFill>
@@ -16806,7 +16806,7 @@
                         </a:spcAft>
                       </a:pPr>
                       <a:r>
-                        <a:rPr sz="1350" b="0" lang="ko-KR">
+                        <a:rPr sz="1300" b="0" lang="ko-KR">
                           <a:solidFill>
                             <a:srgbClr val="172B49"/>
                           </a:solidFill>
@@ -16829,7 +16829,7 @@
                         </a:spcAft>
                       </a:pPr>
                       <a:r>
-                        <a:rPr sz="1350" b="0" lang="ko-KR">
+                        <a:rPr sz="1300" b="0" lang="ko-KR">
                           <a:solidFill>
                             <a:srgbClr val="172B49"/>
                           </a:solidFill>
@@ -16840,7 +16840,7 @@
                       </a:r>
                     </a:p>
                   </a:txBody>
-                  <a:tcPr>
+                  <a:tcPr anchor="ctr" marL="109728" marR="109728" marT="45720" marB="45720">
                     <a:solidFill>
                       <a:srgbClr val="FFFFFF"/>
                     </a:solidFill>
@@ -16868,7 +16868,7 @@
                 </a:tc>
                 <a:tc>
                   <a:txBody>
-                    <a:bodyPr wrap="square" anchor="ctr" lIns="82296" rIns="82296" tIns="82296" bIns="82296">
+                    <a:bodyPr wrap="square" anchor="ctr" lIns="0" rIns="0" tIns="0" bIns="0">
                       <a:noAutofit/>
                     </a:bodyPr>
                     <a:lstStyle/>
@@ -16885,7 +16885,7 @@
                         </a:spcAft>
                       </a:pPr>
                       <a:r>
-                        <a:rPr sz="1350" b="0" lang="ko-KR">
+                        <a:rPr sz="1300" b="0" lang="ko-KR">
                           <a:solidFill>
                             <a:srgbClr val="172B49"/>
                           </a:solidFill>
@@ -16908,7 +16908,7 @@
                         </a:spcAft>
                       </a:pPr>
                       <a:r>
-                        <a:rPr sz="1350" b="0" lang="ko-KR">
+                        <a:rPr sz="1300" b="0" lang="ko-KR">
                           <a:solidFill>
                             <a:srgbClr val="172B49"/>
                           </a:solidFill>
@@ -16919,7 +16919,7 @@
                       </a:r>
                     </a:p>
                   </a:txBody>
-                  <a:tcPr>
+                  <a:tcPr anchor="ctr" marL="109728" marR="109728" marT="45720" marB="45720">
                     <a:solidFill>
                       <a:srgbClr val="FFFFFF"/>
                     </a:solidFill>
@@ -16946,10 +16946,10 @@
                   </a:tcPr>
                 </a:tc>
               </a:tr>
-              <a:tr h="914400">
+              <a:tr h="841248">
                 <a:tc>
                   <a:txBody>
-                    <a:bodyPr wrap="square" anchor="ctr" lIns="82296" rIns="82296" tIns="82296" bIns="82296">
+                    <a:bodyPr wrap="square" anchor="ctr" lIns="0" rIns="0" tIns="0" bIns="0">
                       <a:noAutofit/>
                     </a:bodyPr>
                     <a:lstStyle/>
@@ -16966,7 +16966,7 @@
                         </a:spcAft>
                       </a:pPr>
                       <a:r>
-                        <a:rPr sz="1500" b="0" lang="ko-KR">
+                        <a:rPr sz="1400" b="0" lang="ko-KR">
                           <a:solidFill>
                             <a:srgbClr val="172B49"/>
                           </a:solidFill>
@@ -16977,7 +16977,7 @@
                       </a:r>
                     </a:p>
                   </a:txBody>
-                  <a:tcPr>
+                  <a:tcPr anchor="ctr" marL="109728" marR="109728" marT="45720" marB="45720">
                     <a:solidFill>
                       <a:srgbClr val="EAF0FA"/>
                     </a:solidFill>
@@ -17005,7 +17005,7 @@
                 </a:tc>
                 <a:tc>
                   <a:txBody>
-                    <a:bodyPr wrap="square" anchor="ctr" lIns="82296" rIns="82296" tIns="82296" bIns="82296">
+                    <a:bodyPr wrap="square" anchor="ctr" lIns="0" rIns="0" tIns="0" bIns="0">
                       <a:noAutofit/>
                     </a:bodyPr>
                     <a:lstStyle/>
@@ -17022,7 +17022,7 @@
                         </a:spcAft>
                       </a:pPr>
                       <a:r>
-                        <a:rPr sz="1350" b="0" lang="ko-KR">
+                        <a:rPr sz="1300" b="0" lang="ko-KR">
                           <a:solidFill>
                             <a:srgbClr val="172B49"/>
                           </a:solidFill>
@@ -17045,7 +17045,7 @@
                         </a:spcAft>
                       </a:pPr>
                       <a:r>
-                        <a:rPr sz="1350" b="0" lang="ko-KR">
+                        <a:rPr sz="1300" b="0" lang="ko-KR">
                           <a:solidFill>
                             <a:srgbClr val="172B49"/>
                           </a:solidFill>
@@ -17056,7 +17056,7 @@
                       </a:r>
                     </a:p>
                   </a:txBody>
-                  <a:tcPr>
+                  <a:tcPr anchor="ctr" marL="109728" marR="109728" marT="45720" marB="45720">
                     <a:solidFill>
                       <a:srgbClr val="EAF0FA"/>
                     </a:solidFill>
@@ -17084,7 +17084,7 @@
                 </a:tc>
                 <a:tc>
                   <a:txBody>
-                    <a:bodyPr wrap="square" anchor="ctr" lIns="82296" rIns="82296" tIns="82296" bIns="82296">
+                    <a:bodyPr wrap="square" anchor="ctr" lIns="0" rIns="0" tIns="0" bIns="0">
                       <a:noAutofit/>
                     </a:bodyPr>
                     <a:lstStyle/>
@@ -17101,7 +17101,7 @@
                         </a:spcAft>
                       </a:pPr>
                       <a:r>
-                        <a:rPr sz="1350" b="0" lang="ko-KR">
+                        <a:rPr sz="1300" b="0" lang="ko-KR">
                           <a:solidFill>
                             <a:srgbClr val="172B49"/>
                           </a:solidFill>
@@ -17124,7 +17124,7 @@
                         </a:spcAft>
                       </a:pPr>
                       <a:r>
-                        <a:rPr sz="1350" b="0" lang="ko-KR">
+                        <a:rPr sz="1300" b="0" lang="ko-KR">
                           <a:solidFill>
                             <a:srgbClr val="172B49"/>
                           </a:solidFill>
@@ -17135,7 +17135,7 @@
                       </a:r>
                     </a:p>
                   </a:txBody>
-                  <a:tcPr>
+                  <a:tcPr anchor="ctr" marL="109728" marR="109728" marT="45720" marB="45720">
                     <a:solidFill>
                       <a:srgbClr val="EAF0FA"/>
                     </a:solidFill>
@@ -17163,7 +17163,7 @@
                 </a:tc>
                 <a:tc>
                   <a:txBody>
-                    <a:bodyPr wrap="square" anchor="ctr" lIns="82296" rIns="82296" tIns="82296" bIns="82296">
+                    <a:bodyPr wrap="square" anchor="ctr" lIns="0" rIns="0" tIns="0" bIns="0">
                       <a:noAutofit/>
                     </a:bodyPr>
                     <a:lstStyle/>
@@ -17180,7 +17180,7 @@
                         </a:spcAft>
                       </a:pPr>
                       <a:r>
-                        <a:rPr sz="1350" b="0" lang="ko-KR">
+                        <a:rPr sz="1300" b="0" lang="ko-KR">
                           <a:solidFill>
                             <a:srgbClr val="172B49"/>
                           </a:solidFill>
@@ -17203,7 +17203,7 @@
                         </a:spcAft>
                       </a:pPr>
                       <a:r>
-                        <a:rPr sz="1350" b="0" lang="ko-KR">
+                        <a:rPr sz="1300" b="0" lang="ko-KR">
                           <a:solidFill>
                             <a:srgbClr val="172B49"/>
                           </a:solidFill>
@@ -17214,7 +17214,7 @@
                       </a:r>
                     </a:p>
                   </a:txBody>
-                  <a:tcPr>
+                  <a:tcPr anchor="ctr" marL="109728" marR="109728" marT="45720" marB="45720">
                     <a:solidFill>
                       <a:srgbClr val="EAF0FA"/>
                     </a:solidFill>
@@ -17241,10 +17241,10 @@
                   </a:tcPr>
                 </a:tc>
               </a:tr>
-              <a:tr h="914400">
+              <a:tr h="841248">
                 <a:tc>
                   <a:txBody>
-                    <a:bodyPr wrap="square" anchor="ctr" lIns="82296" rIns="82296" tIns="82296" bIns="82296">
+                    <a:bodyPr wrap="square" anchor="ctr" lIns="0" rIns="0" tIns="0" bIns="0">
                       <a:noAutofit/>
                     </a:bodyPr>
                     <a:lstStyle/>
@@ -17261,7 +17261,7 @@
                         </a:spcAft>
                       </a:pPr>
                       <a:r>
-                        <a:rPr sz="1500" b="0" lang="ko-KR">
+                        <a:rPr sz="1400" b="0" lang="ko-KR">
                           <a:solidFill>
                             <a:srgbClr val="172B49"/>
                           </a:solidFill>
@@ -17272,7 +17272,7 @@
                       </a:r>
                     </a:p>
                   </a:txBody>
-                  <a:tcPr>
+                  <a:tcPr anchor="ctr" marL="109728" marR="109728" marT="45720" marB="45720">
                     <a:solidFill>
                       <a:srgbClr val="FFFFFF"/>
                     </a:solidFill>
@@ -17300,7 +17300,7 @@
                 </a:tc>
                 <a:tc>
                   <a:txBody>
-                    <a:bodyPr wrap="square" anchor="ctr" lIns="82296" rIns="82296" tIns="82296" bIns="82296">
+                    <a:bodyPr wrap="square" anchor="ctr" lIns="0" rIns="0" tIns="0" bIns="0">
                       <a:noAutofit/>
                     </a:bodyPr>
                     <a:lstStyle/>
@@ -17317,7 +17317,7 @@
                         </a:spcAft>
                       </a:pPr>
                       <a:r>
-                        <a:rPr sz="1350" b="0" lang="ko-KR">
+                        <a:rPr sz="1300" b="0" lang="ko-KR">
                           <a:solidFill>
                             <a:srgbClr val="172B49"/>
                           </a:solidFill>
@@ -17340,7 +17340,7 @@
                         </a:spcAft>
                       </a:pPr>
                       <a:r>
-                        <a:rPr sz="1350" b="0" lang="ko-KR">
+                        <a:rPr sz="1300" b="0" lang="ko-KR">
                           <a:solidFill>
                             <a:srgbClr val="172B49"/>
                           </a:solidFill>
@@ -17351,7 +17351,7 @@
                       </a:r>
                     </a:p>
                   </a:txBody>
-                  <a:tcPr>
+                  <a:tcPr anchor="ctr" marL="109728" marR="109728" marT="45720" marB="45720">
                     <a:solidFill>
                       <a:srgbClr val="FFFFFF"/>
                     </a:solidFill>
@@ -17379,7 +17379,7 @@
                 </a:tc>
                 <a:tc>
                   <a:txBody>
-                    <a:bodyPr wrap="square" anchor="ctr" lIns="82296" rIns="82296" tIns="82296" bIns="82296">
+                    <a:bodyPr wrap="square" anchor="ctr" lIns="0" rIns="0" tIns="0" bIns="0">
                       <a:noAutofit/>
                     </a:bodyPr>
                     <a:lstStyle/>
@@ -17396,7 +17396,7 @@
                         </a:spcAft>
                       </a:pPr>
                       <a:r>
-                        <a:rPr sz="1350" b="0" lang="ko-KR">
+                        <a:rPr sz="1300" b="0" lang="ko-KR">
                           <a:solidFill>
                             <a:srgbClr val="172B49"/>
                           </a:solidFill>
@@ -17419,7 +17419,7 @@
                         </a:spcAft>
                       </a:pPr>
                       <a:r>
-                        <a:rPr sz="1350" b="0" lang="ko-KR">
+                        <a:rPr sz="1300" b="0" lang="ko-KR">
                           <a:solidFill>
                             <a:srgbClr val="172B49"/>
                           </a:solidFill>
@@ -17442,7 +17442,7 @@
                         </a:spcAft>
                       </a:pPr>
                       <a:r>
-                        <a:rPr sz="1350" b="0" lang="ko-KR">
+                        <a:rPr sz="1300" b="0" lang="ko-KR">
                           <a:solidFill>
                             <a:srgbClr val="172B49"/>
                           </a:solidFill>
@@ -17453,7 +17453,7 @@
                       </a:r>
                     </a:p>
                   </a:txBody>
-                  <a:tcPr>
+                  <a:tcPr anchor="ctr" marL="109728" marR="109728" marT="45720" marB="45720">
                     <a:solidFill>
                       <a:srgbClr val="FFFFFF"/>
                     </a:solidFill>
@@ -17481,7 +17481,7 @@
                 </a:tc>
                 <a:tc>
                   <a:txBody>
-                    <a:bodyPr wrap="square" anchor="ctr" lIns="82296" rIns="82296" tIns="82296" bIns="82296">
+                    <a:bodyPr wrap="square" anchor="ctr" lIns="0" rIns="0" tIns="0" bIns="0">
                       <a:noAutofit/>
                     </a:bodyPr>
                     <a:lstStyle/>
@@ -17498,7 +17498,7 @@
                         </a:spcAft>
                       </a:pPr>
                       <a:r>
-                        <a:rPr sz="1350" b="0" lang="ko-KR">
+                        <a:rPr sz="1300" b="0" lang="ko-KR">
                           <a:solidFill>
                             <a:srgbClr val="172B49"/>
                           </a:solidFill>
@@ -17521,7 +17521,7 @@
                         </a:spcAft>
                       </a:pPr>
                       <a:r>
-                        <a:rPr sz="1350" b="0" lang="ko-KR">
+                        <a:rPr sz="1300" b="0" lang="ko-KR">
                           <a:solidFill>
                             <a:srgbClr val="172B49"/>
                           </a:solidFill>
@@ -17532,7 +17532,7 @@
                       </a:r>
                     </a:p>
                   </a:txBody>
-                  <a:tcPr>
+                  <a:tcPr anchor="ctr" marL="109728" marR="109728" marT="45720" marB="45720">
                     <a:solidFill>
                       <a:srgbClr val="FFFFFF"/>
                     </a:solidFill>
@@ -18350,7 +18350,7 @@
         </p:nvGraphicFramePr>
         <p:xfrm>
           <a:off x="621792" y="3922776"/>
-          <a:ext cx="10808208" cy="1828800"/>
+          <a:ext cx="10808208" cy="1865376"/>
         </p:xfrm>
         <a:graphic>
           <a:graphicData uri="http://schemas.openxmlformats.org/drawingml/2006/table">
@@ -18363,10 +18363,10 @@
                 <a:gridCol w="3602736"/>
                 <a:gridCol w="3602736"/>
               </a:tblGrid>
-              <a:tr h="365760">
+              <a:tr h="402336">
                 <a:tc>
                   <a:txBody>
-                    <a:bodyPr wrap="square" anchor="ctr" lIns="82296" rIns="82296" tIns="82296" bIns="82296">
+                    <a:bodyPr wrap="square" anchor="ctr" lIns="0" rIns="0" tIns="0" bIns="0">
                       <a:noAutofit/>
                     </a:bodyPr>
                     <a:lstStyle/>
@@ -18394,7 +18394,7 @@
                       </a:r>
                     </a:p>
                   </a:txBody>
-                  <a:tcPr>
+                  <a:tcPr anchor="ctr" marL="109728" marR="109728" marT="45720" marB="45720">
                     <a:solidFill>
                       <a:srgbClr val="0D203D"/>
                     </a:solidFill>
@@ -18422,7 +18422,7 @@
                 </a:tc>
                 <a:tc>
                   <a:txBody>
-                    <a:bodyPr wrap="square" anchor="ctr" lIns="82296" rIns="82296" tIns="82296" bIns="82296">
+                    <a:bodyPr wrap="square" anchor="ctr" lIns="0" rIns="0" tIns="0" bIns="0">
                       <a:noAutofit/>
                     </a:bodyPr>
                     <a:lstStyle/>
@@ -18450,7 +18450,7 @@
                       </a:r>
                     </a:p>
                   </a:txBody>
-                  <a:tcPr>
+                  <a:tcPr anchor="ctr" marL="109728" marR="109728" marT="45720" marB="45720">
                     <a:solidFill>
                       <a:srgbClr val="0D203D"/>
                     </a:solidFill>
@@ -18478,7 +18478,7 @@
                 </a:tc>
                 <a:tc>
                   <a:txBody>
-                    <a:bodyPr wrap="square" anchor="ctr" lIns="82296" rIns="82296" tIns="82296" bIns="82296">
+                    <a:bodyPr wrap="square" anchor="ctr" lIns="0" rIns="0" tIns="0" bIns="0">
                       <a:noAutofit/>
                     </a:bodyPr>
                     <a:lstStyle/>
@@ -18506,7 +18506,7 @@
                       </a:r>
                     </a:p>
                   </a:txBody>
-                  <a:tcPr>
+                  <a:tcPr anchor="ctr" marL="109728" marR="109728" marT="45720" marB="45720">
                     <a:solidFill>
                       <a:srgbClr val="0D203D"/>
                     </a:solidFill>
@@ -18536,7 +18536,7 @@
               <a:tr h="365760">
                 <a:tc>
                   <a:txBody>
-                    <a:bodyPr wrap="square" anchor="ctr" lIns="82296" rIns="82296" tIns="82296" bIns="82296">
+                    <a:bodyPr wrap="square" anchor="ctr" lIns="0" rIns="0" tIns="0" bIns="0">
                       <a:noAutofit/>
                     </a:bodyPr>
                     <a:lstStyle/>
@@ -18564,7 +18564,7 @@
                       </a:r>
                     </a:p>
                   </a:txBody>
-                  <a:tcPr>
+                  <a:tcPr anchor="ctr" marL="109728" marR="109728" marT="45720" marB="45720">
                     <a:solidFill>
                       <a:srgbClr val="FFFFFF"/>
                     </a:solidFill>
@@ -18592,7 +18592,7 @@
                 </a:tc>
                 <a:tc>
                   <a:txBody>
-                    <a:bodyPr wrap="square" anchor="ctr" lIns="82296" rIns="82296" tIns="82296" bIns="82296">
+                    <a:bodyPr wrap="square" anchor="ctr" lIns="0" rIns="0" tIns="0" bIns="0">
                       <a:noAutofit/>
                     </a:bodyPr>
                     <a:lstStyle/>
@@ -18620,7 +18620,7 @@
                       </a:r>
                     </a:p>
                   </a:txBody>
-                  <a:tcPr>
+                  <a:tcPr anchor="ctr" marL="109728" marR="109728" marT="45720" marB="45720">
                     <a:solidFill>
                       <a:srgbClr val="FFFFFF"/>
                     </a:solidFill>
@@ -18648,7 +18648,7 @@
                 </a:tc>
                 <a:tc>
                   <a:txBody>
-                    <a:bodyPr wrap="square" anchor="ctr" lIns="82296" rIns="82296" tIns="82296" bIns="82296">
+                    <a:bodyPr wrap="square" anchor="ctr" lIns="0" rIns="0" tIns="0" bIns="0">
                       <a:noAutofit/>
                     </a:bodyPr>
                     <a:lstStyle/>
@@ -18676,7 +18676,7 @@
                       </a:r>
                     </a:p>
                   </a:txBody>
-                  <a:tcPr>
+                  <a:tcPr anchor="ctr" marL="109728" marR="109728" marT="45720" marB="45720">
                     <a:solidFill>
                       <a:srgbClr val="FFFFFF"/>
                     </a:solidFill>
@@ -18706,7 +18706,7 @@
               <a:tr h="365760">
                 <a:tc>
                   <a:txBody>
-                    <a:bodyPr wrap="square" anchor="ctr" lIns="82296" rIns="82296" tIns="82296" bIns="82296">
+                    <a:bodyPr wrap="square" anchor="ctr" lIns="0" rIns="0" tIns="0" bIns="0">
                       <a:noAutofit/>
                     </a:bodyPr>
                     <a:lstStyle/>
@@ -18734,7 +18734,7 @@
                       </a:r>
                     </a:p>
                   </a:txBody>
-                  <a:tcPr>
+                  <a:tcPr anchor="ctr" marL="109728" marR="109728" marT="45720" marB="45720">
                     <a:solidFill>
                       <a:srgbClr val="EAF0FA"/>
                     </a:solidFill>
@@ -18762,7 +18762,7 @@
                 </a:tc>
                 <a:tc>
                   <a:txBody>
-                    <a:bodyPr wrap="square" anchor="ctr" lIns="82296" rIns="82296" tIns="82296" bIns="82296">
+                    <a:bodyPr wrap="square" anchor="ctr" lIns="0" rIns="0" tIns="0" bIns="0">
                       <a:noAutofit/>
                     </a:bodyPr>
                     <a:lstStyle/>
@@ -18790,7 +18790,7 @@
                       </a:r>
                     </a:p>
                   </a:txBody>
-                  <a:tcPr>
+                  <a:tcPr anchor="ctr" marL="109728" marR="109728" marT="45720" marB="45720">
                     <a:solidFill>
                       <a:srgbClr val="EAF0FA"/>
                     </a:solidFill>
@@ -18818,7 +18818,7 @@
                 </a:tc>
                 <a:tc>
                   <a:txBody>
-                    <a:bodyPr wrap="square" anchor="ctr" lIns="82296" rIns="82296" tIns="82296" bIns="82296">
+                    <a:bodyPr wrap="square" anchor="ctr" lIns="0" rIns="0" tIns="0" bIns="0">
                       <a:noAutofit/>
                     </a:bodyPr>
                     <a:lstStyle/>
@@ -18846,7 +18846,7 @@
                       </a:r>
                     </a:p>
                   </a:txBody>
-                  <a:tcPr>
+                  <a:tcPr anchor="ctr" marL="109728" marR="109728" marT="45720" marB="45720">
                     <a:solidFill>
                       <a:srgbClr val="EAF0FA"/>
                     </a:solidFill>
@@ -18876,7 +18876,7 @@
               <a:tr h="365760">
                 <a:tc>
                   <a:txBody>
-                    <a:bodyPr wrap="square" anchor="ctr" lIns="82296" rIns="82296" tIns="82296" bIns="82296">
+                    <a:bodyPr wrap="square" anchor="ctr" lIns="0" rIns="0" tIns="0" bIns="0">
                       <a:noAutofit/>
                     </a:bodyPr>
                     <a:lstStyle/>
@@ -18904,7 +18904,7 @@
                       </a:r>
                     </a:p>
                   </a:txBody>
-                  <a:tcPr>
+                  <a:tcPr anchor="ctr" marL="109728" marR="109728" marT="45720" marB="45720">
                     <a:solidFill>
                       <a:srgbClr val="FFFFFF"/>
                     </a:solidFill>
@@ -18932,7 +18932,7 @@
                 </a:tc>
                 <a:tc>
                   <a:txBody>
-                    <a:bodyPr wrap="square" anchor="ctr" lIns="82296" rIns="82296" tIns="82296" bIns="82296">
+                    <a:bodyPr wrap="square" anchor="ctr" lIns="0" rIns="0" tIns="0" bIns="0">
                       <a:noAutofit/>
                     </a:bodyPr>
                     <a:lstStyle/>
@@ -18960,7 +18960,7 @@
                       </a:r>
                     </a:p>
                   </a:txBody>
-                  <a:tcPr>
+                  <a:tcPr anchor="ctr" marL="109728" marR="109728" marT="45720" marB="45720">
                     <a:solidFill>
                       <a:srgbClr val="FFFFFF"/>
                     </a:solidFill>
@@ -18988,7 +18988,7 @@
                 </a:tc>
                 <a:tc>
                   <a:txBody>
-                    <a:bodyPr wrap="square" anchor="ctr" lIns="82296" rIns="82296" tIns="82296" bIns="82296">
+                    <a:bodyPr wrap="square" anchor="ctr" lIns="0" rIns="0" tIns="0" bIns="0">
                       <a:noAutofit/>
                     </a:bodyPr>
                     <a:lstStyle/>
@@ -19016,7 +19016,7 @@
                       </a:r>
                     </a:p>
                   </a:txBody>
-                  <a:tcPr>
+                  <a:tcPr anchor="ctr" marL="109728" marR="109728" marT="45720" marB="45720">
                     <a:solidFill>
                       <a:srgbClr val="FFFFFF"/>
                     </a:solidFill>
@@ -19046,7 +19046,7 @@
               <a:tr h="365760">
                 <a:tc>
                   <a:txBody>
-                    <a:bodyPr wrap="square" anchor="ctr" lIns="82296" rIns="82296" tIns="82296" bIns="82296">
+                    <a:bodyPr wrap="square" anchor="ctr" lIns="0" rIns="0" tIns="0" bIns="0">
                       <a:noAutofit/>
                     </a:bodyPr>
                     <a:lstStyle/>
@@ -19074,7 +19074,7 @@
                       </a:r>
                     </a:p>
                   </a:txBody>
-                  <a:tcPr>
+                  <a:tcPr anchor="ctr" marL="109728" marR="109728" marT="45720" marB="45720">
                     <a:solidFill>
                       <a:srgbClr val="EAF0FA"/>
                     </a:solidFill>
@@ -19102,7 +19102,7 @@
                 </a:tc>
                 <a:tc>
                   <a:txBody>
-                    <a:bodyPr wrap="square" anchor="ctr" lIns="82296" rIns="82296" tIns="82296" bIns="82296">
+                    <a:bodyPr wrap="square" anchor="ctr" lIns="0" rIns="0" tIns="0" bIns="0">
                       <a:noAutofit/>
                     </a:bodyPr>
                     <a:lstStyle/>
@@ -19130,7 +19130,7 @@
                       </a:r>
                     </a:p>
                   </a:txBody>
-                  <a:tcPr>
+                  <a:tcPr anchor="ctr" marL="109728" marR="109728" marT="45720" marB="45720">
                     <a:solidFill>
                       <a:srgbClr val="EAF0FA"/>
                     </a:solidFill>
@@ -19158,7 +19158,7 @@
                 </a:tc>
                 <a:tc>
                   <a:txBody>
-                    <a:bodyPr wrap="square" anchor="ctr" lIns="82296" rIns="82296" tIns="82296" bIns="82296">
+                    <a:bodyPr wrap="square" anchor="ctr" lIns="0" rIns="0" tIns="0" bIns="0">
                       <a:noAutofit/>
                     </a:bodyPr>
                     <a:lstStyle/>
@@ -19186,7 +19186,7 @@
                       </a:r>
                     </a:p>
                   </a:txBody>
-                  <a:tcPr>
+                  <a:tcPr anchor="ctr" marL="109728" marR="109728" marT="45720" marB="45720">
                     <a:solidFill>
                       <a:srgbClr val="EAF0FA"/>
                     </a:solidFill>
